--- a/abp-community-talks-2026.05.pptx
+++ b/abp-community-talks-2026.05.pptx
@@ -5,7 +5,7 @@
     <p:sldMasterId id="2147483648" r:id="rId1"/>
   </p:sldMasterIdLst>
   <p:notesMasterIdLst>
-    <p:notesMasterId r:id="rId14"/>
+    <p:notesMasterId r:id="rId17"/>
   </p:notesMasterIdLst>
   <p:sldIdLst>
     <p:sldId id="323" r:id="rId2"/>
@@ -20,30 +20,33 @@
     <p:sldId id="310" r:id="rId11"/>
     <p:sldId id="324" r:id="rId12"/>
     <p:sldId id="346" r:id="rId13"/>
+    <p:sldId id="347" r:id="rId14"/>
+    <p:sldId id="256" r:id="rId15"/>
+    <p:sldId id="257" r:id="rId16"/>
   </p:sldIdLst>
   <p:sldSz cx="12192000" cy="6858000"/>
   <p:notesSz cx="6858000" cy="9144000"/>
   <p:embeddedFontLst>
     <p:embeddedFont>
-      <p:font typeface="Lexend" pitchFamily="2" charset="-94"/>
-      <p:regular r:id="rId15"/>
-      <p:bold r:id="rId16"/>
-    </p:embeddedFont>
-    <p:embeddedFont>
-      <p:font typeface="Lexend Light" pitchFamily="2" charset="-94"/>
-      <p:regular r:id="rId17"/>
-    </p:embeddedFont>
-    <p:embeddedFont>
-      <p:font typeface="Play" panose="020B0604020202020204" charset="0"/>
+      <p:font typeface="Lexend" panose="020B0604020202020204" charset="-94"/>
       <p:regular r:id="rId18"/>
       <p:bold r:id="rId19"/>
     </p:embeddedFont>
     <p:embeddedFont>
+      <p:font typeface="Lexend Light" panose="020B0604020202020204" charset="-94"/>
+      <p:regular r:id="rId20"/>
+    </p:embeddedFont>
+    <p:embeddedFont>
+      <p:font typeface="Play" panose="020B0604020202020204" charset="0"/>
+      <p:regular r:id="rId21"/>
+      <p:bold r:id="rId22"/>
+    </p:embeddedFont>
+    <p:embeddedFont>
       <p:font typeface="Poppins" panose="00000500000000000000" pitchFamily="2" charset="-94"/>
-      <p:regular r:id="rId20"/>
-      <p:bold r:id="rId21"/>
-      <p:italic r:id="rId22"/>
-      <p:boldItalic r:id="rId23"/>
+      <p:regular r:id="rId23"/>
+      <p:bold r:id="rId24"/>
+      <p:italic r:id="rId25"/>
+      <p:boldItalic r:id="rId26"/>
     </p:embeddedFont>
   </p:embeddedFontLst>
   <p:defaultTextStyle>
@@ -280,7 +283,7 @@
       <p15:sldGuideLst xmlns:p15="http://schemas.microsoft.com/office/powerpoint/2012/main"/>
     </p:ext>
     <p:ext uri="GoogleSlidesCustomDataVersion2">
-      <go:slidesCustomData xmlns:go="http://customooxmlschemas.google.com/" xmlns:ahyp="http://schemas.microsoft.com/office/drawing/2018/hyperlinkcolor" xmlns:p15="http://schemas.microsoft.com/office/powerpoint/2012/main" xmlns:p14="http://schemas.microsoft.com/office/powerpoint/2010/main" xmlns:com="http://schemas.openxmlformats.org/drawingml/2006/compatibility" xmlns:pvml="urn:schemas-microsoft-com:office:powerpoint" xmlns:v="urn:schemas-microsoft-com:vml" xmlns:o="urn:schemas-microsoft-com:office:office" xmlns:dgm="http://schemas.openxmlformats.org/drawingml/2006/diagram" xmlns:c="http://schemas.openxmlformats.org/drawingml/2006/chart" xmlns:mv="urn:schemas-microsoft-com:mac:vml" xmlns:mc="http://schemas.openxmlformats.org/markup-compatibility/2006" xmlns="" r:id="rId48" roundtripDataSignature="AMtx7mihNSh0nE7P5bmNZynwZ07PSv3TUg=="/>
+      <go:slidesCustomData xmlns="" xmlns:mc="http://schemas.openxmlformats.org/markup-compatibility/2006" xmlns:mv="urn:schemas-microsoft-com:mac:vml" xmlns:c="http://schemas.openxmlformats.org/drawingml/2006/chart" xmlns:dgm="http://schemas.openxmlformats.org/drawingml/2006/diagram" xmlns:o="urn:schemas-microsoft-com:office:office" xmlns:v="urn:schemas-microsoft-com:vml" xmlns:pvml="urn:schemas-microsoft-com:office:powerpoint" xmlns:com="http://schemas.openxmlformats.org/drawingml/2006/compatibility" xmlns:p14="http://schemas.microsoft.com/office/powerpoint/2010/main" xmlns:p15="http://schemas.microsoft.com/office/powerpoint/2012/main" xmlns:ahyp="http://schemas.microsoft.com/office/drawing/2018/hyperlinkcolor" xmlns:go="http://customooxmlschemas.google.com/" r:id="rId48" roundtripDataSignature="AMtx7mihNSh0nE7P5bmNZynwZ07PSv3TUg=="/>
     </p:ext>
   </p:extLst>
 </p:presentation>
@@ -2328,6 +2331,277 @@
     <p:extLst>
       <p:ext uri="{BB962C8B-B14F-4D97-AF65-F5344CB8AC3E}">
         <p14:creationId xmlns:p14="http://schemas.microsoft.com/office/powerpoint/2010/main" val="2350153579"/>
+      </p:ext>
+    </p:extLst>
+  </p:cSld>
+  <p:clrMapOvr>
+    <a:masterClrMapping/>
+  </p:clrMapOvr>
+</p:notes>
+</file>
+
+<file path=ppt/notesSlides/notesSlide13.xml><?xml version="1.0" encoding="utf-8"?>
+<p:notes xmlns:a="http://schemas.openxmlformats.org/drawingml/2006/main" xmlns:r="http://schemas.openxmlformats.org/officeDocument/2006/relationships" xmlns:p="http://schemas.openxmlformats.org/presentationml/2006/main" showMasterSp="0" showMasterPhAnim="0">
+  <p:cSld>
+    <p:spTree>
+      <p:nvGrpSpPr>
+        <p:cNvPr id="1" name="Shape 103">
+          <a:extLst>
+            <a:ext uri="{FF2B5EF4-FFF2-40B4-BE49-F238E27FC236}">
+              <a16:creationId xmlns:a16="http://schemas.microsoft.com/office/drawing/2014/main" id="{16CD45C5-4100-846C-0E38-C4BA1EA4211C}"/>
+            </a:ext>
+          </a:extLst>
+        </p:cNvPr>
+        <p:cNvGrpSpPr/>
+        <p:nvPr/>
+      </p:nvGrpSpPr>
+      <p:grpSpPr>
+        <a:xfrm>
+          <a:off x="0" y="0"/>
+          <a:ext cx="0" cy="0"/>
+          <a:chOff x="0" y="0"/>
+          <a:chExt cx="0" cy="0"/>
+        </a:xfrm>
+      </p:grpSpPr>
+      <p:sp>
+        <p:nvSpPr>
+          <p:cNvPr id="104" name="Google Shape;104;p2:notes">
+            <a:extLst>
+              <a:ext uri="{FF2B5EF4-FFF2-40B4-BE49-F238E27FC236}">
+                <a16:creationId xmlns:a16="http://schemas.microsoft.com/office/drawing/2014/main" id="{3D3662A9-BF0E-309F-2D84-5413A2C339F3}"/>
+              </a:ext>
+            </a:extLst>
+          </p:cNvPr>
+          <p:cNvSpPr txBox="1">
+            <a:spLocks noGrp="1"/>
+          </p:cNvSpPr>
+          <p:nvPr>
+            <p:ph type="body" idx="1"/>
+          </p:nvPr>
+        </p:nvSpPr>
+        <p:spPr>
+          <a:xfrm>
+            <a:off x="685800" y="4400550"/>
+            <a:ext cx="5486400" cy="3600450"/>
+          </a:xfrm>
+          <a:prstGeom prst="rect">
+            <a:avLst/>
+          </a:prstGeom>
+          <a:noFill/>
+          <a:ln>
+            <a:noFill/>
+          </a:ln>
+        </p:spPr>
+        <p:txBody>
+          <a:bodyPr spcFirstLastPara="1" wrap="square" lIns="91425" tIns="45700" rIns="91425" bIns="45700" anchor="t" anchorCtr="0">
+            <a:noAutofit/>
+          </a:bodyPr>
+          <a:lstStyle/>
+          <a:p>
+            <a:pPr marL="0" lvl="0" indent="0" algn="l" rtl="0">
+              <a:lnSpc>
+                <a:spcPct val="150000"/>
+              </a:lnSpc>
+              <a:spcBef>
+                <a:spcPts val="0"/>
+              </a:spcBef>
+              <a:spcAft>
+                <a:spcPts val="0"/>
+              </a:spcAft>
+              <a:buClr>
+                <a:schemeClr val="dk1"/>
+              </a:buClr>
+              <a:buSzPts val="1100"/>
+              <a:buFont typeface="Arial"/>
+              <a:buNone/>
+            </a:pPr>
+            <a:endParaRPr lang="en-US" sz="1900" dirty="0">
+              <a:latin typeface="Poppins"/>
+              <a:ea typeface="Poppins"/>
+              <a:cs typeface="Poppins"/>
+              <a:sym typeface="Poppins"/>
+            </a:endParaRPr>
+          </a:p>
+        </p:txBody>
+      </p:sp>
+      <p:sp>
+        <p:nvSpPr>
+          <p:cNvPr id="105" name="Google Shape;105;p2:notes">
+            <a:extLst>
+              <a:ext uri="{FF2B5EF4-FFF2-40B4-BE49-F238E27FC236}">
+                <a16:creationId xmlns:a16="http://schemas.microsoft.com/office/drawing/2014/main" id="{1707955E-FD50-8521-C764-86B9ABC098F5}"/>
+              </a:ext>
+            </a:extLst>
+          </p:cNvPr>
+          <p:cNvSpPr>
+            <a:spLocks noGrp="1" noRot="1" noChangeAspect="1"/>
+          </p:cNvSpPr>
+          <p:nvPr>
+            <p:ph type="sldImg" idx="2"/>
+          </p:nvPr>
+        </p:nvSpPr>
+        <p:spPr>
+          <a:xfrm>
+            <a:off x="685800" y="1143000"/>
+            <a:ext cx="5486400" cy="3086100"/>
+          </a:xfrm>
+          <a:custGeom>
+            <a:avLst/>
+            <a:gdLst/>
+            <a:ahLst/>
+            <a:cxnLst/>
+            <a:rect l="l" t="t" r="r" b="b"/>
+            <a:pathLst>
+              <a:path w="120000" h="120000" extrusionOk="0">
+                <a:moveTo>
+                  <a:pt x="0" y="0"/>
+                </a:moveTo>
+                <a:lnTo>
+                  <a:pt x="120000" y="0"/>
+                </a:lnTo>
+                <a:lnTo>
+                  <a:pt x="120000" y="120000"/>
+                </a:lnTo>
+                <a:lnTo>
+                  <a:pt x="0" y="120000"/>
+                </a:lnTo>
+                <a:close/>
+              </a:path>
+            </a:pathLst>
+          </a:custGeom>
+          <a:noFill/>
+          <a:ln w="12700" cap="flat" cmpd="sng">
+            <a:solidFill>
+              <a:srgbClr val="000000"/>
+            </a:solidFill>
+            <a:prstDash val="solid"/>
+            <a:round/>
+            <a:headEnd type="none" w="sm" len="sm"/>
+            <a:tailEnd type="none" w="sm" len="sm"/>
+          </a:ln>
+        </p:spPr>
+      </p:sp>
+    </p:spTree>
+    <p:extLst>
+      <p:ext uri="{BB962C8B-B14F-4D97-AF65-F5344CB8AC3E}">
+        <p14:creationId xmlns:p14="http://schemas.microsoft.com/office/powerpoint/2010/main" val="1691678625"/>
+      </p:ext>
+    </p:extLst>
+  </p:cSld>
+  <p:clrMapOvr>
+    <a:masterClrMapping/>
+  </p:clrMapOvr>
+</p:notes>
+</file>
+
+<file path=ppt/notesSlides/notesSlide14.xml><?xml version="1.0" encoding="utf-8"?>
+<p:notes xmlns:a="http://schemas.openxmlformats.org/drawingml/2006/main" xmlns:r="http://schemas.openxmlformats.org/officeDocument/2006/relationships" xmlns:p="http://schemas.openxmlformats.org/presentationml/2006/main">
+  <p:cSld>
+    <p:spTree>
+      <p:nvGrpSpPr>
+        <p:cNvPr id="1" name=""/>
+        <p:cNvGrpSpPr/>
+        <p:nvPr/>
+      </p:nvGrpSpPr>
+      <p:grpSpPr>
+        <a:xfrm>
+          <a:off x="0" y="0"/>
+          <a:ext cx="0" cy="0"/>
+          <a:chOff x="0" y="0"/>
+          <a:chExt cx="0" cy="0"/>
+        </a:xfrm>
+      </p:grpSpPr>
+      <p:sp>
+        <p:nvSpPr>
+          <p:cNvPr id="2" name="Slide Image Placeholder 1"/>
+          <p:cNvSpPr>
+            <a:spLocks noGrp="1" noRot="1" noChangeAspect="1"/>
+          </p:cNvSpPr>
+          <p:nvPr>
+            <p:ph type="sldImg"/>
+          </p:nvPr>
+        </p:nvSpPr>
+        <p:spPr/>
+      </p:sp>
+      <p:sp>
+        <p:nvSpPr>
+          <p:cNvPr id="3" name="Notes Placeholder 2"/>
+          <p:cNvSpPr>
+            <a:spLocks noGrp="1"/>
+          </p:cNvSpPr>
+          <p:nvPr>
+            <p:ph type="body" idx="1"/>
+          </p:nvPr>
+        </p:nvSpPr>
+        <p:spPr/>
+        <p:txBody>
+          <a:bodyPr/>
+          <a:lstStyle/>
+          <a:p>
+            <a:endParaRPr lang="en-US" dirty="0"/>
+          </a:p>
+        </p:txBody>
+      </p:sp>
+      <p:sp>
+        <p:nvSpPr>
+          <p:cNvPr id="4" name="Slide Number Placeholder 3"/>
+          <p:cNvSpPr>
+            <a:spLocks noGrp="1"/>
+          </p:cNvSpPr>
+          <p:nvPr>
+            <p:ph type="sldNum" idx="12"/>
+          </p:nvPr>
+        </p:nvSpPr>
+        <p:spPr/>
+        <p:txBody>
+          <a:bodyPr/>
+          <a:lstStyle/>
+          <a:p>
+            <a:pPr marL="0" marR="0" lvl="0" indent="0" algn="r" rtl="0">
+              <a:lnSpc>
+                <a:spcPct val="100000"/>
+              </a:lnSpc>
+              <a:spcBef>
+                <a:spcPts val="0"/>
+              </a:spcBef>
+              <a:spcAft>
+                <a:spcPts val="0"/>
+              </a:spcAft>
+              <a:buClr>
+                <a:srgbClr val="000000"/>
+              </a:buClr>
+              <a:buSzPts val="1200"/>
+              <a:buFont typeface="Arial"/>
+              <a:buNone/>
+            </a:pPr>
+            <a:fld id="{00000000-1234-1234-1234-123412341234}" type="slidenum">
+              <a:rPr lang="tr-TR" sz="1200" b="0" i="0" u="none" strike="noStrike" cap="none" smtClean="0">
+                <a:solidFill>
+                  <a:schemeClr val="dk1"/>
+                </a:solidFill>
+                <a:latin typeface="Arial"/>
+                <a:ea typeface="Arial"/>
+                <a:cs typeface="Arial"/>
+                <a:sym typeface="Arial"/>
+              </a:rPr>
+              <a:t>15</a:t>
+            </a:fld>
+            <a:endParaRPr lang="tr-TR" sz="1200" b="0" i="0" u="none" strike="noStrike" cap="none" dirty="0">
+              <a:solidFill>
+                <a:schemeClr val="dk1"/>
+              </a:solidFill>
+              <a:latin typeface="Arial"/>
+              <a:ea typeface="Arial"/>
+              <a:cs typeface="Arial"/>
+              <a:sym typeface="Arial"/>
+            </a:endParaRPr>
+          </a:p>
+        </p:txBody>
+      </p:sp>
+    </p:spTree>
+    <p:extLst>
+      <p:ext uri="{BB962C8B-B14F-4D97-AF65-F5344CB8AC3E}">
+        <p14:creationId xmlns:p14="http://schemas.microsoft.com/office/powerpoint/2010/main" val="2214020140"/>
       </p:ext>
     </p:extLst>
   </p:cSld>
@@ -17341,6 +17615,3272 @@
 </p:sld>
 </file>
 
+<file path=ppt/slides/slide13.xml><?xml version="1.0" encoding="utf-8"?>
+<p:sld xmlns:a="http://schemas.openxmlformats.org/drawingml/2006/main" xmlns:r="http://schemas.openxmlformats.org/officeDocument/2006/relationships" xmlns:p="http://schemas.openxmlformats.org/presentationml/2006/main">
+  <p:cSld>
+    <p:spTree>
+      <p:nvGrpSpPr>
+        <p:cNvPr id="1" name="Shape 106">
+          <a:extLst>
+            <a:ext uri="{FF2B5EF4-FFF2-40B4-BE49-F238E27FC236}">
+              <a16:creationId xmlns:a16="http://schemas.microsoft.com/office/drawing/2014/main" id="{F499619B-CCB9-7E46-C541-7F12371982B5}"/>
+            </a:ext>
+          </a:extLst>
+        </p:cNvPr>
+        <p:cNvGrpSpPr/>
+        <p:nvPr/>
+      </p:nvGrpSpPr>
+      <p:grpSpPr>
+        <a:xfrm>
+          <a:off x="0" y="0"/>
+          <a:ext cx="0" cy="0"/>
+          <a:chOff x="0" y="0"/>
+          <a:chExt cx="0" cy="0"/>
+        </a:xfrm>
+      </p:grpSpPr>
+      <p:sp>
+        <p:nvSpPr>
+          <p:cNvPr id="3" name="TextBox 2">
+            <a:extLst>
+              <a:ext uri="{FF2B5EF4-FFF2-40B4-BE49-F238E27FC236}">
+                <a16:creationId xmlns:a16="http://schemas.microsoft.com/office/drawing/2014/main" id="{6BD6D5E9-FB76-9CF0-F589-34E4B06F4E83}"/>
+              </a:ext>
+            </a:extLst>
+          </p:cNvPr>
+          <p:cNvSpPr txBox="1"/>
+          <p:nvPr/>
+        </p:nvSpPr>
+        <p:spPr>
+          <a:xfrm>
+            <a:off x="1256492" y="5412879"/>
+            <a:ext cx="11021001" cy="1131977"/>
+          </a:xfrm>
+          <a:prstGeom prst="rect">
+            <a:avLst/>
+          </a:prstGeom>
+          <a:noFill/>
+        </p:spPr>
+        <p:txBody>
+          <a:bodyPr wrap="square">
+            <a:spAutoFit/>
+          </a:bodyPr>
+          <a:lstStyle/>
+          <a:p>
+            <a:pPr marL="285750" indent="-285750">
+              <a:lnSpc>
+                <a:spcPct val="150000"/>
+              </a:lnSpc>
+              <a:buClr>
+                <a:schemeClr val="bg1">
+                  <a:lumMod val="65000"/>
+                </a:schemeClr>
+              </a:buClr>
+              <a:buFont typeface="Arial" panose="020B0604020202020204" pitchFamily="34" charset="0"/>
+              <a:buChar char="•"/>
+            </a:pPr>
+            <a:r>
+              <a:rPr lang="en-US" sz="2400" b="1" dirty="0">
+                <a:solidFill>
+                  <a:schemeClr val="bg1">
+                    <a:lumMod val="50000"/>
+                  </a:schemeClr>
+                </a:solidFill>
+              </a:rPr>
+              <a:t>INTRODUCTION PAGE </a:t>
+            </a:r>
+            <a:r>
+              <a:rPr lang="en-US" sz="2400" b="1" dirty="0">
+                <a:solidFill>
+                  <a:schemeClr val="bg1">
+                    <a:lumMod val="50000"/>
+                  </a:schemeClr>
+                </a:solidFill>
+                <a:sym typeface="Wingdings" panose="05000000000000000000" pitchFamily="2" charset="2"/>
+              </a:rPr>
+              <a:t> </a:t>
+            </a:r>
+            <a:r>
+              <a:rPr lang="en-US" sz="2400" dirty="0">
+                <a:solidFill>
+                  <a:schemeClr val="bg1">
+                    <a:lumMod val="50000"/>
+                  </a:schemeClr>
+                </a:solidFill>
+                <a:hlinkClick r:id="rId3"/>
+              </a:rPr>
+              <a:t>https://abp.io/</a:t>
+            </a:r>
+            <a:r>
+              <a:rPr lang="en-US" sz="2400" b="1" dirty="0">
+                <a:solidFill>
+                  <a:schemeClr val="bg1">
+                    <a:lumMod val="50000"/>
+                  </a:schemeClr>
+                </a:solidFill>
+                <a:hlinkClick r:id="rId3"/>
+              </a:rPr>
+              <a:t>low-code</a:t>
+            </a:r>
+            <a:r>
+              <a:rPr lang="en-US" sz="2400" b="1" dirty="0">
+                <a:solidFill>
+                  <a:schemeClr val="bg1">
+                    <a:lumMod val="50000"/>
+                  </a:schemeClr>
+                </a:solidFill>
+              </a:rPr>
+              <a:t> </a:t>
+            </a:r>
+          </a:p>
+          <a:p>
+            <a:pPr marL="285750" indent="-285750">
+              <a:lnSpc>
+                <a:spcPct val="150000"/>
+              </a:lnSpc>
+              <a:buClr>
+                <a:schemeClr val="bg1">
+                  <a:lumMod val="65000"/>
+                </a:schemeClr>
+              </a:buClr>
+              <a:buFont typeface="Arial" panose="020B0604020202020204" pitchFamily="34" charset="0"/>
+              <a:buChar char="•"/>
+            </a:pPr>
+            <a:r>
+              <a:rPr lang="en-US" sz="2400" b="1" dirty="0">
+                <a:solidFill>
+                  <a:schemeClr val="bg1">
+                    <a:lumMod val="50000"/>
+                  </a:schemeClr>
+                </a:solidFill>
+              </a:rPr>
+              <a:t>TECHNICAL DOCS </a:t>
+            </a:r>
+            <a:r>
+              <a:rPr lang="en-US" sz="2400" dirty="0">
+                <a:solidFill>
+                  <a:schemeClr val="bg1">
+                    <a:lumMod val="50000"/>
+                  </a:schemeClr>
+                </a:solidFill>
+                <a:sym typeface="Wingdings" panose="05000000000000000000" pitchFamily="2" charset="2"/>
+              </a:rPr>
+              <a:t> </a:t>
+            </a:r>
+            <a:r>
+              <a:rPr lang="en-US" sz="2400" dirty="0">
+                <a:hlinkClick r:id="rId4"/>
+              </a:rPr>
+              <a:t>https://abp.io/</a:t>
+            </a:r>
+            <a:r>
+              <a:rPr lang="en-US" sz="2400" b="1" dirty="0">
+                <a:hlinkClick r:id="rId4"/>
+              </a:rPr>
+              <a:t>docs/latest/low-code</a:t>
+            </a:r>
+            <a:endParaRPr lang="tr-TR" sz="2400" b="1" dirty="0">
+              <a:solidFill>
+                <a:schemeClr val="bg1">
+                  <a:lumMod val="50000"/>
+                </a:schemeClr>
+              </a:solidFill>
+            </a:endParaRPr>
+          </a:p>
+        </p:txBody>
+      </p:sp>
+      <p:sp>
+        <p:nvSpPr>
+          <p:cNvPr id="4" name="TextBox 3">
+            <a:extLst>
+              <a:ext uri="{FF2B5EF4-FFF2-40B4-BE49-F238E27FC236}">
+                <a16:creationId xmlns:a16="http://schemas.microsoft.com/office/drawing/2014/main" id="{79C10246-9532-BFBC-7171-A9984DFCA485}"/>
+              </a:ext>
+            </a:extLst>
+          </p:cNvPr>
+          <p:cNvSpPr txBox="1"/>
+          <p:nvPr/>
+        </p:nvSpPr>
+        <p:spPr>
+          <a:xfrm>
+            <a:off x="442453" y="257389"/>
+            <a:ext cx="8311254" cy="553998"/>
+          </a:xfrm>
+          <a:prstGeom prst="rect">
+            <a:avLst/>
+          </a:prstGeom>
+          <a:noFill/>
+        </p:spPr>
+        <p:txBody>
+          <a:bodyPr wrap="square">
+            <a:spAutoFit/>
+          </a:bodyPr>
+          <a:lstStyle/>
+          <a:p>
+            <a:r>
+              <a:rPr lang="en-US" sz="3000" b="1" i="0" dirty="0">
+                <a:solidFill>
+                  <a:schemeClr val="tx1"/>
+                </a:solidFill>
+                <a:effectLst/>
+                <a:latin typeface="Lexend" panose="020B0604020202020204" charset="-94"/>
+              </a:rPr>
+              <a:t>WHAT’S ABP LOW-CODE SYSTEM?</a:t>
+            </a:r>
+            <a:endParaRPr lang="en-US" sz="3000" b="1" i="0" noProof="0" dirty="0">
+              <a:solidFill>
+                <a:schemeClr val="tx1"/>
+              </a:solidFill>
+              <a:effectLst/>
+              <a:latin typeface="Lexend" panose="020B0604020202020204" charset="-94"/>
+            </a:endParaRPr>
+          </a:p>
+        </p:txBody>
+      </p:sp>
+      <p:cxnSp>
+        <p:nvCxnSpPr>
+          <p:cNvPr id="22" name="Straight Connector 21">
+            <a:extLst>
+              <a:ext uri="{FF2B5EF4-FFF2-40B4-BE49-F238E27FC236}">
+                <a16:creationId xmlns:a16="http://schemas.microsoft.com/office/drawing/2014/main" id="{E780C9B4-B006-68C4-AB00-B19AE54FFDFE}"/>
+              </a:ext>
+            </a:extLst>
+          </p:cNvPr>
+          <p:cNvCxnSpPr>
+            <a:cxnSpLocks/>
+          </p:cNvCxnSpPr>
+          <p:nvPr/>
+        </p:nvCxnSpPr>
+        <p:spPr>
+          <a:xfrm>
+            <a:off x="598570" y="811387"/>
+            <a:ext cx="6324539" cy="0"/>
+          </a:xfrm>
+          <a:prstGeom prst="line">
+            <a:avLst/>
+          </a:prstGeom>
+          <a:ln w="28575">
+            <a:solidFill>
+              <a:schemeClr val="bg1">
+                <a:lumMod val="50000"/>
+              </a:schemeClr>
+            </a:solidFill>
+            <a:prstDash val="sysDot"/>
+          </a:ln>
+        </p:spPr>
+        <p:style>
+          <a:lnRef idx="1">
+            <a:schemeClr val="accent1"/>
+          </a:lnRef>
+          <a:fillRef idx="0">
+            <a:schemeClr val="accent1"/>
+          </a:fillRef>
+          <a:effectRef idx="0">
+            <a:schemeClr val="accent1"/>
+          </a:effectRef>
+          <a:fontRef idx="minor">
+            <a:schemeClr val="tx1"/>
+          </a:fontRef>
+        </p:style>
+      </p:cxnSp>
+      <p:pic>
+        <p:nvPicPr>
+          <p:cNvPr id="6" name="Picture 5">
+            <a:extLst>
+              <a:ext uri="{FF2B5EF4-FFF2-40B4-BE49-F238E27FC236}">
+                <a16:creationId xmlns:a16="http://schemas.microsoft.com/office/drawing/2014/main" id="{B8EEE59C-C102-B5D1-C9DB-9063A1BF4696}"/>
+              </a:ext>
+            </a:extLst>
+          </p:cNvPr>
+          <p:cNvPicPr>
+            <a:picLocks noChangeAspect="1"/>
+          </p:cNvPicPr>
+          <p:nvPr/>
+        </p:nvPicPr>
+        <p:blipFill>
+          <a:blip r:embed="rId5"/>
+          <a:stretch>
+            <a:fillRect/>
+          </a:stretch>
+        </p:blipFill>
+        <p:spPr>
+          <a:xfrm>
+            <a:off x="1675659" y="1338403"/>
+            <a:ext cx="7078048" cy="3590480"/>
+          </a:xfrm>
+          <a:prstGeom prst="rect">
+            <a:avLst/>
+          </a:prstGeom>
+          <a:solidFill>
+            <a:srgbClr val="FFFFFF">
+              <a:shade val="85000"/>
+            </a:srgbClr>
+          </a:solidFill>
+          <a:ln w="190500" cap="sq">
+            <a:solidFill>
+              <a:srgbClr val="FFFFFF"/>
+            </a:solidFill>
+            <a:miter lim="800000"/>
+          </a:ln>
+          <a:effectLst>
+            <a:outerShdw blurRad="65000" dist="50800" dir="12900000" kx="195000" ky="145000" algn="tl" rotWithShape="0">
+              <a:srgbClr val="000000">
+                <a:alpha val="30000"/>
+              </a:srgbClr>
+            </a:outerShdw>
+          </a:effectLst>
+          <a:scene3d>
+            <a:camera prst="orthographicFront">
+              <a:rot lat="0" lon="0" rev="360000"/>
+            </a:camera>
+            <a:lightRig rig="twoPt" dir="t">
+              <a:rot lat="0" lon="0" rev="7200000"/>
+            </a:lightRig>
+          </a:scene3d>
+          <a:sp3d contourW="12700">
+            <a:bevelT w="25400" h="19050"/>
+            <a:contourClr>
+              <a:srgbClr val="969696"/>
+            </a:contourClr>
+          </a:sp3d>
+        </p:spPr>
+      </p:pic>
+    </p:spTree>
+    <p:extLst>
+      <p:ext uri="{BB962C8B-B14F-4D97-AF65-F5344CB8AC3E}">
+        <p14:creationId xmlns:p14="http://schemas.microsoft.com/office/powerpoint/2010/main" val="4043192141"/>
+      </p:ext>
+    </p:extLst>
+  </p:cSld>
+  <p:clrMapOvr>
+    <a:masterClrMapping/>
+  </p:clrMapOvr>
+</p:sld>
+</file>
+
+<file path=ppt/slides/slide14.xml><?xml version="1.0" encoding="utf-8"?>
+<p:sld xmlns:a="http://schemas.openxmlformats.org/drawingml/2006/main" xmlns:r="http://schemas.openxmlformats.org/officeDocument/2006/relationships" xmlns:p="http://schemas.openxmlformats.org/presentationml/2006/main">
+  <p:cSld>
+    <p:spTree>
+      <p:nvGrpSpPr>
+        <p:cNvPr id="1" name=""/>
+        <p:cNvGrpSpPr/>
+        <p:nvPr/>
+      </p:nvGrpSpPr>
+      <p:grpSpPr>
+        <a:xfrm>
+          <a:off x="0" y="0"/>
+          <a:ext cx="0" cy="0"/>
+          <a:chOff x="0" y="0"/>
+          <a:chExt cx="0" cy="0"/>
+        </a:xfrm>
+      </p:grpSpPr>
+      <p:sp>
+        <p:nvSpPr>
+          <p:cNvPr id="4" name="TextBox 3"/>
+          <p:cNvSpPr txBox="1"/>
+          <p:nvPr/>
+        </p:nvSpPr>
+        <p:spPr>
+          <a:xfrm>
+            <a:off x="439554" y="1248157"/>
+            <a:ext cx="10972800" cy="438912"/>
+          </a:xfrm>
+          <a:prstGeom prst="rect">
+            <a:avLst/>
+          </a:prstGeom>
+          <a:noFill/>
+        </p:spPr>
+        <p:txBody>
+          <a:bodyPr wrap="square">
+            <a:spAutoFit/>
+          </a:bodyPr>
+          <a:lstStyle/>
+          <a:p>
+            <a:pPr algn="l"/>
+            <a:r>
+              <a:rPr sz="1500" b="0" dirty="0">
+                <a:solidFill>
+                  <a:srgbClr val="677182"/>
+                </a:solidFill>
+                <a:latin typeface="Aptos"/>
+              </a:rPr>
+              <a:t>Build data-driven business applications visually — while staying inside the ABP architecture.</a:t>
+            </a:r>
+          </a:p>
+        </p:txBody>
+      </p:sp>
+      <p:sp>
+        <p:nvSpPr>
+          <p:cNvPr id="5" name="Rounded Rectangle 4"/>
+          <p:cNvSpPr/>
+          <p:nvPr/>
+        </p:nvSpPr>
+        <p:spPr>
+          <a:xfrm>
+            <a:off x="685800" y="2148840"/>
+            <a:ext cx="2331720" cy="1280160"/>
+          </a:xfrm>
+          <a:prstGeom prst="roundRect">
+            <a:avLst/>
+          </a:prstGeom>
+          <a:solidFill>
+            <a:srgbClr val="F6F8FC"/>
+          </a:solidFill>
+          <a:ln>
+            <a:solidFill>
+              <a:srgbClr val="E0E5EE"/>
+            </a:solidFill>
+          </a:ln>
+        </p:spPr>
+        <p:style>
+          <a:lnRef idx="1">
+            <a:schemeClr val="accent1"/>
+          </a:lnRef>
+          <a:fillRef idx="3">
+            <a:schemeClr val="accent1"/>
+          </a:fillRef>
+          <a:effectRef idx="2">
+            <a:schemeClr val="accent1"/>
+          </a:effectRef>
+          <a:fontRef idx="minor">
+            <a:schemeClr val="lt1"/>
+          </a:fontRef>
+        </p:style>
+        <p:txBody>
+          <a:bodyPr rtlCol="0" anchor="ctr"/>
+          <a:lstStyle/>
+          <a:p>
+            <a:pPr algn="ctr"/>
+            <a:endParaRPr/>
+          </a:p>
+        </p:txBody>
+      </p:sp>
+      <p:sp>
+        <p:nvSpPr>
+          <p:cNvPr id="6" name="Oval 5"/>
+          <p:cNvSpPr/>
+          <p:nvPr/>
+        </p:nvSpPr>
+        <p:spPr>
+          <a:xfrm>
+            <a:off x="850392" y="2359152"/>
+            <a:ext cx="475488" cy="475488"/>
+          </a:xfrm>
+          <a:prstGeom prst="ellipse">
+            <a:avLst/>
+          </a:prstGeom>
+          <a:solidFill>
+            <a:srgbClr val="3D7EFF"/>
+          </a:solidFill>
+          <a:ln>
+            <a:solidFill>
+              <a:srgbClr val="3D7EFF"/>
+            </a:solidFill>
+          </a:ln>
+        </p:spPr>
+        <p:style>
+          <a:lnRef idx="1">
+            <a:schemeClr val="accent1"/>
+          </a:lnRef>
+          <a:fillRef idx="3">
+            <a:schemeClr val="accent1"/>
+          </a:fillRef>
+          <a:effectRef idx="2">
+            <a:schemeClr val="accent1"/>
+          </a:effectRef>
+          <a:fontRef idx="minor">
+            <a:schemeClr val="lt1"/>
+          </a:fontRef>
+        </p:style>
+        <p:txBody>
+          <a:bodyPr rtlCol="0" anchor="ctr"/>
+          <a:lstStyle/>
+          <a:p>
+            <a:pPr algn="ctr"/>
+            <a:endParaRPr/>
+          </a:p>
+        </p:txBody>
+      </p:sp>
+      <p:sp>
+        <p:nvSpPr>
+          <p:cNvPr id="7" name="TextBox 6"/>
+          <p:cNvSpPr txBox="1"/>
+          <p:nvPr/>
+        </p:nvSpPr>
+        <p:spPr>
+          <a:xfrm>
+            <a:off x="850392" y="2395728"/>
+            <a:ext cx="475488" cy="320040"/>
+          </a:xfrm>
+          <a:prstGeom prst="rect">
+            <a:avLst/>
+          </a:prstGeom>
+          <a:noFill/>
+        </p:spPr>
+        <p:txBody>
+          <a:bodyPr wrap="square">
+            <a:spAutoFit/>
+          </a:bodyPr>
+          <a:lstStyle/>
+          <a:p>
+            <a:pPr algn="ctr"/>
+            <a:r>
+              <a:rPr sz="1600" b="1">
+                <a:solidFill>
+                  <a:srgbClr val="FFFFFF"/>
+                </a:solidFill>
+                <a:latin typeface="Aptos"/>
+              </a:rPr>
+              <a:t>1</a:t>
+            </a:r>
+          </a:p>
+        </p:txBody>
+      </p:sp>
+      <p:sp>
+        <p:nvSpPr>
+          <p:cNvPr id="8" name="TextBox 7"/>
+          <p:cNvSpPr txBox="1"/>
+          <p:nvPr/>
+        </p:nvSpPr>
+        <p:spPr>
+          <a:xfrm>
+            <a:off x="1435607" y="2304288"/>
+            <a:ext cx="1325880" cy="274320"/>
+          </a:xfrm>
+          <a:prstGeom prst="rect">
+            <a:avLst/>
+          </a:prstGeom>
+          <a:noFill/>
+        </p:spPr>
+        <p:txBody>
+          <a:bodyPr wrap="square">
+            <a:spAutoFit/>
+          </a:bodyPr>
+          <a:lstStyle/>
+          <a:p>
+            <a:pPr algn="l"/>
+            <a:r>
+              <a:rPr sz="1400" b="1">
+                <a:solidFill>
+                  <a:srgbClr val="121B2D"/>
+                </a:solidFill>
+                <a:latin typeface="Aptos"/>
+              </a:rPr>
+              <a:t>MODEL</a:t>
+            </a:r>
+          </a:p>
+        </p:txBody>
+      </p:sp>
+      <p:sp>
+        <p:nvSpPr>
+          <p:cNvPr id="9" name="TextBox 8"/>
+          <p:cNvSpPr txBox="1"/>
+          <p:nvPr/>
+        </p:nvSpPr>
+        <p:spPr>
+          <a:xfrm>
+            <a:off x="850392" y="2871216"/>
+            <a:ext cx="1965960" cy="475488"/>
+          </a:xfrm>
+          <a:prstGeom prst="rect">
+            <a:avLst/>
+          </a:prstGeom>
+          <a:noFill/>
+        </p:spPr>
+        <p:txBody>
+          <a:bodyPr wrap="square">
+            <a:spAutoFit/>
+          </a:bodyPr>
+          <a:lstStyle/>
+          <a:p>
+            <a:pPr algn="l"/>
+            <a:r>
+              <a:rPr sz="1200" b="0">
+                <a:solidFill>
+                  <a:srgbClr val="677182"/>
+                </a:solidFill>
+                <a:latin typeface="Aptos"/>
+              </a:rPr>
+              <a:t>Entities &amp; relations</a:t>
+            </a:r>
+          </a:p>
+        </p:txBody>
+      </p:sp>
+      <p:sp>
+        <p:nvSpPr>
+          <p:cNvPr id="10" name="TextBox 9"/>
+          <p:cNvSpPr txBox="1"/>
+          <p:nvPr/>
+        </p:nvSpPr>
+        <p:spPr>
+          <a:xfrm>
+            <a:off x="3081528" y="2633472"/>
+            <a:ext cx="384048" cy="365760"/>
+          </a:xfrm>
+          <a:prstGeom prst="rect">
+            <a:avLst/>
+          </a:prstGeom>
+          <a:noFill/>
+        </p:spPr>
+        <p:txBody>
+          <a:bodyPr wrap="square">
+            <a:spAutoFit/>
+          </a:bodyPr>
+          <a:lstStyle/>
+          <a:p>
+            <a:pPr algn="ctr"/>
+            <a:r>
+              <a:rPr sz="2400" b="1">
+                <a:solidFill>
+                  <a:srgbClr val="AAB3C1"/>
+                </a:solidFill>
+                <a:latin typeface="Aptos"/>
+              </a:rPr>
+              <a:t>→</a:t>
+            </a:r>
+          </a:p>
+        </p:txBody>
+      </p:sp>
+      <p:sp>
+        <p:nvSpPr>
+          <p:cNvPr id="11" name="Rounded Rectangle 10"/>
+          <p:cNvSpPr/>
+          <p:nvPr/>
+        </p:nvSpPr>
+        <p:spPr>
+          <a:xfrm>
+            <a:off x="3520440" y="2148840"/>
+            <a:ext cx="2331720" cy="1280160"/>
+          </a:xfrm>
+          <a:prstGeom prst="roundRect">
+            <a:avLst/>
+          </a:prstGeom>
+          <a:solidFill>
+            <a:srgbClr val="F6F8FC"/>
+          </a:solidFill>
+          <a:ln>
+            <a:solidFill>
+              <a:srgbClr val="E0E5EE"/>
+            </a:solidFill>
+          </a:ln>
+        </p:spPr>
+        <p:style>
+          <a:lnRef idx="1">
+            <a:schemeClr val="accent1"/>
+          </a:lnRef>
+          <a:fillRef idx="3">
+            <a:schemeClr val="accent1"/>
+          </a:fillRef>
+          <a:effectRef idx="2">
+            <a:schemeClr val="accent1"/>
+          </a:effectRef>
+          <a:fontRef idx="minor">
+            <a:schemeClr val="lt1"/>
+          </a:fontRef>
+        </p:style>
+        <p:txBody>
+          <a:bodyPr rtlCol="0" anchor="ctr"/>
+          <a:lstStyle/>
+          <a:p>
+            <a:pPr algn="ctr"/>
+            <a:endParaRPr/>
+          </a:p>
+        </p:txBody>
+      </p:sp>
+      <p:sp>
+        <p:nvSpPr>
+          <p:cNvPr id="12" name="Oval 11"/>
+          <p:cNvSpPr/>
+          <p:nvPr/>
+        </p:nvSpPr>
+        <p:spPr>
+          <a:xfrm>
+            <a:off x="3685032" y="2359152"/>
+            <a:ext cx="475488" cy="475488"/>
+          </a:xfrm>
+          <a:prstGeom prst="ellipse">
+            <a:avLst/>
+          </a:prstGeom>
+          <a:solidFill>
+            <a:srgbClr val="6F42C1"/>
+          </a:solidFill>
+          <a:ln>
+            <a:solidFill>
+              <a:srgbClr val="6F42C1"/>
+            </a:solidFill>
+          </a:ln>
+        </p:spPr>
+        <p:style>
+          <a:lnRef idx="1">
+            <a:schemeClr val="accent1"/>
+          </a:lnRef>
+          <a:fillRef idx="3">
+            <a:schemeClr val="accent1"/>
+          </a:fillRef>
+          <a:effectRef idx="2">
+            <a:schemeClr val="accent1"/>
+          </a:effectRef>
+          <a:fontRef idx="minor">
+            <a:schemeClr val="lt1"/>
+          </a:fontRef>
+        </p:style>
+        <p:txBody>
+          <a:bodyPr rtlCol="0" anchor="ctr"/>
+          <a:lstStyle/>
+          <a:p>
+            <a:pPr algn="ctr"/>
+            <a:endParaRPr/>
+          </a:p>
+        </p:txBody>
+      </p:sp>
+      <p:sp>
+        <p:nvSpPr>
+          <p:cNvPr id="13" name="TextBox 12"/>
+          <p:cNvSpPr txBox="1"/>
+          <p:nvPr/>
+        </p:nvSpPr>
+        <p:spPr>
+          <a:xfrm>
+            <a:off x="3685032" y="2395728"/>
+            <a:ext cx="475488" cy="320040"/>
+          </a:xfrm>
+          <a:prstGeom prst="rect">
+            <a:avLst/>
+          </a:prstGeom>
+          <a:noFill/>
+        </p:spPr>
+        <p:txBody>
+          <a:bodyPr wrap="square">
+            <a:spAutoFit/>
+          </a:bodyPr>
+          <a:lstStyle/>
+          <a:p>
+            <a:pPr algn="ctr"/>
+            <a:r>
+              <a:rPr sz="1600" b="1">
+                <a:solidFill>
+                  <a:srgbClr val="FFFFFF"/>
+                </a:solidFill>
+                <a:latin typeface="Aptos"/>
+              </a:rPr>
+              <a:t>2</a:t>
+            </a:r>
+          </a:p>
+        </p:txBody>
+      </p:sp>
+      <p:sp>
+        <p:nvSpPr>
+          <p:cNvPr id="14" name="TextBox 13"/>
+          <p:cNvSpPr txBox="1"/>
+          <p:nvPr/>
+        </p:nvSpPr>
+        <p:spPr>
+          <a:xfrm>
+            <a:off x="4270248" y="2304288"/>
+            <a:ext cx="1325880" cy="274320"/>
+          </a:xfrm>
+          <a:prstGeom prst="rect">
+            <a:avLst/>
+          </a:prstGeom>
+          <a:noFill/>
+        </p:spPr>
+        <p:txBody>
+          <a:bodyPr wrap="square">
+            <a:spAutoFit/>
+          </a:bodyPr>
+          <a:lstStyle/>
+          <a:p>
+            <a:pPr algn="l"/>
+            <a:r>
+              <a:rPr sz="1400" b="1">
+                <a:solidFill>
+                  <a:srgbClr val="121B2D"/>
+                </a:solidFill>
+                <a:latin typeface="Aptos"/>
+              </a:rPr>
+              <a:t>DESIGN</a:t>
+            </a:r>
+          </a:p>
+        </p:txBody>
+      </p:sp>
+      <p:sp>
+        <p:nvSpPr>
+          <p:cNvPr id="15" name="TextBox 14"/>
+          <p:cNvSpPr txBox="1"/>
+          <p:nvPr/>
+        </p:nvSpPr>
+        <p:spPr>
+          <a:xfrm>
+            <a:off x="3685031" y="2871216"/>
+            <a:ext cx="2151889" cy="276999"/>
+          </a:xfrm>
+          <a:prstGeom prst="rect">
+            <a:avLst/>
+          </a:prstGeom>
+          <a:noFill/>
+        </p:spPr>
+        <p:txBody>
+          <a:bodyPr wrap="square">
+            <a:spAutoFit/>
+          </a:bodyPr>
+          <a:lstStyle/>
+          <a:p>
+            <a:pPr algn="l"/>
+            <a:r>
+              <a:rPr sz="1200" b="0" dirty="0">
+                <a:solidFill>
+                  <a:srgbClr val="677182"/>
+                </a:solidFill>
+                <a:latin typeface="Aptos"/>
+              </a:rPr>
+              <a:t>Pages, forms &amp; permissions</a:t>
+            </a:r>
+          </a:p>
+        </p:txBody>
+      </p:sp>
+      <p:sp>
+        <p:nvSpPr>
+          <p:cNvPr id="16" name="TextBox 15"/>
+          <p:cNvSpPr txBox="1"/>
+          <p:nvPr/>
+        </p:nvSpPr>
+        <p:spPr>
+          <a:xfrm>
+            <a:off x="5916168" y="2633472"/>
+            <a:ext cx="384048" cy="365760"/>
+          </a:xfrm>
+          <a:prstGeom prst="rect">
+            <a:avLst/>
+          </a:prstGeom>
+          <a:noFill/>
+        </p:spPr>
+        <p:txBody>
+          <a:bodyPr wrap="square">
+            <a:spAutoFit/>
+          </a:bodyPr>
+          <a:lstStyle/>
+          <a:p>
+            <a:pPr algn="ctr"/>
+            <a:r>
+              <a:rPr sz="2400" b="1">
+                <a:solidFill>
+                  <a:srgbClr val="AAB3C1"/>
+                </a:solidFill>
+                <a:latin typeface="Aptos"/>
+              </a:rPr>
+              <a:t>→</a:t>
+            </a:r>
+          </a:p>
+        </p:txBody>
+      </p:sp>
+      <p:sp>
+        <p:nvSpPr>
+          <p:cNvPr id="17" name="Rounded Rectangle 16"/>
+          <p:cNvSpPr/>
+          <p:nvPr/>
+        </p:nvSpPr>
+        <p:spPr>
+          <a:xfrm>
+            <a:off x="6355080" y="2148840"/>
+            <a:ext cx="2331720" cy="1280160"/>
+          </a:xfrm>
+          <a:prstGeom prst="roundRect">
+            <a:avLst/>
+          </a:prstGeom>
+          <a:solidFill>
+            <a:srgbClr val="F6F8FC"/>
+          </a:solidFill>
+          <a:ln>
+            <a:solidFill>
+              <a:srgbClr val="E0E5EE"/>
+            </a:solidFill>
+          </a:ln>
+        </p:spPr>
+        <p:style>
+          <a:lnRef idx="1">
+            <a:schemeClr val="accent1"/>
+          </a:lnRef>
+          <a:fillRef idx="3">
+            <a:schemeClr val="accent1"/>
+          </a:fillRef>
+          <a:effectRef idx="2">
+            <a:schemeClr val="accent1"/>
+          </a:effectRef>
+          <a:fontRef idx="minor">
+            <a:schemeClr val="lt1"/>
+          </a:fontRef>
+        </p:style>
+        <p:txBody>
+          <a:bodyPr rtlCol="0" anchor="ctr"/>
+          <a:lstStyle/>
+          <a:p>
+            <a:pPr algn="ctr"/>
+            <a:endParaRPr/>
+          </a:p>
+        </p:txBody>
+      </p:sp>
+      <p:sp>
+        <p:nvSpPr>
+          <p:cNvPr id="18" name="Oval 17"/>
+          <p:cNvSpPr/>
+          <p:nvPr/>
+        </p:nvSpPr>
+        <p:spPr>
+          <a:xfrm>
+            <a:off x="6519672" y="2359152"/>
+            <a:ext cx="475488" cy="475488"/>
+          </a:xfrm>
+          <a:prstGeom prst="ellipse">
+            <a:avLst/>
+          </a:prstGeom>
+          <a:solidFill>
+            <a:srgbClr val="16A085"/>
+          </a:solidFill>
+          <a:ln>
+            <a:solidFill>
+              <a:srgbClr val="16A085"/>
+            </a:solidFill>
+          </a:ln>
+        </p:spPr>
+        <p:style>
+          <a:lnRef idx="1">
+            <a:schemeClr val="accent1"/>
+          </a:lnRef>
+          <a:fillRef idx="3">
+            <a:schemeClr val="accent1"/>
+          </a:fillRef>
+          <a:effectRef idx="2">
+            <a:schemeClr val="accent1"/>
+          </a:effectRef>
+          <a:fontRef idx="minor">
+            <a:schemeClr val="lt1"/>
+          </a:fontRef>
+        </p:style>
+        <p:txBody>
+          <a:bodyPr rtlCol="0" anchor="ctr"/>
+          <a:lstStyle/>
+          <a:p>
+            <a:pPr algn="ctr"/>
+            <a:endParaRPr/>
+          </a:p>
+        </p:txBody>
+      </p:sp>
+      <p:sp>
+        <p:nvSpPr>
+          <p:cNvPr id="19" name="TextBox 18"/>
+          <p:cNvSpPr txBox="1"/>
+          <p:nvPr/>
+        </p:nvSpPr>
+        <p:spPr>
+          <a:xfrm>
+            <a:off x="6519672" y="2395728"/>
+            <a:ext cx="475488" cy="320040"/>
+          </a:xfrm>
+          <a:prstGeom prst="rect">
+            <a:avLst/>
+          </a:prstGeom>
+          <a:noFill/>
+        </p:spPr>
+        <p:txBody>
+          <a:bodyPr wrap="square">
+            <a:spAutoFit/>
+          </a:bodyPr>
+          <a:lstStyle/>
+          <a:p>
+            <a:pPr algn="ctr"/>
+            <a:r>
+              <a:rPr sz="1600" b="1">
+                <a:solidFill>
+                  <a:srgbClr val="FFFFFF"/>
+                </a:solidFill>
+                <a:latin typeface="Aptos"/>
+              </a:rPr>
+              <a:t>3</a:t>
+            </a:r>
+          </a:p>
+        </p:txBody>
+      </p:sp>
+      <p:sp>
+        <p:nvSpPr>
+          <p:cNvPr id="20" name="TextBox 19"/>
+          <p:cNvSpPr txBox="1"/>
+          <p:nvPr/>
+        </p:nvSpPr>
+        <p:spPr>
+          <a:xfrm>
+            <a:off x="7104888" y="2304288"/>
+            <a:ext cx="1325880" cy="274320"/>
+          </a:xfrm>
+          <a:prstGeom prst="rect">
+            <a:avLst/>
+          </a:prstGeom>
+          <a:noFill/>
+        </p:spPr>
+        <p:txBody>
+          <a:bodyPr wrap="square">
+            <a:spAutoFit/>
+          </a:bodyPr>
+          <a:lstStyle/>
+          <a:p>
+            <a:pPr algn="l"/>
+            <a:r>
+              <a:rPr sz="1400" b="1">
+                <a:solidFill>
+                  <a:srgbClr val="121B2D"/>
+                </a:solidFill>
+                <a:latin typeface="Aptos"/>
+              </a:rPr>
+              <a:t>RUN</a:t>
+            </a:r>
+          </a:p>
+        </p:txBody>
+      </p:sp>
+      <p:sp>
+        <p:nvSpPr>
+          <p:cNvPr id="21" name="TextBox 20"/>
+          <p:cNvSpPr txBox="1"/>
+          <p:nvPr/>
+        </p:nvSpPr>
+        <p:spPr>
+          <a:xfrm>
+            <a:off x="6519672" y="2871216"/>
+            <a:ext cx="2029968" cy="276999"/>
+          </a:xfrm>
+          <a:prstGeom prst="rect">
+            <a:avLst/>
+          </a:prstGeom>
+          <a:noFill/>
+        </p:spPr>
+        <p:txBody>
+          <a:bodyPr wrap="square">
+            <a:spAutoFit/>
+          </a:bodyPr>
+          <a:lstStyle/>
+          <a:p>
+            <a:pPr algn="l"/>
+            <a:r>
+              <a:rPr sz="1200" b="0" dirty="0">
+                <a:solidFill>
+                  <a:srgbClr val="677182"/>
+                </a:solidFill>
+                <a:latin typeface="Aptos"/>
+              </a:rPr>
+              <a:t>CRUD APIs + React runtime</a:t>
+            </a:r>
+          </a:p>
+        </p:txBody>
+      </p:sp>
+      <p:sp>
+        <p:nvSpPr>
+          <p:cNvPr id="22" name="TextBox 21"/>
+          <p:cNvSpPr txBox="1"/>
+          <p:nvPr/>
+        </p:nvSpPr>
+        <p:spPr>
+          <a:xfrm>
+            <a:off x="8750808" y="2633472"/>
+            <a:ext cx="384048" cy="365760"/>
+          </a:xfrm>
+          <a:prstGeom prst="rect">
+            <a:avLst/>
+          </a:prstGeom>
+          <a:noFill/>
+        </p:spPr>
+        <p:txBody>
+          <a:bodyPr wrap="square">
+            <a:spAutoFit/>
+          </a:bodyPr>
+          <a:lstStyle/>
+          <a:p>
+            <a:pPr algn="ctr"/>
+            <a:r>
+              <a:rPr sz="2400" b="1">
+                <a:solidFill>
+                  <a:srgbClr val="AAB3C1"/>
+                </a:solidFill>
+                <a:latin typeface="Aptos"/>
+              </a:rPr>
+              <a:t>→</a:t>
+            </a:r>
+          </a:p>
+        </p:txBody>
+      </p:sp>
+      <p:sp>
+        <p:nvSpPr>
+          <p:cNvPr id="23" name="Rounded Rectangle 22"/>
+          <p:cNvSpPr/>
+          <p:nvPr/>
+        </p:nvSpPr>
+        <p:spPr>
+          <a:xfrm>
+            <a:off x="9189720" y="2148840"/>
+            <a:ext cx="2331720" cy="1280160"/>
+          </a:xfrm>
+          <a:prstGeom prst="roundRect">
+            <a:avLst/>
+          </a:prstGeom>
+          <a:solidFill>
+            <a:srgbClr val="F6F8FC"/>
+          </a:solidFill>
+          <a:ln>
+            <a:solidFill>
+              <a:srgbClr val="E0E5EE"/>
+            </a:solidFill>
+          </a:ln>
+        </p:spPr>
+        <p:style>
+          <a:lnRef idx="1">
+            <a:schemeClr val="accent1"/>
+          </a:lnRef>
+          <a:fillRef idx="3">
+            <a:schemeClr val="accent1"/>
+          </a:fillRef>
+          <a:effectRef idx="2">
+            <a:schemeClr val="accent1"/>
+          </a:effectRef>
+          <a:fontRef idx="minor">
+            <a:schemeClr val="lt1"/>
+          </a:fontRef>
+        </p:style>
+        <p:txBody>
+          <a:bodyPr rtlCol="0" anchor="ctr"/>
+          <a:lstStyle/>
+          <a:p>
+            <a:pPr algn="ctr"/>
+            <a:endParaRPr/>
+          </a:p>
+        </p:txBody>
+      </p:sp>
+      <p:sp>
+        <p:nvSpPr>
+          <p:cNvPr id="24" name="Oval 23"/>
+          <p:cNvSpPr/>
+          <p:nvPr/>
+        </p:nvSpPr>
+        <p:spPr>
+          <a:xfrm>
+            <a:off x="9354312" y="2359152"/>
+            <a:ext cx="475488" cy="475488"/>
+          </a:xfrm>
+          <a:prstGeom prst="ellipse">
+            <a:avLst/>
+          </a:prstGeom>
+          <a:solidFill>
+            <a:srgbClr val="121B2D"/>
+          </a:solidFill>
+          <a:ln>
+            <a:solidFill>
+              <a:srgbClr val="121B2D"/>
+            </a:solidFill>
+          </a:ln>
+        </p:spPr>
+        <p:style>
+          <a:lnRef idx="1">
+            <a:schemeClr val="accent1"/>
+          </a:lnRef>
+          <a:fillRef idx="3">
+            <a:schemeClr val="accent1"/>
+          </a:fillRef>
+          <a:effectRef idx="2">
+            <a:schemeClr val="accent1"/>
+          </a:effectRef>
+          <a:fontRef idx="minor">
+            <a:schemeClr val="lt1"/>
+          </a:fontRef>
+        </p:style>
+        <p:txBody>
+          <a:bodyPr rtlCol="0" anchor="ctr"/>
+          <a:lstStyle/>
+          <a:p>
+            <a:pPr algn="ctr"/>
+            <a:endParaRPr/>
+          </a:p>
+        </p:txBody>
+      </p:sp>
+      <p:sp>
+        <p:nvSpPr>
+          <p:cNvPr id="25" name="TextBox 24"/>
+          <p:cNvSpPr txBox="1"/>
+          <p:nvPr/>
+        </p:nvSpPr>
+        <p:spPr>
+          <a:xfrm>
+            <a:off x="9354312" y="2395728"/>
+            <a:ext cx="475488" cy="320040"/>
+          </a:xfrm>
+          <a:prstGeom prst="rect">
+            <a:avLst/>
+          </a:prstGeom>
+          <a:noFill/>
+        </p:spPr>
+        <p:txBody>
+          <a:bodyPr wrap="square">
+            <a:spAutoFit/>
+          </a:bodyPr>
+          <a:lstStyle/>
+          <a:p>
+            <a:pPr algn="ctr"/>
+            <a:r>
+              <a:rPr sz="1600" b="1">
+                <a:solidFill>
+                  <a:srgbClr val="FFFFFF"/>
+                </a:solidFill>
+                <a:latin typeface="Aptos"/>
+              </a:rPr>
+              <a:t>4</a:t>
+            </a:r>
+          </a:p>
+        </p:txBody>
+      </p:sp>
+      <p:sp>
+        <p:nvSpPr>
+          <p:cNvPr id="26" name="TextBox 25"/>
+          <p:cNvSpPr txBox="1"/>
+          <p:nvPr/>
+        </p:nvSpPr>
+        <p:spPr>
+          <a:xfrm>
+            <a:off x="9939528" y="2304288"/>
+            <a:ext cx="1325880" cy="274320"/>
+          </a:xfrm>
+          <a:prstGeom prst="rect">
+            <a:avLst/>
+          </a:prstGeom>
+          <a:noFill/>
+        </p:spPr>
+        <p:txBody>
+          <a:bodyPr wrap="square">
+            <a:spAutoFit/>
+          </a:bodyPr>
+          <a:lstStyle/>
+          <a:p>
+            <a:pPr algn="l"/>
+            <a:r>
+              <a:rPr sz="1400" b="1">
+                <a:solidFill>
+                  <a:srgbClr val="121B2D"/>
+                </a:solidFill>
+                <a:latin typeface="Aptos"/>
+              </a:rPr>
+              <a:t>EXTEND</a:t>
+            </a:r>
+          </a:p>
+        </p:txBody>
+      </p:sp>
+      <p:sp>
+        <p:nvSpPr>
+          <p:cNvPr id="27" name="TextBox 26"/>
+          <p:cNvSpPr txBox="1"/>
+          <p:nvPr/>
+        </p:nvSpPr>
+        <p:spPr>
+          <a:xfrm>
+            <a:off x="9354312" y="2871216"/>
+            <a:ext cx="2167128" cy="276999"/>
+          </a:xfrm>
+          <a:prstGeom prst="rect">
+            <a:avLst/>
+          </a:prstGeom>
+          <a:noFill/>
+        </p:spPr>
+        <p:txBody>
+          <a:bodyPr wrap="square">
+            <a:spAutoFit/>
+          </a:bodyPr>
+          <a:lstStyle/>
+          <a:p>
+            <a:pPr algn="l"/>
+            <a:r>
+              <a:rPr sz="1200" b="0" dirty="0">
+                <a:solidFill>
+                  <a:srgbClr val="677182"/>
+                </a:solidFill>
+                <a:latin typeface="Aptos"/>
+              </a:rPr>
+              <a:t>Scripts, endpoints &amp; code</a:t>
+            </a:r>
+          </a:p>
+        </p:txBody>
+      </p:sp>
+      <p:sp>
+        <p:nvSpPr>
+          <p:cNvPr id="28" name="Rounded Rectangle 27"/>
+          <p:cNvSpPr/>
+          <p:nvPr/>
+        </p:nvSpPr>
+        <p:spPr>
+          <a:xfrm>
+            <a:off x="622434" y="3831335"/>
+            <a:ext cx="10789920" cy="1447431"/>
+          </a:xfrm>
+          <a:prstGeom prst="roundRect">
+            <a:avLst/>
+          </a:prstGeom>
+          <a:solidFill>
+            <a:srgbClr val="121B2D"/>
+          </a:solidFill>
+          <a:ln>
+            <a:solidFill>
+              <a:srgbClr val="121B2D"/>
+            </a:solidFill>
+          </a:ln>
+        </p:spPr>
+        <p:style>
+          <a:lnRef idx="1">
+            <a:schemeClr val="accent1"/>
+          </a:lnRef>
+          <a:fillRef idx="3">
+            <a:schemeClr val="accent1"/>
+          </a:fillRef>
+          <a:effectRef idx="2">
+            <a:schemeClr val="accent1"/>
+          </a:effectRef>
+          <a:fontRef idx="minor">
+            <a:schemeClr val="lt1"/>
+          </a:fontRef>
+        </p:style>
+        <p:txBody>
+          <a:bodyPr rtlCol="0" anchor="ctr"/>
+          <a:lstStyle/>
+          <a:p>
+            <a:pPr algn="ctr"/>
+            <a:endParaRPr/>
+          </a:p>
+        </p:txBody>
+      </p:sp>
+      <p:sp>
+        <p:nvSpPr>
+          <p:cNvPr id="29" name="TextBox 28"/>
+          <p:cNvSpPr txBox="1"/>
+          <p:nvPr/>
+        </p:nvSpPr>
+        <p:spPr>
+          <a:xfrm>
+            <a:off x="839788" y="4078224"/>
+            <a:ext cx="4937760" cy="954107"/>
+          </a:xfrm>
+          <a:prstGeom prst="rect">
+            <a:avLst/>
+          </a:prstGeom>
+          <a:noFill/>
+        </p:spPr>
+        <p:txBody>
+          <a:bodyPr wrap="square">
+            <a:spAutoFit/>
+          </a:bodyPr>
+          <a:lstStyle/>
+          <a:p>
+            <a:pPr algn="l"/>
+            <a:r>
+              <a:rPr sz="2800" b="1" dirty="0">
+                <a:solidFill>
+                  <a:srgbClr val="FFFFFF"/>
+                </a:solidFill>
+                <a:latin typeface="Aptos"/>
+              </a:rPr>
+              <a:t>Standard CRUD flow, </a:t>
+            </a:r>
+            <a:br>
+              <a:rPr lang="en-US" sz="2800" b="1" dirty="0">
+                <a:solidFill>
+                  <a:srgbClr val="FFFFFF"/>
+                </a:solidFill>
+                <a:latin typeface="Aptos"/>
+              </a:rPr>
+            </a:br>
+            <a:r>
+              <a:rPr sz="2800" b="1" dirty="0">
+                <a:solidFill>
+                  <a:srgbClr val="FFFFFF"/>
+                </a:solidFill>
+                <a:latin typeface="Aptos"/>
+              </a:rPr>
+              <a:t>without the usual boilerplate</a:t>
+            </a:r>
+          </a:p>
+        </p:txBody>
+      </p:sp>
+      <p:sp>
+        <p:nvSpPr>
+          <p:cNvPr id="31" name="Rounded Rectangle 30"/>
+          <p:cNvSpPr/>
+          <p:nvPr/>
+        </p:nvSpPr>
+        <p:spPr>
+          <a:xfrm>
+            <a:off x="777240" y="5559552"/>
+            <a:ext cx="1600200" cy="502920"/>
+          </a:xfrm>
+          <a:prstGeom prst="roundRect">
+            <a:avLst/>
+          </a:prstGeom>
+          <a:solidFill>
+            <a:srgbClr val="FFFFFF"/>
+          </a:solidFill>
+          <a:ln>
+            <a:solidFill>
+              <a:srgbClr val="E0E5EE"/>
+            </a:solidFill>
+          </a:ln>
+        </p:spPr>
+        <p:style>
+          <a:lnRef idx="1">
+            <a:schemeClr val="accent1"/>
+          </a:lnRef>
+          <a:fillRef idx="3">
+            <a:schemeClr val="accent1"/>
+          </a:fillRef>
+          <a:effectRef idx="2">
+            <a:schemeClr val="accent1"/>
+          </a:effectRef>
+          <a:fontRef idx="minor">
+            <a:schemeClr val="lt1"/>
+          </a:fontRef>
+        </p:style>
+        <p:txBody>
+          <a:bodyPr rtlCol="0" anchor="ctr"/>
+          <a:lstStyle/>
+          <a:p>
+            <a:pPr algn="ctr"/>
+            <a:endParaRPr/>
+          </a:p>
+        </p:txBody>
+      </p:sp>
+      <p:sp>
+        <p:nvSpPr>
+          <p:cNvPr id="32" name="TextBox 31"/>
+          <p:cNvSpPr txBox="1"/>
+          <p:nvPr/>
+        </p:nvSpPr>
+        <p:spPr>
+          <a:xfrm>
+            <a:off x="777240" y="5687568"/>
+            <a:ext cx="1600200" cy="201168"/>
+          </a:xfrm>
+          <a:prstGeom prst="rect">
+            <a:avLst/>
+          </a:prstGeom>
+          <a:noFill/>
+        </p:spPr>
+        <p:txBody>
+          <a:bodyPr wrap="square">
+            <a:spAutoFit/>
+          </a:bodyPr>
+          <a:lstStyle/>
+          <a:p>
+            <a:pPr algn="ctr"/>
+            <a:r>
+              <a:rPr sz="1100" b="1">
+                <a:solidFill>
+                  <a:srgbClr val="121B2D"/>
+                </a:solidFill>
+                <a:latin typeface="Aptos"/>
+              </a:rPr>
+              <a:t>Data Grid</a:t>
+            </a:r>
+          </a:p>
+        </p:txBody>
+      </p:sp>
+      <p:sp>
+        <p:nvSpPr>
+          <p:cNvPr id="33" name="Rounded Rectangle 32"/>
+          <p:cNvSpPr/>
+          <p:nvPr/>
+        </p:nvSpPr>
+        <p:spPr>
+          <a:xfrm>
+            <a:off x="2633472" y="5559552"/>
+            <a:ext cx="1600200" cy="502920"/>
+          </a:xfrm>
+          <a:prstGeom prst="roundRect">
+            <a:avLst/>
+          </a:prstGeom>
+          <a:solidFill>
+            <a:srgbClr val="FFFFFF"/>
+          </a:solidFill>
+          <a:ln>
+            <a:solidFill>
+              <a:srgbClr val="E0E5EE"/>
+            </a:solidFill>
+          </a:ln>
+        </p:spPr>
+        <p:style>
+          <a:lnRef idx="1">
+            <a:schemeClr val="accent1"/>
+          </a:lnRef>
+          <a:fillRef idx="3">
+            <a:schemeClr val="accent1"/>
+          </a:fillRef>
+          <a:effectRef idx="2">
+            <a:schemeClr val="accent1"/>
+          </a:effectRef>
+          <a:fontRef idx="minor">
+            <a:schemeClr val="lt1"/>
+          </a:fontRef>
+        </p:style>
+        <p:txBody>
+          <a:bodyPr rtlCol="0" anchor="ctr"/>
+          <a:lstStyle/>
+          <a:p>
+            <a:pPr algn="ctr"/>
+            <a:endParaRPr/>
+          </a:p>
+        </p:txBody>
+      </p:sp>
+      <p:sp>
+        <p:nvSpPr>
+          <p:cNvPr id="34" name="TextBox 33"/>
+          <p:cNvSpPr txBox="1"/>
+          <p:nvPr/>
+        </p:nvSpPr>
+        <p:spPr>
+          <a:xfrm>
+            <a:off x="2633472" y="5687568"/>
+            <a:ext cx="1600200" cy="201168"/>
+          </a:xfrm>
+          <a:prstGeom prst="rect">
+            <a:avLst/>
+          </a:prstGeom>
+          <a:noFill/>
+        </p:spPr>
+        <p:txBody>
+          <a:bodyPr wrap="square">
+            <a:spAutoFit/>
+          </a:bodyPr>
+          <a:lstStyle/>
+          <a:p>
+            <a:pPr algn="ctr"/>
+            <a:r>
+              <a:rPr sz="1100" b="1">
+                <a:solidFill>
+                  <a:srgbClr val="121B2D"/>
+                </a:solidFill>
+                <a:latin typeface="Aptos"/>
+              </a:rPr>
+              <a:t>Form</a:t>
+            </a:r>
+          </a:p>
+        </p:txBody>
+      </p:sp>
+      <p:sp>
+        <p:nvSpPr>
+          <p:cNvPr id="35" name="Rounded Rectangle 34"/>
+          <p:cNvSpPr/>
+          <p:nvPr/>
+        </p:nvSpPr>
+        <p:spPr>
+          <a:xfrm>
+            <a:off x="4489703" y="5559552"/>
+            <a:ext cx="1600200" cy="502920"/>
+          </a:xfrm>
+          <a:prstGeom prst="roundRect">
+            <a:avLst/>
+          </a:prstGeom>
+          <a:solidFill>
+            <a:srgbClr val="FFFFFF"/>
+          </a:solidFill>
+          <a:ln>
+            <a:solidFill>
+              <a:srgbClr val="E0E5EE"/>
+            </a:solidFill>
+          </a:ln>
+        </p:spPr>
+        <p:style>
+          <a:lnRef idx="1">
+            <a:schemeClr val="accent1"/>
+          </a:lnRef>
+          <a:fillRef idx="3">
+            <a:schemeClr val="accent1"/>
+          </a:fillRef>
+          <a:effectRef idx="2">
+            <a:schemeClr val="accent1"/>
+          </a:effectRef>
+          <a:fontRef idx="minor">
+            <a:schemeClr val="lt1"/>
+          </a:fontRef>
+        </p:style>
+        <p:txBody>
+          <a:bodyPr rtlCol="0" anchor="ctr"/>
+          <a:lstStyle/>
+          <a:p>
+            <a:pPr algn="ctr"/>
+            <a:endParaRPr/>
+          </a:p>
+        </p:txBody>
+      </p:sp>
+      <p:sp>
+        <p:nvSpPr>
+          <p:cNvPr id="36" name="TextBox 35"/>
+          <p:cNvSpPr txBox="1"/>
+          <p:nvPr/>
+        </p:nvSpPr>
+        <p:spPr>
+          <a:xfrm>
+            <a:off x="4489703" y="5687568"/>
+            <a:ext cx="1600200" cy="201168"/>
+          </a:xfrm>
+          <a:prstGeom prst="rect">
+            <a:avLst/>
+          </a:prstGeom>
+          <a:noFill/>
+        </p:spPr>
+        <p:txBody>
+          <a:bodyPr wrap="square">
+            <a:spAutoFit/>
+          </a:bodyPr>
+          <a:lstStyle/>
+          <a:p>
+            <a:pPr algn="ctr"/>
+            <a:r>
+              <a:rPr sz="1100" b="1">
+                <a:solidFill>
+                  <a:srgbClr val="121B2D"/>
+                </a:solidFill>
+                <a:latin typeface="Aptos"/>
+              </a:rPr>
+              <a:t>Kanban</a:t>
+            </a:r>
+          </a:p>
+        </p:txBody>
+      </p:sp>
+      <p:sp>
+        <p:nvSpPr>
+          <p:cNvPr id="37" name="Rounded Rectangle 36"/>
+          <p:cNvSpPr/>
+          <p:nvPr/>
+        </p:nvSpPr>
+        <p:spPr>
+          <a:xfrm>
+            <a:off x="6345936" y="5559552"/>
+            <a:ext cx="1600200" cy="502920"/>
+          </a:xfrm>
+          <a:prstGeom prst="roundRect">
+            <a:avLst/>
+          </a:prstGeom>
+          <a:solidFill>
+            <a:srgbClr val="FFFFFF"/>
+          </a:solidFill>
+          <a:ln>
+            <a:solidFill>
+              <a:srgbClr val="E0E5EE"/>
+            </a:solidFill>
+          </a:ln>
+        </p:spPr>
+        <p:style>
+          <a:lnRef idx="1">
+            <a:schemeClr val="accent1"/>
+          </a:lnRef>
+          <a:fillRef idx="3">
+            <a:schemeClr val="accent1"/>
+          </a:fillRef>
+          <a:effectRef idx="2">
+            <a:schemeClr val="accent1"/>
+          </a:effectRef>
+          <a:fontRef idx="minor">
+            <a:schemeClr val="lt1"/>
+          </a:fontRef>
+        </p:style>
+        <p:txBody>
+          <a:bodyPr rtlCol="0" anchor="ctr"/>
+          <a:lstStyle/>
+          <a:p>
+            <a:pPr algn="ctr"/>
+            <a:endParaRPr/>
+          </a:p>
+        </p:txBody>
+      </p:sp>
+      <p:sp>
+        <p:nvSpPr>
+          <p:cNvPr id="38" name="TextBox 37"/>
+          <p:cNvSpPr txBox="1"/>
+          <p:nvPr/>
+        </p:nvSpPr>
+        <p:spPr>
+          <a:xfrm>
+            <a:off x="6345936" y="5687568"/>
+            <a:ext cx="1600200" cy="201168"/>
+          </a:xfrm>
+          <a:prstGeom prst="rect">
+            <a:avLst/>
+          </a:prstGeom>
+          <a:noFill/>
+        </p:spPr>
+        <p:txBody>
+          <a:bodyPr wrap="square">
+            <a:spAutoFit/>
+          </a:bodyPr>
+          <a:lstStyle/>
+          <a:p>
+            <a:pPr algn="ctr"/>
+            <a:r>
+              <a:rPr sz="1100" b="1">
+                <a:solidFill>
+                  <a:srgbClr val="121B2D"/>
+                </a:solidFill>
+                <a:latin typeface="Aptos"/>
+              </a:rPr>
+              <a:t>Calendar</a:t>
+            </a:r>
+          </a:p>
+        </p:txBody>
+      </p:sp>
+      <p:sp>
+        <p:nvSpPr>
+          <p:cNvPr id="39" name="Rounded Rectangle 38"/>
+          <p:cNvSpPr/>
+          <p:nvPr/>
+        </p:nvSpPr>
+        <p:spPr>
+          <a:xfrm>
+            <a:off x="8202167" y="5559552"/>
+            <a:ext cx="1600200" cy="502920"/>
+          </a:xfrm>
+          <a:prstGeom prst="roundRect">
+            <a:avLst/>
+          </a:prstGeom>
+          <a:solidFill>
+            <a:srgbClr val="FFFFFF"/>
+          </a:solidFill>
+          <a:ln>
+            <a:solidFill>
+              <a:srgbClr val="E0E5EE"/>
+            </a:solidFill>
+          </a:ln>
+        </p:spPr>
+        <p:style>
+          <a:lnRef idx="1">
+            <a:schemeClr val="accent1"/>
+          </a:lnRef>
+          <a:fillRef idx="3">
+            <a:schemeClr val="accent1"/>
+          </a:fillRef>
+          <a:effectRef idx="2">
+            <a:schemeClr val="accent1"/>
+          </a:effectRef>
+          <a:fontRef idx="minor">
+            <a:schemeClr val="lt1"/>
+          </a:fontRef>
+        </p:style>
+        <p:txBody>
+          <a:bodyPr rtlCol="0" anchor="ctr"/>
+          <a:lstStyle/>
+          <a:p>
+            <a:pPr algn="ctr"/>
+            <a:endParaRPr/>
+          </a:p>
+        </p:txBody>
+      </p:sp>
+      <p:sp>
+        <p:nvSpPr>
+          <p:cNvPr id="40" name="TextBox 39"/>
+          <p:cNvSpPr txBox="1"/>
+          <p:nvPr/>
+        </p:nvSpPr>
+        <p:spPr>
+          <a:xfrm>
+            <a:off x="8202167" y="5687568"/>
+            <a:ext cx="1600200" cy="201168"/>
+          </a:xfrm>
+          <a:prstGeom prst="rect">
+            <a:avLst/>
+          </a:prstGeom>
+          <a:noFill/>
+        </p:spPr>
+        <p:txBody>
+          <a:bodyPr wrap="square">
+            <a:spAutoFit/>
+          </a:bodyPr>
+          <a:lstStyle/>
+          <a:p>
+            <a:pPr algn="ctr"/>
+            <a:r>
+              <a:rPr sz="1100" b="1">
+                <a:solidFill>
+                  <a:srgbClr val="121B2D"/>
+                </a:solidFill>
+                <a:latin typeface="Aptos"/>
+              </a:rPr>
+              <a:t>Gallery</a:t>
+            </a:r>
+          </a:p>
+        </p:txBody>
+      </p:sp>
+      <p:sp>
+        <p:nvSpPr>
+          <p:cNvPr id="41" name="Rounded Rectangle 40"/>
+          <p:cNvSpPr/>
+          <p:nvPr/>
+        </p:nvSpPr>
+        <p:spPr>
+          <a:xfrm>
+            <a:off x="10058399" y="5559552"/>
+            <a:ext cx="1600200" cy="502920"/>
+          </a:xfrm>
+          <a:prstGeom prst="roundRect">
+            <a:avLst/>
+          </a:prstGeom>
+          <a:solidFill>
+            <a:srgbClr val="FFFFFF"/>
+          </a:solidFill>
+          <a:ln>
+            <a:solidFill>
+              <a:srgbClr val="E0E5EE"/>
+            </a:solidFill>
+          </a:ln>
+        </p:spPr>
+        <p:style>
+          <a:lnRef idx="1">
+            <a:schemeClr val="accent1"/>
+          </a:lnRef>
+          <a:fillRef idx="3">
+            <a:schemeClr val="accent1"/>
+          </a:fillRef>
+          <a:effectRef idx="2">
+            <a:schemeClr val="accent1"/>
+          </a:effectRef>
+          <a:fontRef idx="minor">
+            <a:schemeClr val="lt1"/>
+          </a:fontRef>
+        </p:style>
+        <p:txBody>
+          <a:bodyPr rtlCol="0" anchor="ctr"/>
+          <a:lstStyle/>
+          <a:p>
+            <a:pPr algn="ctr"/>
+            <a:endParaRPr/>
+          </a:p>
+        </p:txBody>
+      </p:sp>
+      <p:sp>
+        <p:nvSpPr>
+          <p:cNvPr id="42" name="TextBox 41"/>
+          <p:cNvSpPr txBox="1"/>
+          <p:nvPr/>
+        </p:nvSpPr>
+        <p:spPr>
+          <a:xfrm>
+            <a:off x="10058399" y="5687568"/>
+            <a:ext cx="1600200" cy="201168"/>
+          </a:xfrm>
+          <a:prstGeom prst="rect">
+            <a:avLst/>
+          </a:prstGeom>
+          <a:noFill/>
+        </p:spPr>
+        <p:txBody>
+          <a:bodyPr wrap="square">
+            <a:spAutoFit/>
+          </a:bodyPr>
+          <a:lstStyle/>
+          <a:p>
+            <a:pPr algn="ctr"/>
+            <a:r>
+              <a:rPr sz="1100" b="1">
+                <a:solidFill>
+                  <a:srgbClr val="121B2D"/>
+                </a:solidFill>
+                <a:latin typeface="Aptos"/>
+              </a:rPr>
+              <a:t>Dashboard</a:t>
+            </a:r>
+          </a:p>
+        </p:txBody>
+      </p:sp>
+      <p:sp>
+        <p:nvSpPr>
+          <p:cNvPr id="45" name="TextBox 44">
+            <a:extLst>
+              <a:ext uri="{FF2B5EF4-FFF2-40B4-BE49-F238E27FC236}">
+                <a16:creationId xmlns:a16="http://schemas.microsoft.com/office/drawing/2014/main" id="{03F7495F-CF7A-84E3-9809-158E656EB083}"/>
+              </a:ext>
+            </a:extLst>
+          </p:cNvPr>
+          <p:cNvSpPr txBox="1"/>
+          <p:nvPr/>
+        </p:nvSpPr>
+        <p:spPr>
+          <a:xfrm>
+            <a:off x="439554" y="316575"/>
+            <a:ext cx="8311254" cy="553998"/>
+          </a:xfrm>
+          <a:prstGeom prst="rect">
+            <a:avLst/>
+          </a:prstGeom>
+          <a:noFill/>
+        </p:spPr>
+        <p:txBody>
+          <a:bodyPr wrap="square">
+            <a:spAutoFit/>
+          </a:bodyPr>
+          <a:lstStyle/>
+          <a:p>
+            <a:r>
+              <a:rPr lang="en-US" sz="3000" b="1" i="0" dirty="0">
+                <a:solidFill>
+                  <a:schemeClr val="tx1"/>
+                </a:solidFill>
+                <a:effectLst/>
+                <a:latin typeface="Lexend" panose="020B0604020202020204" charset="-94"/>
+              </a:rPr>
+              <a:t>ABP LOW-CODE SYSTEM</a:t>
+            </a:r>
+            <a:endParaRPr lang="en-US" sz="3000" b="1" i="0" noProof="0" dirty="0">
+              <a:solidFill>
+                <a:schemeClr val="tx1"/>
+              </a:solidFill>
+              <a:effectLst/>
+              <a:latin typeface="Lexend" panose="020B0604020202020204" charset="-94"/>
+            </a:endParaRPr>
+          </a:p>
+        </p:txBody>
+      </p:sp>
+      <p:cxnSp>
+        <p:nvCxnSpPr>
+          <p:cNvPr id="46" name="Straight Connector 45">
+            <a:extLst>
+              <a:ext uri="{FF2B5EF4-FFF2-40B4-BE49-F238E27FC236}">
+                <a16:creationId xmlns:a16="http://schemas.microsoft.com/office/drawing/2014/main" id="{48F9AA3E-64E2-91FA-D764-5369C6F8A92A}"/>
+              </a:ext>
+            </a:extLst>
+          </p:cNvPr>
+          <p:cNvCxnSpPr>
+            <a:cxnSpLocks/>
+          </p:cNvCxnSpPr>
+          <p:nvPr/>
+        </p:nvCxnSpPr>
+        <p:spPr>
+          <a:xfrm>
+            <a:off x="522762" y="924455"/>
+            <a:ext cx="6324539" cy="0"/>
+          </a:xfrm>
+          <a:prstGeom prst="line">
+            <a:avLst/>
+          </a:prstGeom>
+          <a:ln w="28575">
+            <a:solidFill>
+              <a:schemeClr val="bg1">
+                <a:lumMod val="50000"/>
+              </a:schemeClr>
+            </a:solidFill>
+            <a:prstDash val="sysDot"/>
+          </a:ln>
+        </p:spPr>
+        <p:style>
+          <a:lnRef idx="1">
+            <a:schemeClr val="accent1"/>
+          </a:lnRef>
+          <a:fillRef idx="0">
+            <a:schemeClr val="accent1"/>
+          </a:fillRef>
+          <a:effectRef idx="0">
+            <a:schemeClr val="accent1"/>
+          </a:effectRef>
+          <a:fontRef idx="minor">
+            <a:schemeClr val="tx1"/>
+          </a:fontRef>
+        </p:style>
+      </p:cxnSp>
+      <p:sp>
+        <p:nvSpPr>
+          <p:cNvPr id="47" name="Rectangle 46">
+            <a:extLst>
+              <a:ext uri="{FF2B5EF4-FFF2-40B4-BE49-F238E27FC236}">
+                <a16:creationId xmlns:a16="http://schemas.microsoft.com/office/drawing/2014/main" id="{6E33AF90-97DB-6E37-B97E-BDF29021CC03}"/>
+              </a:ext>
+            </a:extLst>
+          </p:cNvPr>
+          <p:cNvSpPr/>
+          <p:nvPr/>
+        </p:nvSpPr>
+        <p:spPr>
+          <a:xfrm>
+            <a:off x="8381812" y="3831335"/>
+            <a:ext cx="2688673" cy="1453235"/>
+          </a:xfrm>
+          <a:prstGeom prst="rect">
+            <a:avLst/>
+          </a:prstGeom>
+          <a:solidFill>
+            <a:schemeClr val="accent6">
+              <a:alpha val="50000"/>
+            </a:schemeClr>
+          </a:solidFill>
+          <a:ln>
+            <a:noFill/>
+          </a:ln>
+        </p:spPr>
+        <p:style>
+          <a:lnRef idx="0">
+            <a:scrgbClr r="0" g="0" b="0"/>
+          </a:lnRef>
+          <a:fillRef idx="0">
+            <a:scrgbClr r="0" g="0" b="0"/>
+          </a:fillRef>
+          <a:effectRef idx="0">
+            <a:scrgbClr r="0" g="0" b="0"/>
+          </a:effectRef>
+          <a:fontRef idx="minor">
+            <a:schemeClr val="lt1"/>
+          </a:fontRef>
+        </p:style>
+        <p:txBody>
+          <a:bodyPr rtlCol="0" anchor="ctr"/>
+          <a:lstStyle/>
+          <a:p>
+            <a:pPr algn="ctr"/>
+            <a:endParaRPr lang="en-US"/>
+          </a:p>
+        </p:txBody>
+      </p:sp>
+      <p:sp>
+        <p:nvSpPr>
+          <p:cNvPr id="30" name="TextBox 29"/>
+          <p:cNvSpPr txBox="1"/>
+          <p:nvPr/>
+        </p:nvSpPr>
+        <p:spPr>
+          <a:xfrm>
+            <a:off x="8421623" y="3877058"/>
+            <a:ext cx="3054097" cy="1323439"/>
+          </a:xfrm>
+          <a:prstGeom prst="rect">
+            <a:avLst/>
+          </a:prstGeom>
+          <a:noFill/>
+        </p:spPr>
+        <p:txBody>
+          <a:bodyPr wrap="square">
+            <a:spAutoFit/>
+          </a:bodyPr>
+          <a:lstStyle/>
+          <a:p>
+            <a:r>
+              <a:rPr sz="1600" b="1" dirty="0">
+                <a:solidFill>
+                  <a:srgbClr val="FFFFFF"/>
+                </a:solidFill>
+                <a:latin typeface="Aptos"/>
+              </a:rPr>
+              <a:t>N</a:t>
+            </a:r>
+            <a:r>
+              <a:rPr lang="en-US" sz="1600" b="1" dirty="0">
+                <a:solidFill>
+                  <a:srgbClr val="FFFFFF"/>
+                </a:solidFill>
+                <a:latin typeface="Aptos"/>
+              </a:rPr>
+              <a:t>O</a:t>
+            </a:r>
+            <a:r>
+              <a:rPr sz="1600" b="1" dirty="0">
+                <a:solidFill>
+                  <a:srgbClr val="FFFFFF"/>
+                </a:solidFill>
+                <a:latin typeface="Aptos"/>
+              </a:rPr>
+              <a:t> </a:t>
+            </a:r>
+            <a:r>
+              <a:rPr lang="en-US" sz="1600" b="1" dirty="0">
+                <a:solidFill>
+                  <a:srgbClr val="FFFFFF"/>
+                </a:solidFill>
+                <a:latin typeface="Aptos"/>
+              </a:rPr>
+              <a:t>👇</a:t>
+            </a:r>
+          </a:p>
+          <a:p>
+            <a:r>
+              <a:rPr lang="en-US" sz="1600" b="1" dirty="0">
+                <a:solidFill>
+                  <a:srgbClr val="FFFFFF"/>
+                </a:solidFill>
+                <a:latin typeface="Aptos"/>
+              </a:rPr>
+              <a:t>• </a:t>
+            </a:r>
+            <a:r>
+              <a:rPr sz="1600" b="1" dirty="0">
+                <a:solidFill>
+                  <a:srgbClr val="FFFFFF"/>
+                </a:solidFill>
+                <a:latin typeface="Aptos"/>
+              </a:rPr>
+              <a:t>DTO </a:t>
+            </a:r>
+            <a:endParaRPr lang="en-US" sz="1600" b="1" dirty="0">
+              <a:solidFill>
+                <a:srgbClr val="FFFFFF"/>
+              </a:solidFill>
+              <a:latin typeface="Aptos"/>
+            </a:endParaRPr>
+          </a:p>
+          <a:p>
+            <a:r>
+              <a:rPr sz="1600" b="1" dirty="0">
+                <a:solidFill>
+                  <a:srgbClr val="FFFFFF"/>
+                </a:solidFill>
+                <a:latin typeface="Aptos"/>
+              </a:rPr>
+              <a:t>• Repository </a:t>
+            </a:r>
+            <a:endParaRPr lang="en-US" sz="1600" b="1" dirty="0">
+              <a:solidFill>
+                <a:srgbClr val="FFFFFF"/>
+              </a:solidFill>
+              <a:latin typeface="Aptos"/>
+            </a:endParaRPr>
+          </a:p>
+          <a:p>
+            <a:r>
+              <a:rPr sz="1600" b="1" dirty="0">
+                <a:solidFill>
+                  <a:srgbClr val="FFFFFF"/>
+                </a:solidFill>
+                <a:latin typeface="Aptos"/>
+              </a:rPr>
+              <a:t>• Application Service </a:t>
+            </a:r>
+            <a:endParaRPr lang="en-US" sz="1600" b="1" dirty="0">
+              <a:solidFill>
+                <a:srgbClr val="FFFFFF"/>
+              </a:solidFill>
+              <a:latin typeface="Aptos"/>
+            </a:endParaRPr>
+          </a:p>
+          <a:p>
+            <a:r>
+              <a:rPr sz="1600" b="1" dirty="0">
+                <a:solidFill>
+                  <a:srgbClr val="FFFFFF"/>
+                </a:solidFill>
+                <a:latin typeface="Aptos"/>
+              </a:rPr>
+              <a:t>• Controller</a:t>
+            </a:r>
+          </a:p>
+        </p:txBody>
+      </p:sp>
+    </p:spTree>
+  </p:cSld>
+  <p:clrMapOvr>
+    <a:masterClrMapping/>
+  </p:clrMapOvr>
+</p:sld>
+</file>
+
+<file path=ppt/slides/slide15.xml><?xml version="1.0" encoding="utf-8"?>
+<p:sld xmlns:a="http://schemas.openxmlformats.org/drawingml/2006/main" xmlns:r="http://schemas.openxmlformats.org/officeDocument/2006/relationships" xmlns:p="http://schemas.openxmlformats.org/presentationml/2006/main">
+  <p:cSld>
+    <p:spTree>
+      <p:nvGrpSpPr>
+        <p:cNvPr id="1" name=""/>
+        <p:cNvGrpSpPr/>
+        <p:nvPr/>
+      </p:nvGrpSpPr>
+      <p:grpSpPr>
+        <a:xfrm>
+          <a:off x="0" y="0"/>
+          <a:ext cx="0" cy="0"/>
+          <a:chOff x="0" y="0"/>
+          <a:chExt cx="0" cy="0"/>
+        </a:xfrm>
+      </p:grpSpPr>
+      <p:sp>
+        <p:nvSpPr>
+          <p:cNvPr id="3" name="TextBox 2"/>
+          <p:cNvSpPr txBox="1"/>
+          <p:nvPr/>
+        </p:nvSpPr>
+        <p:spPr>
+          <a:xfrm>
+            <a:off x="594360" y="914400"/>
+            <a:ext cx="10972800" cy="594360"/>
+          </a:xfrm>
+          <a:prstGeom prst="rect">
+            <a:avLst/>
+          </a:prstGeom>
+          <a:noFill/>
+        </p:spPr>
+        <p:txBody>
+          <a:bodyPr wrap="square">
+            <a:spAutoFit/>
+          </a:bodyPr>
+          <a:lstStyle/>
+          <a:p>
+            <a:pPr algn="l"/>
+            <a:r>
+              <a:rPr sz="2800" b="1" dirty="0">
+                <a:solidFill>
+                  <a:srgbClr val="121B2D"/>
+                </a:solidFill>
+                <a:latin typeface="Aptos"/>
+              </a:rPr>
+              <a:t>Ship More. Change Faster. Depend Less on Development.</a:t>
+            </a:r>
+          </a:p>
+        </p:txBody>
+      </p:sp>
+      <p:sp>
+        <p:nvSpPr>
+          <p:cNvPr id="4" name="TextBox 3"/>
+          <p:cNvSpPr txBox="1"/>
+          <p:nvPr/>
+        </p:nvSpPr>
+        <p:spPr>
+          <a:xfrm>
+            <a:off x="594360" y="1353312"/>
+            <a:ext cx="10972800" cy="438912"/>
+          </a:xfrm>
+          <a:prstGeom prst="rect">
+            <a:avLst/>
+          </a:prstGeom>
+          <a:noFill/>
+        </p:spPr>
+        <p:txBody>
+          <a:bodyPr wrap="square">
+            <a:spAutoFit/>
+          </a:bodyPr>
+          <a:lstStyle/>
+          <a:p>
+            <a:pPr algn="l"/>
+            <a:r>
+              <a:rPr sz="1500" b="0">
+                <a:solidFill>
+                  <a:srgbClr val="677182"/>
+                </a:solidFill>
+                <a:latin typeface="Aptos"/>
+              </a:rPr>
+              <a:t>Low-Code moves repetitive operational work out of the release cycle without creating a separate platform or black box.</a:t>
+            </a:r>
+          </a:p>
+        </p:txBody>
+      </p:sp>
+      <p:sp>
+        <p:nvSpPr>
+          <p:cNvPr id="5" name="Rounded Rectangle 4"/>
+          <p:cNvSpPr/>
+          <p:nvPr/>
+        </p:nvSpPr>
+        <p:spPr>
+          <a:xfrm>
+            <a:off x="685800" y="2057400"/>
+            <a:ext cx="5285232" cy="1481328"/>
+          </a:xfrm>
+          <a:prstGeom prst="roundRect">
+            <a:avLst/>
+          </a:prstGeom>
+          <a:solidFill>
+            <a:srgbClr val="F6F8FC"/>
+          </a:solidFill>
+          <a:ln>
+            <a:solidFill>
+              <a:srgbClr val="E0E5EE"/>
+            </a:solidFill>
+          </a:ln>
+        </p:spPr>
+        <p:style>
+          <a:lnRef idx="1">
+            <a:schemeClr val="accent1"/>
+          </a:lnRef>
+          <a:fillRef idx="3">
+            <a:schemeClr val="accent1"/>
+          </a:fillRef>
+          <a:effectRef idx="2">
+            <a:schemeClr val="accent1"/>
+          </a:effectRef>
+          <a:fontRef idx="minor">
+            <a:schemeClr val="lt1"/>
+          </a:fontRef>
+        </p:style>
+        <p:txBody>
+          <a:bodyPr rtlCol="0" anchor="ctr"/>
+          <a:lstStyle/>
+          <a:p>
+            <a:pPr algn="ctr"/>
+            <a:endParaRPr/>
+          </a:p>
+        </p:txBody>
+      </p:sp>
+      <p:sp>
+        <p:nvSpPr>
+          <p:cNvPr id="6" name="Oval 5"/>
+          <p:cNvSpPr/>
+          <p:nvPr/>
+        </p:nvSpPr>
+        <p:spPr>
+          <a:xfrm>
+            <a:off x="886968" y="2304288"/>
+            <a:ext cx="475488" cy="475488"/>
+          </a:xfrm>
+          <a:prstGeom prst="ellipse">
+            <a:avLst/>
+          </a:prstGeom>
+          <a:solidFill>
+            <a:srgbClr val="3D7EFF"/>
+          </a:solidFill>
+          <a:ln>
+            <a:solidFill>
+              <a:srgbClr val="3D7EFF"/>
+            </a:solidFill>
+          </a:ln>
+        </p:spPr>
+        <p:style>
+          <a:lnRef idx="1">
+            <a:schemeClr val="accent1"/>
+          </a:lnRef>
+          <a:fillRef idx="3">
+            <a:schemeClr val="accent1"/>
+          </a:fillRef>
+          <a:effectRef idx="2">
+            <a:schemeClr val="accent1"/>
+          </a:effectRef>
+          <a:fontRef idx="minor">
+            <a:schemeClr val="lt1"/>
+          </a:fontRef>
+        </p:style>
+        <p:txBody>
+          <a:bodyPr rtlCol="0" anchor="ctr"/>
+          <a:lstStyle/>
+          <a:p>
+            <a:pPr algn="ctr"/>
+            <a:endParaRPr/>
+          </a:p>
+        </p:txBody>
+      </p:sp>
+      <p:sp>
+        <p:nvSpPr>
+          <p:cNvPr id="7" name="TextBox 6"/>
+          <p:cNvSpPr txBox="1"/>
+          <p:nvPr/>
+        </p:nvSpPr>
+        <p:spPr>
+          <a:xfrm>
+            <a:off x="886968" y="2340864"/>
+            <a:ext cx="475488" cy="320040"/>
+          </a:xfrm>
+          <a:prstGeom prst="rect">
+            <a:avLst/>
+          </a:prstGeom>
+          <a:noFill/>
+        </p:spPr>
+        <p:txBody>
+          <a:bodyPr wrap="square">
+            <a:spAutoFit/>
+          </a:bodyPr>
+          <a:lstStyle/>
+          <a:p>
+            <a:pPr algn="ctr"/>
+            <a:r>
+              <a:rPr sz="1600" b="1">
+                <a:solidFill>
+                  <a:srgbClr val="FFFFFF"/>
+                </a:solidFill>
+                <a:latin typeface="Aptos"/>
+              </a:rPr>
+              <a:t>⚡</a:t>
+            </a:r>
+          </a:p>
+        </p:txBody>
+      </p:sp>
+      <p:sp>
+        <p:nvSpPr>
+          <p:cNvPr id="8" name="TextBox 7"/>
+          <p:cNvSpPr txBox="1"/>
+          <p:nvPr/>
+        </p:nvSpPr>
+        <p:spPr>
+          <a:xfrm>
+            <a:off x="1527048" y="2152186"/>
+            <a:ext cx="4069080" cy="274320"/>
+          </a:xfrm>
+          <a:prstGeom prst="rect">
+            <a:avLst/>
+          </a:prstGeom>
+          <a:noFill/>
+        </p:spPr>
+        <p:txBody>
+          <a:bodyPr wrap="square">
+            <a:spAutoFit/>
+          </a:bodyPr>
+          <a:lstStyle/>
+          <a:p>
+            <a:pPr algn="l"/>
+            <a:r>
+              <a:rPr sz="1600" b="1" dirty="0">
+                <a:solidFill>
+                  <a:srgbClr val="121B2D"/>
+                </a:solidFill>
+                <a:latin typeface="Aptos"/>
+              </a:rPr>
+              <a:t>Runtime changes</a:t>
+            </a:r>
+          </a:p>
+        </p:txBody>
+      </p:sp>
+      <p:sp>
+        <p:nvSpPr>
+          <p:cNvPr id="9" name="TextBox 8"/>
+          <p:cNvSpPr txBox="1"/>
+          <p:nvPr/>
+        </p:nvSpPr>
+        <p:spPr>
+          <a:xfrm>
+            <a:off x="1527048" y="2436310"/>
+            <a:ext cx="4114800" cy="1077218"/>
+          </a:xfrm>
+          <a:prstGeom prst="rect">
+            <a:avLst/>
+          </a:prstGeom>
+          <a:noFill/>
+        </p:spPr>
+        <p:txBody>
+          <a:bodyPr wrap="square">
+            <a:spAutoFit/>
+          </a:bodyPr>
+          <a:lstStyle/>
+          <a:p>
+            <a:pPr algn="l"/>
+            <a:r>
+              <a:rPr sz="1600" b="0" dirty="0">
+                <a:solidFill>
+                  <a:srgbClr val="677182"/>
+                </a:solidFill>
+                <a:latin typeface="Aptos"/>
+              </a:rPr>
+              <a:t>Create or update models, screens and permissions without regenerating the whole solution or waiting for a normal UI release cycle.</a:t>
+            </a:r>
+          </a:p>
+        </p:txBody>
+      </p:sp>
+      <p:sp>
+        <p:nvSpPr>
+          <p:cNvPr id="10" name="Rounded Rectangle 9"/>
+          <p:cNvSpPr/>
+          <p:nvPr/>
+        </p:nvSpPr>
+        <p:spPr>
+          <a:xfrm>
+            <a:off x="6199632" y="2057400"/>
+            <a:ext cx="5285232" cy="1481328"/>
+          </a:xfrm>
+          <a:prstGeom prst="roundRect">
+            <a:avLst/>
+          </a:prstGeom>
+          <a:solidFill>
+            <a:srgbClr val="F6F8FC"/>
+          </a:solidFill>
+          <a:ln>
+            <a:solidFill>
+              <a:srgbClr val="E0E5EE"/>
+            </a:solidFill>
+          </a:ln>
+        </p:spPr>
+        <p:style>
+          <a:lnRef idx="1">
+            <a:schemeClr val="accent1"/>
+          </a:lnRef>
+          <a:fillRef idx="3">
+            <a:schemeClr val="accent1"/>
+          </a:fillRef>
+          <a:effectRef idx="2">
+            <a:schemeClr val="accent1"/>
+          </a:effectRef>
+          <a:fontRef idx="minor">
+            <a:schemeClr val="lt1"/>
+          </a:fontRef>
+        </p:style>
+        <p:txBody>
+          <a:bodyPr rtlCol="0" anchor="ctr"/>
+          <a:lstStyle/>
+          <a:p>
+            <a:pPr algn="ctr"/>
+            <a:endParaRPr/>
+          </a:p>
+        </p:txBody>
+      </p:sp>
+      <p:sp>
+        <p:nvSpPr>
+          <p:cNvPr id="11" name="Oval 10"/>
+          <p:cNvSpPr/>
+          <p:nvPr/>
+        </p:nvSpPr>
+        <p:spPr>
+          <a:xfrm>
+            <a:off x="6400800" y="2304288"/>
+            <a:ext cx="475488" cy="475488"/>
+          </a:xfrm>
+          <a:prstGeom prst="ellipse">
+            <a:avLst/>
+          </a:prstGeom>
+          <a:solidFill>
+            <a:srgbClr val="3D7EFF"/>
+          </a:solidFill>
+          <a:ln>
+            <a:solidFill>
+              <a:srgbClr val="3D7EFF"/>
+            </a:solidFill>
+          </a:ln>
+        </p:spPr>
+        <p:style>
+          <a:lnRef idx="1">
+            <a:schemeClr val="accent1"/>
+          </a:lnRef>
+          <a:fillRef idx="3">
+            <a:schemeClr val="accent1"/>
+          </a:fillRef>
+          <a:effectRef idx="2">
+            <a:schemeClr val="accent1"/>
+          </a:effectRef>
+          <a:fontRef idx="minor">
+            <a:schemeClr val="lt1"/>
+          </a:fontRef>
+        </p:style>
+        <p:txBody>
+          <a:bodyPr rtlCol="0" anchor="ctr"/>
+          <a:lstStyle/>
+          <a:p>
+            <a:pPr algn="ctr"/>
+            <a:endParaRPr/>
+          </a:p>
+        </p:txBody>
+      </p:sp>
+      <p:sp>
+        <p:nvSpPr>
+          <p:cNvPr id="12" name="TextBox 11"/>
+          <p:cNvSpPr txBox="1"/>
+          <p:nvPr/>
+        </p:nvSpPr>
+        <p:spPr>
+          <a:xfrm>
+            <a:off x="6400800" y="2340864"/>
+            <a:ext cx="475488" cy="320040"/>
+          </a:xfrm>
+          <a:prstGeom prst="rect">
+            <a:avLst/>
+          </a:prstGeom>
+          <a:noFill/>
+        </p:spPr>
+        <p:txBody>
+          <a:bodyPr wrap="square">
+            <a:spAutoFit/>
+          </a:bodyPr>
+          <a:lstStyle/>
+          <a:p>
+            <a:pPr algn="ctr"/>
+            <a:r>
+              <a:rPr sz="1600" b="1">
+                <a:solidFill>
+                  <a:srgbClr val="FFFFFF"/>
+                </a:solidFill>
+                <a:latin typeface="Aptos"/>
+              </a:rPr>
+              <a:t>↗</a:t>
+            </a:r>
+          </a:p>
+        </p:txBody>
+      </p:sp>
+      <p:sp>
+        <p:nvSpPr>
+          <p:cNvPr id="13" name="TextBox 12"/>
+          <p:cNvSpPr txBox="1"/>
+          <p:nvPr/>
+        </p:nvSpPr>
+        <p:spPr>
+          <a:xfrm>
+            <a:off x="7040880" y="2152186"/>
+            <a:ext cx="4069080" cy="274320"/>
+          </a:xfrm>
+          <a:prstGeom prst="rect">
+            <a:avLst/>
+          </a:prstGeom>
+          <a:noFill/>
+        </p:spPr>
+        <p:txBody>
+          <a:bodyPr wrap="square">
+            <a:spAutoFit/>
+          </a:bodyPr>
+          <a:lstStyle/>
+          <a:p>
+            <a:pPr algn="l"/>
+            <a:r>
+              <a:rPr sz="1600" b="1">
+                <a:solidFill>
+                  <a:srgbClr val="121B2D"/>
+                </a:solidFill>
+                <a:latin typeface="Aptos"/>
+              </a:rPr>
+              <a:t>Ready-to-use APIs</a:t>
+            </a:r>
+          </a:p>
+        </p:txBody>
+      </p:sp>
+      <p:sp>
+        <p:nvSpPr>
+          <p:cNvPr id="14" name="TextBox 13"/>
+          <p:cNvSpPr txBox="1"/>
+          <p:nvPr/>
+        </p:nvSpPr>
+        <p:spPr>
+          <a:xfrm>
+            <a:off x="7040880" y="2470889"/>
+            <a:ext cx="4114800" cy="830997"/>
+          </a:xfrm>
+          <a:prstGeom prst="rect">
+            <a:avLst/>
+          </a:prstGeom>
+          <a:noFill/>
+        </p:spPr>
+        <p:txBody>
+          <a:bodyPr wrap="square">
+            <a:spAutoFit/>
+          </a:bodyPr>
+          <a:lstStyle/>
+          <a:p>
+            <a:pPr algn="l"/>
+            <a:r>
+              <a:rPr sz="1600" b="0" dirty="0">
+                <a:solidFill>
+                  <a:srgbClr val="677182"/>
+                </a:solidFill>
+                <a:latin typeface="Aptos"/>
+              </a:rPr>
+              <a:t>Dynamic entities come with CRUD REST APIs; custom endpoints can be added when the standard flow is not enough.</a:t>
+            </a:r>
+          </a:p>
+        </p:txBody>
+      </p:sp>
+      <p:sp>
+        <p:nvSpPr>
+          <p:cNvPr id="15" name="Rounded Rectangle 14"/>
+          <p:cNvSpPr/>
+          <p:nvPr/>
+        </p:nvSpPr>
+        <p:spPr>
+          <a:xfrm>
+            <a:off x="685800" y="3867912"/>
+            <a:ext cx="5285232" cy="1481328"/>
+          </a:xfrm>
+          <a:prstGeom prst="roundRect">
+            <a:avLst/>
+          </a:prstGeom>
+          <a:solidFill>
+            <a:srgbClr val="F6F8FC"/>
+          </a:solidFill>
+          <a:ln>
+            <a:solidFill>
+              <a:srgbClr val="E0E5EE"/>
+            </a:solidFill>
+          </a:ln>
+        </p:spPr>
+        <p:style>
+          <a:lnRef idx="1">
+            <a:schemeClr val="accent1"/>
+          </a:lnRef>
+          <a:fillRef idx="3">
+            <a:schemeClr val="accent1"/>
+          </a:fillRef>
+          <a:effectRef idx="2">
+            <a:schemeClr val="accent1"/>
+          </a:effectRef>
+          <a:fontRef idx="minor">
+            <a:schemeClr val="lt1"/>
+          </a:fontRef>
+        </p:style>
+        <p:txBody>
+          <a:bodyPr rtlCol="0" anchor="ctr"/>
+          <a:lstStyle/>
+          <a:p>
+            <a:pPr algn="ctr"/>
+            <a:endParaRPr/>
+          </a:p>
+        </p:txBody>
+      </p:sp>
+      <p:sp>
+        <p:nvSpPr>
+          <p:cNvPr id="16" name="Oval 15"/>
+          <p:cNvSpPr/>
+          <p:nvPr/>
+        </p:nvSpPr>
+        <p:spPr>
+          <a:xfrm>
+            <a:off x="886968" y="4114800"/>
+            <a:ext cx="475488" cy="475488"/>
+          </a:xfrm>
+          <a:prstGeom prst="ellipse">
+            <a:avLst/>
+          </a:prstGeom>
+          <a:solidFill>
+            <a:srgbClr val="6F42C1"/>
+          </a:solidFill>
+          <a:ln>
+            <a:solidFill>
+              <a:srgbClr val="6F42C1"/>
+            </a:solidFill>
+          </a:ln>
+        </p:spPr>
+        <p:style>
+          <a:lnRef idx="1">
+            <a:schemeClr val="accent1"/>
+          </a:lnRef>
+          <a:fillRef idx="3">
+            <a:schemeClr val="accent1"/>
+          </a:fillRef>
+          <a:effectRef idx="2">
+            <a:schemeClr val="accent1"/>
+          </a:effectRef>
+          <a:fontRef idx="minor">
+            <a:schemeClr val="lt1"/>
+          </a:fontRef>
+        </p:style>
+        <p:txBody>
+          <a:bodyPr rtlCol="0" anchor="ctr"/>
+          <a:lstStyle/>
+          <a:p>
+            <a:pPr algn="ctr"/>
+            <a:endParaRPr/>
+          </a:p>
+        </p:txBody>
+      </p:sp>
+      <p:sp>
+        <p:nvSpPr>
+          <p:cNvPr id="17" name="TextBox 16"/>
+          <p:cNvSpPr txBox="1"/>
+          <p:nvPr/>
+        </p:nvSpPr>
+        <p:spPr>
+          <a:xfrm>
+            <a:off x="886968" y="4151376"/>
+            <a:ext cx="475488" cy="320040"/>
+          </a:xfrm>
+          <a:prstGeom prst="rect">
+            <a:avLst/>
+          </a:prstGeom>
+          <a:noFill/>
+        </p:spPr>
+        <p:txBody>
+          <a:bodyPr wrap="square">
+            <a:spAutoFit/>
+          </a:bodyPr>
+          <a:lstStyle/>
+          <a:p>
+            <a:pPr algn="ctr"/>
+            <a:r>
+              <a:rPr sz="1600" b="1">
+                <a:solidFill>
+                  <a:srgbClr val="FFFFFF"/>
+                </a:solidFill>
+                <a:latin typeface="Aptos"/>
+              </a:rPr>
+              <a:t>◎</a:t>
+            </a:r>
+          </a:p>
+        </p:txBody>
+      </p:sp>
+      <p:sp>
+        <p:nvSpPr>
+          <p:cNvPr id="18" name="TextBox 17"/>
+          <p:cNvSpPr txBox="1"/>
+          <p:nvPr/>
+        </p:nvSpPr>
+        <p:spPr>
+          <a:xfrm>
+            <a:off x="1527048" y="3962698"/>
+            <a:ext cx="4069080" cy="274320"/>
+          </a:xfrm>
+          <a:prstGeom prst="rect">
+            <a:avLst/>
+          </a:prstGeom>
+          <a:noFill/>
+        </p:spPr>
+        <p:txBody>
+          <a:bodyPr wrap="square">
+            <a:spAutoFit/>
+          </a:bodyPr>
+          <a:lstStyle/>
+          <a:p>
+            <a:pPr algn="l"/>
+            <a:r>
+              <a:rPr sz="1600" b="1">
+                <a:solidFill>
+                  <a:srgbClr val="121B2D"/>
+                </a:solidFill>
+                <a:latin typeface="Aptos"/>
+              </a:rPr>
+              <a:t>Non-technical builders</a:t>
+            </a:r>
+          </a:p>
+        </p:txBody>
+      </p:sp>
+      <p:sp>
+        <p:nvSpPr>
+          <p:cNvPr id="19" name="TextBox 18"/>
+          <p:cNvSpPr txBox="1"/>
+          <p:nvPr/>
+        </p:nvSpPr>
+        <p:spPr>
+          <a:xfrm>
+            <a:off x="1527048" y="4246822"/>
+            <a:ext cx="4114800" cy="1077218"/>
+          </a:xfrm>
+          <a:prstGeom prst="rect">
+            <a:avLst/>
+          </a:prstGeom>
+          <a:noFill/>
+        </p:spPr>
+        <p:txBody>
+          <a:bodyPr wrap="square">
+            <a:spAutoFit/>
+          </a:bodyPr>
+          <a:lstStyle/>
+          <a:p>
+            <a:pPr algn="l"/>
+            <a:r>
+              <a:rPr sz="1600" b="0" dirty="0">
+                <a:solidFill>
+                  <a:srgbClr val="677182"/>
+                </a:solidFill>
+                <a:latin typeface="Aptos"/>
+              </a:rPr>
+              <a:t>Business or platform users can create operational screens visually while developers focus on advanced logic and differentiation.</a:t>
+            </a:r>
+          </a:p>
+        </p:txBody>
+      </p:sp>
+      <p:sp>
+        <p:nvSpPr>
+          <p:cNvPr id="20" name="Rounded Rectangle 19"/>
+          <p:cNvSpPr/>
+          <p:nvPr/>
+        </p:nvSpPr>
+        <p:spPr>
+          <a:xfrm>
+            <a:off x="6199632" y="3867912"/>
+            <a:ext cx="5285232" cy="1481328"/>
+          </a:xfrm>
+          <a:prstGeom prst="roundRect">
+            <a:avLst/>
+          </a:prstGeom>
+          <a:solidFill>
+            <a:srgbClr val="F6F8FC"/>
+          </a:solidFill>
+          <a:ln>
+            <a:solidFill>
+              <a:srgbClr val="E0E5EE"/>
+            </a:solidFill>
+          </a:ln>
+        </p:spPr>
+        <p:style>
+          <a:lnRef idx="1">
+            <a:schemeClr val="accent1"/>
+          </a:lnRef>
+          <a:fillRef idx="3">
+            <a:schemeClr val="accent1"/>
+          </a:fillRef>
+          <a:effectRef idx="2">
+            <a:schemeClr val="accent1"/>
+          </a:effectRef>
+          <a:fontRef idx="minor">
+            <a:schemeClr val="lt1"/>
+          </a:fontRef>
+        </p:style>
+        <p:txBody>
+          <a:bodyPr rtlCol="0" anchor="ctr"/>
+          <a:lstStyle/>
+          <a:p>
+            <a:pPr algn="ctr"/>
+            <a:endParaRPr/>
+          </a:p>
+        </p:txBody>
+      </p:sp>
+      <p:sp>
+        <p:nvSpPr>
+          <p:cNvPr id="21" name="Oval 20"/>
+          <p:cNvSpPr/>
+          <p:nvPr/>
+        </p:nvSpPr>
+        <p:spPr>
+          <a:xfrm>
+            <a:off x="6400800" y="4114800"/>
+            <a:ext cx="475488" cy="475488"/>
+          </a:xfrm>
+          <a:prstGeom prst="ellipse">
+            <a:avLst/>
+          </a:prstGeom>
+          <a:solidFill>
+            <a:srgbClr val="6F42C1"/>
+          </a:solidFill>
+          <a:ln>
+            <a:solidFill>
+              <a:srgbClr val="6F42C1"/>
+            </a:solidFill>
+          </a:ln>
+        </p:spPr>
+        <p:style>
+          <a:lnRef idx="1">
+            <a:schemeClr val="accent1"/>
+          </a:lnRef>
+          <a:fillRef idx="3">
+            <a:schemeClr val="accent1"/>
+          </a:fillRef>
+          <a:effectRef idx="2">
+            <a:schemeClr val="accent1"/>
+          </a:effectRef>
+          <a:fontRef idx="minor">
+            <a:schemeClr val="lt1"/>
+          </a:fontRef>
+        </p:style>
+        <p:txBody>
+          <a:bodyPr rtlCol="0" anchor="ctr"/>
+          <a:lstStyle/>
+          <a:p>
+            <a:pPr algn="ctr"/>
+            <a:endParaRPr/>
+          </a:p>
+        </p:txBody>
+      </p:sp>
+      <p:sp>
+        <p:nvSpPr>
+          <p:cNvPr id="22" name="TextBox 21"/>
+          <p:cNvSpPr txBox="1"/>
+          <p:nvPr/>
+        </p:nvSpPr>
+        <p:spPr>
+          <a:xfrm>
+            <a:off x="6400800" y="4151376"/>
+            <a:ext cx="475488" cy="320040"/>
+          </a:xfrm>
+          <a:prstGeom prst="rect">
+            <a:avLst/>
+          </a:prstGeom>
+          <a:noFill/>
+        </p:spPr>
+        <p:txBody>
+          <a:bodyPr wrap="square">
+            <a:spAutoFit/>
+          </a:bodyPr>
+          <a:lstStyle/>
+          <a:p>
+            <a:pPr algn="ctr"/>
+            <a:r>
+              <a:rPr sz="1600" b="1">
+                <a:solidFill>
+                  <a:srgbClr val="FFFFFF"/>
+                </a:solidFill>
+                <a:latin typeface="Aptos"/>
+              </a:rPr>
+              <a:t>⌁</a:t>
+            </a:r>
+          </a:p>
+        </p:txBody>
+      </p:sp>
+      <p:sp>
+        <p:nvSpPr>
+          <p:cNvPr id="23" name="TextBox 22"/>
+          <p:cNvSpPr txBox="1"/>
+          <p:nvPr/>
+        </p:nvSpPr>
+        <p:spPr>
+          <a:xfrm>
+            <a:off x="7040880" y="3962698"/>
+            <a:ext cx="4069080" cy="274320"/>
+          </a:xfrm>
+          <a:prstGeom prst="rect">
+            <a:avLst/>
+          </a:prstGeom>
+          <a:noFill/>
+        </p:spPr>
+        <p:txBody>
+          <a:bodyPr wrap="square">
+            <a:spAutoFit/>
+          </a:bodyPr>
+          <a:lstStyle/>
+          <a:p>
+            <a:pPr algn="l"/>
+            <a:r>
+              <a:rPr sz="1600" b="1">
+                <a:solidFill>
+                  <a:srgbClr val="121B2D"/>
+                </a:solidFill>
+                <a:latin typeface="Aptos"/>
+              </a:rPr>
+              <a:t>One ABP foundation</a:t>
+            </a:r>
+          </a:p>
+        </p:txBody>
+      </p:sp>
+      <p:sp>
+        <p:nvSpPr>
+          <p:cNvPr id="24" name="TextBox 23"/>
+          <p:cNvSpPr txBox="1"/>
+          <p:nvPr/>
+        </p:nvSpPr>
+        <p:spPr>
+          <a:xfrm>
+            <a:off x="7040880" y="4292552"/>
+            <a:ext cx="4114800" cy="830997"/>
+          </a:xfrm>
+          <a:prstGeom prst="rect">
+            <a:avLst/>
+          </a:prstGeom>
+          <a:noFill/>
+        </p:spPr>
+        <p:txBody>
+          <a:bodyPr wrap="square">
+            <a:spAutoFit/>
+          </a:bodyPr>
+          <a:lstStyle/>
+          <a:p>
+            <a:pPr algn="l"/>
+            <a:r>
+              <a:rPr sz="1600" b="0" dirty="0">
+                <a:solidFill>
+                  <a:srgbClr val="677182"/>
+                </a:solidFill>
+                <a:latin typeface="Aptos"/>
+              </a:rPr>
+              <a:t>Same database, permissions, multi-tenancy and enterprise foundations — with full-code extension whenever needed.</a:t>
+            </a:r>
+          </a:p>
+        </p:txBody>
+      </p:sp>
+      <p:sp>
+        <p:nvSpPr>
+          <p:cNvPr id="25" name="Rounded Rectangle 24"/>
+          <p:cNvSpPr/>
+          <p:nvPr/>
+        </p:nvSpPr>
+        <p:spPr>
+          <a:xfrm>
+            <a:off x="685800" y="5669280"/>
+            <a:ext cx="10789920" cy="640080"/>
+          </a:xfrm>
+          <a:prstGeom prst="roundRect">
+            <a:avLst/>
+          </a:prstGeom>
+          <a:solidFill>
+            <a:srgbClr val="EDF6F3"/>
+          </a:solidFill>
+          <a:ln>
+            <a:solidFill>
+              <a:srgbClr val="CDE8DE"/>
+            </a:solidFill>
+          </a:ln>
+        </p:spPr>
+        <p:style>
+          <a:lnRef idx="1">
+            <a:schemeClr val="accent1"/>
+          </a:lnRef>
+          <a:fillRef idx="3">
+            <a:schemeClr val="accent1"/>
+          </a:fillRef>
+          <a:effectRef idx="2">
+            <a:schemeClr val="accent1"/>
+          </a:effectRef>
+          <a:fontRef idx="minor">
+            <a:schemeClr val="lt1"/>
+          </a:fontRef>
+        </p:style>
+        <p:txBody>
+          <a:bodyPr rtlCol="0" anchor="ctr"/>
+          <a:lstStyle/>
+          <a:p>
+            <a:pPr algn="ctr"/>
+            <a:endParaRPr/>
+          </a:p>
+        </p:txBody>
+      </p:sp>
+      <p:sp>
+        <p:nvSpPr>
+          <p:cNvPr id="26" name="TextBox 25"/>
+          <p:cNvSpPr txBox="1"/>
+          <p:nvPr/>
+        </p:nvSpPr>
+        <p:spPr>
+          <a:xfrm>
+            <a:off x="914400" y="5870448"/>
+            <a:ext cx="914400" cy="201168"/>
+          </a:xfrm>
+          <a:prstGeom prst="rect">
+            <a:avLst/>
+          </a:prstGeom>
+          <a:noFill/>
+        </p:spPr>
+        <p:txBody>
+          <a:bodyPr wrap="square">
+            <a:spAutoFit/>
+          </a:bodyPr>
+          <a:lstStyle/>
+          <a:p>
+            <a:pPr algn="l"/>
+            <a:r>
+              <a:rPr sz="1000" b="1">
+                <a:solidFill>
+                  <a:srgbClr val="14966E"/>
+                </a:solidFill>
+                <a:latin typeface="Aptos"/>
+              </a:rPr>
+              <a:t>GREAT FOR</a:t>
+            </a:r>
+          </a:p>
+        </p:txBody>
+      </p:sp>
+      <p:sp>
+        <p:nvSpPr>
+          <p:cNvPr id="27" name="TextBox 26"/>
+          <p:cNvSpPr txBox="1"/>
+          <p:nvPr/>
+        </p:nvSpPr>
+        <p:spPr>
+          <a:xfrm>
+            <a:off x="1828800" y="5806440"/>
+            <a:ext cx="9281160" cy="446276"/>
+          </a:xfrm>
+          <a:prstGeom prst="rect">
+            <a:avLst/>
+          </a:prstGeom>
+          <a:noFill/>
+        </p:spPr>
+        <p:txBody>
+          <a:bodyPr wrap="square">
+            <a:spAutoFit/>
+          </a:bodyPr>
+          <a:lstStyle/>
+          <a:p>
+            <a:pPr algn="l"/>
+            <a:r>
+              <a:rPr sz="1150" b="1" dirty="0">
+                <a:solidFill>
+                  <a:srgbClr val="121B2D"/>
+                </a:solidFill>
+                <a:latin typeface="Aptos"/>
+              </a:rPr>
+              <a:t>Back-office apps  •  Internal tools  •  Admin panels  •  Rapid prototypes  </a:t>
+            </a:r>
+            <a:br>
+              <a:rPr lang="en-US" sz="1150" b="1" dirty="0">
+                <a:solidFill>
+                  <a:srgbClr val="121B2D"/>
+                </a:solidFill>
+                <a:latin typeface="Aptos"/>
+              </a:rPr>
+            </a:br>
+            <a:r>
+              <a:rPr sz="1150" b="1" dirty="0">
+                <a:solidFill>
+                  <a:srgbClr val="121B2D"/>
+                </a:solidFill>
+                <a:latin typeface="Aptos"/>
+              </a:rPr>
+              <a:t>•  Frequently changing processes  •  Projects without a dedicated development team</a:t>
+            </a:r>
+          </a:p>
+        </p:txBody>
+      </p:sp>
+      <p:sp>
+        <p:nvSpPr>
+          <p:cNvPr id="29" name="TextBox 28">
+            <a:extLst>
+              <a:ext uri="{FF2B5EF4-FFF2-40B4-BE49-F238E27FC236}">
+                <a16:creationId xmlns:a16="http://schemas.microsoft.com/office/drawing/2014/main" id="{EB0FF021-BB68-1333-DEC5-7B689BFD5EFC}"/>
+              </a:ext>
+            </a:extLst>
+          </p:cNvPr>
+          <p:cNvSpPr txBox="1"/>
+          <p:nvPr/>
+        </p:nvSpPr>
+        <p:spPr>
+          <a:xfrm>
+            <a:off x="594360" y="157560"/>
+            <a:ext cx="8311254" cy="553998"/>
+          </a:xfrm>
+          <a:prstGeom prst="rect">
+            <a:avLst/>
+          </a:prstGeom>
+          <a:noFill/>
+        </p:spPr>
+        <p:txBody>
+          <a:bodyPr wrap="square">
+            <a:spAutoFit/>
+          </a:bodyPr>
+          <a:lstStyle/>
+          <a:p>
+            <a:r>
+              <a:rPr lang="en-US" sz="3000" b="1" dirty="0">
+                <a:solidFill>
+                  <a:schemeClr val="tx1"/>
+                </a:solidFill>
+                <a:latin typeface="Lexend" panose="020B0604020202020204" charset="-94"/>
+              </a:rPr>
+              <a:t>WHY IT MATTERS</a:t>
+            </a:r>
+            <a:endParaRPr lang="en-US" sz="3000" b="1" i="0" noProof="0" dirty="0">
+              <a:solidFill>
+                <a:schemeClr val="tx1"/>
+              </a:solidFill>
+              <a:effectLst/>
+              <a:latin typeface="Lexend" panose="020B0604020202020204" charset="-94"/>
+            </a:endParaRPr>
+          </a:p>
+        </p:txBody>
+      </p:sp>
+      <p:cxnSp>
+        <p:nvCxnSpPr>
+          <p:cNvPr id="30" name="Straight Connector 29">
+            <a:extLst>
+              <a:ext uri="{FF2B5EF4-FFF2-40B4-BE49-F238E27FC236}">
+                <a16:creationId xmlns:a16="http://schemas.microsoft.com/office/drawing/2014/main" id="{2460825F-2F9E-88AC-B416-6CFD54B6CC66}"/>
+              </a:ext>
+            </a:extLst>
+          </p:cNvPr>
+          <p:cNvCxnSpPr>
+            <a:cxnSpLocks/>
+          </p:cNvCxnSpPr>
+          <p:nvPr/>
+        </p:nvCxnSpPr>
+        <p:spPr>
+          <a:xfrm>
+            <a:off x="716341" y="711558"/>
+            <a:ext cx="3621483" cy="0"/>
+          </a:xfrm>
+          <a:prstGeom prst="line">
+            <a:avLst/>
+          </a:prstGeom>
+          <a:ln w="28575">
+            <a:solidFill>
+              <a:schemeClr val="bg1">
+                <a:lumMod val="50000"/>
+              </a:schemeClr>
+            </a:solidFill>
+            <a:prstDash val="sysDot"/>
+          </a:ln>
+        </p:spPr>
+        <p:style>
+          <a:lnRef idx="1">
+            <a:schemeClr val="accent1"/>
+          </a:lnRef>
+          <a:fillRef idx="0">
+            <a:schemeClr val="accent1"/>
+          </a:fillRef>
+          <a:effectRef idx="0">
+            <a:schemeClr val="accent1"/>
+          </a:effectRef>
+          <a:fontRef idx="minor">
+            <a:schemeClr val="tx1"/>
+          </a:fontRef>
+        </p:style>
+      </p:cxnSp>
+    </p:spTree>
+  </p:cSld>
+  <p:clrMapOvr>
+    <a:masterClrMapping/>
+  </p:clrMapOvr>
+</p:sld>
+</file>
+
 <file path=ppt/slides/slide2.xml><?xml version="1.0" encoding="utf-8"?>
 <p:sld xmlns:a="http://schemas.openxmlformats.org/drawingml/2006/main" xmlns:r="http://schemas.openxmlformats.org/officeDocument/2006/relationships" xmlns:p="http://schemas.openxmlformats.org/presentationml/2006/main">
   <p:cSld>

--- a/abp-community-talks-2026.05.pptx
+++ b/abp-community-talks-2026.05.pptx
@@ -5,7 +5,7 @@
     <p:sldMasterId id="2147483648" r:id="rId1"/>
   </p:sldMasterIdLst>
   <p:notesMasterIdLst>
-    <p:notesMasterId r:id="rId17"/>
+    <p:notesMasterId r:id="rId18"/>
   </p:notesMasterIdLst>
   <p:sldIdLst>
     <p:sldId id="323" r:id="rId2"/>
@@ -23,30 +23,31 @@
     <p:sldId id="347" r:id="rId14"/>
     <p:sldId id="256" r:id="rId15"/>
     <p:sldId id="257" r:id="rId16"/>
+    <p:sldId id="348" r:id="rId17"/>
   </p:sldIdLst>
   <p:sldSz cx="12192000" cy="6858000"/>
   <p:notesSz cx="6858000" cy="9144000"/>
   <p:embeddedFontLst>
     <p:embeddedFont>
       <p:font typeface="Lexend" panose="020B0604020202020204" charset="-94"/>
-      <p:regular r:id="rId18"/>
-      <p:bold r:id="rId19"/>
+      <p:regular r:id="rId19"/>
+      <p:bold r:id="rId20"/>
     </p:embeddedFont>
     <p:embeddedFont>
       <p:font typeface="Lexend Light" panose="020B0604020202020204" charset="-94"/>
-      <p:regular r:id="rId20"/>
+      <p:regular r:id="rId21"/>
     </p:embeddedFont>
     <p:embeddedFont>
       <p:font typeface="Play" panose="020B0604020202020204" charset="0"/>
-      <p:regular r:id="rId21"/>
-      <p:bold r:id="rId22"/>
+      <p:regular r:id="rId22"/>
+      <p:bold r:id="rId23"/>
     </p:embeddedFont>
     <p:embeddedFont>
       <p:font typeface="Poppins" panose="00000500000000000000" pitchFamily="2" charset="-94"/>
-      <p:regular r:id="rId23"/>
-      <p:bold r:id="rId24"/>
-      <p:italic r:id="rId25"/>
-      <p:boldItalic r:id="rId26"/>
+      <p:regular r:id="rId24"/>
+      <p:bold r:id="rId25"/>
+      <p:italic r:id="rId26"/>
+      <p:boldItalic r:id="rId27"/>
     </p:embeddedFont>
   </p:embeddedFontLst>
   <p:defaultTextStyle>
@@ -279,11 +280,35 @@
     </a:lvl9pPr>
   </p:defaultTextStyle>
   <p:extLst>
+    <p:ext uri="{521415D9-36F7-43E2-AB2F-B90AF26B5E84}">
+      <p14:sectionLst xmlns:p14="http://schemas.microsoft.com/office/powerpoint/2010/main">
+        <p14:section name="Default Section" id="{62A63187-5530-4163-A9CC-C297B84383A5}">
+          <p14:sldIdLst>
+            <p14:sldId id="323"/>
+            <p14:sldId id="303"/>
+            <p14:sldId id="334"/>
+            <p14:sldId id="338"/>
+            <p14:sldId id="344"/>
+            <p14:sldId id="343"/>
+            <p14:sldId id="345"/>
+            <p14:sldId id="342"/>
+            <p14:sldId id="341"/>
+            <p14:sldId id="310"/>
+            <p14:sldId id="324"/>
+            <p14:sldId id="346"/>
+            <p14:sldId id="347"/>
+            <p14:sldId id="256"/>
+            <p14:sldId id="257"/>
+            <p14:sldId id="348"/>
+          </p14:sldIdLst>
+        </p14:section>
+      </p14:sectionLst>
+    </p:ext>
     <p:ext uri="{EFAFB233-063F-42B5-8137-9DF3F51BA10A}">
       <p15:sldGuideLst xmlns:p15="http://schemas.microsoft.com/office/powerpoint/2012/main"/>
     </p:ext>
     <p:ext uri="GoogleSlidesCustomDataVersion2">
-      <go:slidesCustomData xmlns="" xmlns:mc="http://schemas.openxmlformats.org/markup-compatibility/2006" xmlns:mv="urn:schemas-microsoft-com:mac:vml" xmlns:c="http://schemas.openxmlformats.org/drawingml/2006/chart" xmlns:dgm="http://schemas.openxmlformats.org/drawingml/2006/diagram" xmlns:o="urn:schemas-microsoft-com:office:office" xmlns:v="urn:schemas-microsoft-com:vml" xmlns:pvml="urn:schemas-microsoft-com:office:powerpoint" xmlns:com="http://schemas.openxmlformats.org/drawingml/2006/compatibility" xmlns:p14="http://schemas.microsoft.com/office/powerpoint/2010/main" xmlns:p15="http://schemas.microsoft.com/office/powerpoint/2012/main" xmlns:ahyp="http://schemas.microsoft.com/office/drawing/2018/hyperlinkcolor" xmlns:go="http://customooxmlschemas.google.com/" r:id="rId48" roundtripDataSignature="AMtx7mihNSh0nE7P5bmNZynwZ07PSv3TUg=="/>
+      <go:slidesCustomData xmlns:go="http://customooxmlschemas.google.com/" xmlns:ahyp="http://schemas.microsoft.com/office/drawing/2018/hyperlinkcolor" xmlns:p15="http://schemas.microsoft.com/office/powerpoint/2012/main" xmlns:p14="http://schemas.microsoft.com/office/powerpoint/2010/main" xmlns:com="http://schemas.openxmlformats.org/drawingml/2006/compatibility" xmlns:pvml="urn:schemas-microsoft-com:office:powerpoint" xmlns:v="urn:schemas-microsoft-com:vml" xmlns:o="urn:schemas-microsoft-com:office:office" xmlns:dgm="http://schemas.openxmlformats.org/drawingml/2006/diagram" xmlns:c="http://schemas.openxmlformats.org/drawingml/2006/chart" xmlns:mv="urn:schemas-microsoft-com:mac:vml" xmlns:mc="http://schemas.openxmlformats.org/markup-compatibility/2006" xmlns="" r:id="rId48" roundtripDataSignature="AMtx7mihNSh0nE7P5bmNZynwZ07PSv3TUg=="/>
     </p:ext>
   </p:extLst>
 </p:presentation>
@@ -2602,6 +2627,147 @@
     <p:extLst>
       <p:ext uri="{BB962C8B-B14F-4D97-AF65-F5344CB8AC3E}">
         <p14:creationId xmlns:p14="http://schemas.microsoft.com/office/powerpoint/2010/main" val="2214020140"/>
+      </p:ext>
+    </p:extLst>
+  </p:cSld>
+  <p:clrMapOvr>
+    <a:masterClrMapping/>
+  </p:clrMapOvr>
+</p:notes>
+</file>
+
+<file path=ppt/notesSlides/notesSlide15.xml><?xml version="1.0" encoding="utf-8"?>
+<p:notes xmlns:a="http://schemas.openxmlformats.org/drawingml/2006/main" xmlns:r="http://schemas.openxmlformats.org/officeDocument/2006/relationships" xmlns:p="http://schemas.openxmlformats.org/presentationml/2006/main">
+  <p:cSld>
+    <p:spTree>
+      <p:nvGrpSpPr>
+        <p:cNvPr id="1" name="">
+          <a:extLst>
+            <a:ext uri="{FF2B5EF4-FFF2-40B4-BE49-F238E27FC236}">
+              <a16:creationId xmlns:a16="http://schemas.microsoft.com/office/drawing/2014/main" id="{1670FA6A-12E2-C486-3F4B-CF475EE7F81B}"/>
+            </a:ext>
+          </a:extLst>
+        </p:cNvPr>
+        <p:cNvGrpSpPr/>
+        <p:nvPr/>
+      </p:nvGrpSpPr>
+      <p:grpSpPr>
+        <a:xfrm>
+          <a:off x="0" y="0"/>
+          <a:ext cx="0" cy="0"/>
+          <a:chOff x="0" y="0"/>
+          <a:chExt cx="0" cy="0"/>
+        </a:xfrm>
+      </p:grpSpPr>
+      <p:sp>
+        <p:nvSpPr>
+          <p:cNvPr id="2" name="Slide Image Placeholder 1">
+            <a:extLst>
+              <a:ext uri="{FF2B5EF4-FFF2-40B4-BE49-F238E27FC236}">
+                <a16:creationId xmlns:a16="http://schemas.microsoft.com/office/drawing/2014/main" id="{1811C1EC-4B61-3C48-B500-3E0E7236B47B}"/>
+              </a:ext>
+            </a:extLst>
+          </p:cNvPr>
+          <p:cNvSpPr>
+            <a:spLocks noGrp="1" noRot="1" noChangeAspect="1"/>
+          </p:cNvSpPr>
+          <p:nvPr>
+            <p:ph type="sldImg"/>
+          </p:nvPr>
+        </p:nvSpPr>
+        <p:spPr/>
+      </p:sp>
+      <p:sp>
+        <p:nvSpPr>
+          <p:cNvPr id="3" name="Notes Placeholder 2">
+            <a:extLst>
+              <a:ext uri="{FF2B5EF4-FFF2-40B4-BE49-F238E27FC236}">
+                <a16:creationId xmlns:a16="http://schemas.microsoft.com/office/drawing/2014/main" id="{18C0D7F3-0A52-C3D9-7FCC-7BF394CBD6F5}"/>
+              </a:ext>
+            </a:extLst>
+          </p:cNvPr>
+          <p:cNvSpPr>
+            <a:spLocks noGrp="1"/>
+          </p:cNvSpPr>
+          <p:nvPr>
+            <p:ph type="body" idx="1"/>
+          </p:nvPr>
+        </p:nvSpPr>
+        <p:spPr/>
+        <p:txBody>
+          <a:bodyPr/>
+          <a:lstStyle/>
+          <a:p>
+            <a:endParaRPr lang="en-US" dirty="0"/>
+          </a:p>
+        </p:txBody>
+      </p:sp>
+      <p:sp>
+        <p:nvSpPr>
+          <p:cNvPr id="4" name="Slide Number Placeholder 3">
+            <a:extLst>
+              <a:ext uri="{FF2B5EF4-FFF2-40B4-BE49-F238E27FC236}">
+                <a16:creationId xmlns:a16="http://schemas.microsoft.com/office/drawing/2014/main" id="{59A2AEFB-7373-40F0-E0F9-51084CB22C7A}"/>
+              </a:ext>
+            </a:extLst>
+          </p:cNvPr>
+          <p:cNvSpPr>
+            <a:spLocks noGrp="1"/>
+          </p:cNvSpPr>
+          <p:nvPr>
+            <p:ph type="sldNum" idx="12"/>
+          </p:nvPr>
+        </p:nvSpPr>
+        <p:spPr/>
+        <p:txBody>
+          <a:bodyPr/>
+          <a:lstStyle/>
+          <a:p>
+            <a:pPr marL="0" marR="0" lvl="0" indent="0" algn="r" rtl="0">
+              <a:lnSpc>
+                <a:spcPct val="100000"/>
+              </a:lnSpc>
+              <a:spcBef>
+                <a:spcPts val="0"/>
+              </a:spcBef>
+              <a:spcAft>
+                <a:spcPts val="0"/>
+              </a:spcAft>
+              <a:buClr>
+                <a:srgbClr val="000000"/>
+              </a:buClr>
+              <a:buSzPts val="1200"/>
+              <a:buFont typeface="Arial"/>
+              <a:buNone/>
+            </a:pPr>
+            <a:fld id="{00000000-1234-1234-1234-123412341234}" type="slidenum">
+              <a:rPr lang="tr-TR" sz="1200" b="0" i="0" u="none" strike="noStrike" cap="none" smtClean="0">
+                <a:solidFill>
+                  <a:schemeClr val="dk1"/>
+                </a:solidFill>
+                <a:latin typeface="Arial"/>
+                <a:ea typeface="Arial"/>
+                <a:cs typeface="Arial"/>
+                <a:sym typeface="Arial"/>
+              </a:rPr>
+              <a:t>16</a:t>
+            </a:fld>
+            <a:endParaRPr lang="tr-TR" sz="1200" b="0" i="0" u="none" strike="noStrike" cap="none" dirty="0">
+              <a:solidFill>
+                <a:schemeClr val="dk1"/>
+              </a:solidFill>
+              <a:latin typeface="Arial"/>
+              <a:ea typeface="Arial"/>
+              <a:cs typeface="Arial"/>
+              <a:sym typeface="Arial"/>
+            </a:endParaRPr>
+          </a:p>
+        </p:txBody>
+      </p:sp>
+    </p:spTree>
+    <p:extLst>
+      <p:ext uri="{BB962C8B-B14F-4D97-AF65-F5344CB8AC3E}">
+        <p14:creationId xmlns:p14="http://schemas.microsoft.com/office/powerpoint/2010/main" val="3205976025"/>
       </p:ext>
     </p:extLst>
   </p:cSld>
@@ -20881,6 +21047,1314 @@
 </p:sld>
 </file>
 
+<file path=ppt/slides/slide16.xml><?xml version="1.0" encoding="utf-8"?>
+<p:sld xmlns:a="http://schemas.openxmlformats.org/drawingml/2006/main" xmlns:r="http://schemas.openxmlformats.org/officeDocument/2006/relationships" xmlns:p="http://schemas.openxmlformats.org/presentationml/2006/main">
+  <p:cSld>
+    <p:spTree>
+      <p:nvGrpSpPr>
+        <p:cNvPr id="1" name="">
+          <a:extLst>
+            <a:ext uri="{FF2B5EF4-FFF2-40B4-BE49-F238E27FC236}">
+              <a16:creationId xmlns:a16="http://schemas.microsoft.com/office/drawing/2014/main" id="{C5FF87BE-9BA6-2B72-7046-DAA4F3C5C83D}"/>
+            </a:ext>
+          </a:extLst>
+        </p:cNvPr>
+        <p:cNvGrpSpPr/>
+        <p:nvPr/>
+      </p:nvGrpSpPr>
+      <p:grpSpPr>
+        <a:xfrm>
+          <a:off x="0" y="0"/>
+          <a:ext cx="0" cy="0"/>
+          <a:chOff x="0" y="0"/>
+          <a:chExt cx="0" cy="0"/>
+        </a:xfrm>
+      </p:grpSpPr>
+      <p:sp>
+        <p:nvSpPr>
+          <p:cNvPr id="29" name="TextBox 28">
+            <a:extLst>
+              <a:ext uri="{FF2B5EF4-FFF2-40B4-BE49-F238E27FC236}">
+                <a16:creationId xmlns:a16="http://schemas.microsoft.com/office/drawing/2014/main" id="{947ECE60-0B15-41D4-295B-74757F891957}"/>
+              </a:ext>
+            </a:extLst>
+          </p:cNvPr>
+          <p:cNvSpPr txBox="1"/>
+          <p:nvPr/>
+        </p:nvSpPr>
+        <p:spPr>
+          <a:xfrm>
+            <a:off x="594360" y="157560"/>
+            <a:ext cx="8311254" cy="553998"/>
+          </a:xfrm>
+          <a:prstGeom prst="rect">
+            <a:avLst/>
+          </a:prstGeom>
+          <a:noFill/>
+        </p:spPr>
+        <p:txBody>
+          <a:bodyPr wrap="square">
+            <a:spAutoFit/>
+          </a:bodyPr>
+          <a:lstStyle/>
+          <a:p>
+            <a:r>
+              <a:rPr lang="en-US" sz="3000" b="1" dirty="0">
+                <a:solidFill>
+                  <a:schemeClr val="tx1"/>
+                </a:solidFill>
+                <a:latin typeface="Lexend" panose="020B0604020202020204" charset="-94"/>
+              </a:rPr>
+              <a:t>SEE IT IN ACTION</a:t>
+            </a:r>
+            <a:endParaRPr lang="en-US" sz="3000" b="1" i="0" noProof="0" dirty="0">
+              <a:solidFill>
+                <a:schemeClr val="tx1"/>
+              </a:solidFill>
+              <a:effectLst/>
+              <a:latin typeface="Lexend" panose="020B0604020202020204" charset="-94"/>
+            </a:endParaRPr>
+          </a:p>
+        </p:txBody>
+      </p:sp>
+      <p:cxnSp>
+        <p:nvCxnSpPr>
+          <p:cNvPr id="30" name="Straight Connector 29">
+            <a:extLst>
+              <a:ext uri="{FF2B5EF4-FFF2-40B4-BE49-F238E27FC236}">
+                <a16:creationId xmlns:a16="http://schemas.microsoft.com/office/drawing/2014/main" id="{05C0BF50-97B3-0DFD-3A4C-63D9651CBC4C}"/>
+              </a:ext>
+            </a:extLst>
+          </p:cNvPr>
+          <p:cNvCxnSpPr>
+            <a:cxnSpLocks/>
+          </p:cNvCxnSpPr>
+          <p:nvPr/>
+        </p:nvCxnSpPr>
+        <p:spPr>
+          <a:xfrm>
+            <a:off x="716341" y="711558"/>
+            <a:ext cx="3627967" cy="0"/>
+          </a:xfrm>
+          <a:prstGeom prst="line">
+            <a:avLst/>
+          </a:prstGeom>
+          <a:ln w="28575">
+            <a:solidFill>
+              <a:schemeClr val="bg1">
+                <a:lumMod val="50000"/>
+              </a:schemeClr>
+            </a:solidFill>
+            <a:prstDash val="sysDot"/>
+          </a:ln>
+        </p:spPr>
+        <p:style>
+          <a:lnRef idx="1">
+            <a:schemeClr val="accent1"/>
+          </a:lnRef>
+          <a:fillRef idx="0">
+            <a:schemeClr val="accent1"/>
+          </a:fillRef>
+          <a:effectRef idx="0">
+            <a:schemeClr val="accent1"/>
+          </a:effectRef>
+          <a:fontRef idx="minor">
+            <a:schemeClr val="tx1"/>
+          </a:fontRef>
+        </p:style>
+      </p:cxnSp>
+      <p:grpSp>
+        <p:nvGrpSpPr>
+          <p:cNvPr id="43" name="Group 42">
+            <a:extLst>
+              <a:ext uri="{FF2B5EF4-FFF2-40B4-BE49-F238E27FC236}">
+                <a16:creationId xmlns:a16="http://schemas.microsoft.com/office/drawing/2014/main" id="{F18DB79D-7A2A-7BEB-DB00-FC9D20235708}"/>
+              </a:ext>
+            </a:extLst>
+          </p:cNvPr>
+          <p:cNvGrpSpPr/>
+          <p:nvPr/>
+        </p:nvGrpSpPr>
+        <p:grpSpPr>
+          <a:xfrm>
+            <a:off x="716341" y="1014762"/>
+            <a:ext cx="9939304" cy="5585314"/>
+            <a:chOff x="1973766" y="1115122"/>
+            <a:chExt cx="9939304" cy="5585314"/>
+          </a:xfrm>
+        </p:grpSpPr>
+        <p:sp>
+          <p:nvSpPr>
+            <p:cNvPr id="41" name="Rectangle 40">
+              <a:extLst>
+                <a:ext uri="{FF2B5EF4-FFF2-40B4-BE49-F238E27FC236}">
+                  <a16:creationId xmlns:a16="http://schemas.microsoft.com/office/drawing/2014/main" id="{F079FB0A-139D-466F-94C9-716494A81DB9}"/>
+                </a:ext>
+              </a:extLst>
+            </p:cNvPr>
+            <p:cNvSpPr/>
+            <p:nvPr/>
+          </p:nvSpPr>
+          <p:spPr>
+            <a:xfrm>
+              <a:off x="1973766" y="1115122"/>
+              <a:ext cx="8929464" cy="5585314"/>
+            </a:xfrm>
+            <a:prstGeom prst="rect">
+              <a:avLst/>
+            </a:prstGeom>
+          </p:spPr>
+          <p:style>
+            <a:lnRef idx="1">
+              <a:schemeClr val="accent1"/>
+            </a:lnRef>
+            <a:fillRef idx="2">
+              <a:schemeClr val="accent1"/>
+            </a:fillRef>
+            <a:effectRef idx="1">
+              <a:schemeClr val="accent1"/>
+            </a:effectRef>
+            <a:fontRef idx="minor">
+              <a:schemeClr val="dk1"/>
+            </a:fontRef>
+          </p:style>
+          <p:txBody>
+            <a:bodyPr rtlCol="0" anchor="ctr"/>
+            <a:lstStyle/>
+            <a:p>
+              <a:pPr algn="ctr"/>
+              <a:endParaRPr lang="en-US"/>
+            </a:p>
+          </p:txBody>
+        </p:sp>
+        <p:sp>
+          <p:nvSpPr>
+            <p:cNvPr id="3" name="TextBox 2">
+              <a:extLst>
+                <a:ext uri="{FF2B5EF4-FFF2-40B4-BE49-F238E27FC236}">
+                  <a16:creationId xmlns:a16="http://schemas.microsoft.com/office/drawing/2014/main" id="{34874E16-957D-398D-EFAB-74A98362B2DD}"/>
+                </a:ext>
+              </a:extLst>
+            </p:cNvPr>
+            <p:cNvSpPr txBox="1"/>
+            <p:nvPr/>
+          </p:nvSpPr>
+          <p:spPr>
+            <a:xfrm>
+              <a:off x="2356698" y="1525574"/>
+              <a:ext cx="8014158" cy="523220"/>
+            </a:xfrm>
+            <a:prstGeom prst="rect">
+              <a:avLst/>
+            </a:prstGeom>
+            <a:noFill/>
+          </p:spPr>
+          <p:txBody>
+            <a:bodyPr wrap="square">
+              <a:spAutoFit/>
+            </a:bodyPr>
+            <a:lstStyle/>
+            <a:p>
+              <a:pPr algn="ctr"/>
+              <a:r>
+                <a:rPr lang="en-US" sz="2800" b="1" dirty="0">
+                  <a:solidFill>
+                    <a:srgbClr val="121B2D"/>
+                  </a:solidFill>
+                  <a:latin typeface="Aptos"/>
+                </a:rPr>
+                <a:t>HOTEL MANAGEMENT SYSTEM</a:t>
+              </a:r>
+              <a:endParaRPr sz="2800" b="1" dirty="0">
+                <a:solidFill>
+                  <a:srgbClr val="121B2D"/>
+                </a:solidFill>
+                <a:latin typeface="Aptos"/>
+              </a:endParaRPr>
+            </a:p>
+          </p:txBody>
+        </p:sp>
+        <p:grpSp>
+          <p:nvGrpSpPr>
+            <p:cNvPr id="37" name="Group 36">
+              <a:extLst>
+                <a:ext uri="{FF2B5EF4-FFF2-40B4-BE49-F238E27FC236}">
+                  <a16:creationId xmlns:a16="http://schemas.microsoft.com/office/drawing/2014/main" id="{287AB60C-AA25-85F8-E751-33EAB62C4321}"/>
+                </a:ext>
+              </a:extLst>
+            </p:cNvPr>
+            <p:cNvGrpSpPr/>
+            <p:nvPr/>
+          </p:nvGrpSpPr>
+          <p:grpSpPr>
+            <a:xfrm>
+              <a:off x="2356698" y="2305484"/>
+              <a:ext cx="4910328" cy="932688"/>
+              <a:chOff x="685800" y="2057400"/>
+              <a:chExt cx="4910328" cy="932688"/>
+            </a:xfrm>
+          </p:grpSpPr>
+          <p:grpSp>
+            <p:nvGrpSpPr>
+              <p:cNvPr id="28" name="Group 27">
+                <a:extLst>
+                  <a:ext uri="{FF2B5EF4-FFF2-40B4-BE49-F238E27FC236}">
+                    <a16:creationId xmlns:a16="http://schemas.microsoft.com/office/drawing/2014/main" id="{87F3D096-5775-E9E4-A556-95B50AD7E81A}"/>
+                  </a:ext>
+                </a:extLst>
+              </p:cNvPr>
+              <p:cNvGrpSpPr/>
+              <p:nvPr/>
+            </p:nvGrpSpPr>
+            <p:grpSpPr>
+              <a:xfrm>
+                <a:off x="685800" y="2057400"/>
+                <a:ext cx="3368114" cy="932688"/>
+                <a:chOff x="685800" y="2057400"/>
+                <a:chExt cx="3368114" cy="932688"/>
+              </a:xfrm>
+            </p:grpSpPr>
+            <p:sp>
+              <p:nvSpPr>
+                <p:cNvPr id="5" name="Rounded Rectangle 4">
+                  <a:extLst>
+                    <a:ext uri="{FF2B5EF4-FFF2-40B4-BE49-F238E27FC236}">
+                      <a16:creationId xmlns:a16="http://schemas.microsoft.com/office/drawing/2014/main" id="{50B0A6BA-9624-99D5-F475-71ABB060B4D4}"/>
+                    </a:ext>
+                  </a:extLst>
+                </p:cNvPr>
+                <p:cNvSpPr/>
+                <p:nvPr/>
+              </p:nvSpPr>
+              <p:spPr>
+                <a:xfrm>
+                  <a:off x="685800" y="2057400"/>
+                  <a:ext cx="3368114" cy="932688"/>
+                </a:xfrm>
+                <a:prstGeom prst="roundRect">
+                  <a:avLst/>
+                </a:prstGeom>
+                <a:solidFill>
+                  <a:srgbClr val="F6F8FC"/>
+                </a:solidFill>
+                <a:ln>
+                  <a:solidFill>
+                    <a:srgbClr val="E0E5EE"/>
+                  </a:solidFill>
+                </a:ln>
+              </p:spPr>
+              <p:style>
+                <a:lnRef idx="1">
+                  <a:schemeClr val="accent1"/>
+                </a:lnRef>
+                <a:fillRef idx="3">
+                  <a:schemeClr val="accent1"/>
+                </a:fillRef>
+                <a:effectRef idx="2">
+                  <a:schemeClr val="accent1"/>
+                </a:effectRef>
+                <a:fontRef idx="minor">
+                  <a:schemeClr val="lt1"/>
+                </a:fontRef>
+              </p:style>
+              <p:txBody>
+                <a:bodyPr rtlCol="0" anchor="ctr"/>
+                <a:lstStyle/>
+                <a:p>
+                  <a:pPr algn="ctr"/>
+                  <a:endParaRPr/>
+                </a:p>
+              </p:txBody>
+            </p:sp>
+            <p:sp>
+              <p:nvSpPr>
+                <p:cNvPr id="6" name="Oval 5">
+                  <a:extLst>
+                    <a:ext uri="{FF2B5EF4-FFF2-40B4-BE49-F238E27FC236}">
+                      <a16:creationId xmlns:a16="http://schemas.microsoft.com/office/drawing/2014/main" id="{FA6B50A7-6E44-C7E6-03D7-F3877F3DAF1C}"/>
+                    </a:ext>
+                  </a:extLst>
+                </p:cNvPr>
+                <p:cNvSpPr/>
+                <p:nvPr/>
+              </p:nvSpPr>
+              <p:spPr>
+                <a:xfrm>
+                  <a:off x="886968" y="2304288"/>
+                  <a:ext cx="475488" cy="475488"/>
+                </a:xfrm>
+                <a:prstGeom prst="ellipse">
+                  <a:avLst/>
+                </a:prstGeom>
+                <a:solidFill>
+                  <a:srgbClr val="3D7EFF"/>
+                </a:solidFill>
+                <a:ln>
+                  <a:solidFill>
+                    <a:srgbClr val="3D7EFF"/>
+                  </a:solidFill>
+                </a:ln>
+              </p:spPr>
+              <p:style>
+                <a:lnRef idx="1">
+                  <a:schemeClr val="accent1"/>
+                </a:lnRef>
+                <a:fillRef idx="3">
+                  <a:schemeClr val="accent1"/>
+                </a:fillRef>
+                <a:effectRef idx="2">
+                  <a:schemeClr val="accent1"/>
+                </a:effectRef>
+                <a:fontRef idx="minor">
+                  <a:schemeClr val="lt1"/>
+                </a:fontRef>
+              </p:style>
+              <p:txBody>
+                <a:bodyPr rtlCol="0" anchor="ctr"/>
+                <a:lstStyle/>
+                <a:p>
+                  <a:pPr algn="ctr"/>
+                  <a:endParaRPr/>
+                </a:p>
+              </p:txBody>
+            </p:sp>
+            <p:sp>
+              <p:nvSpPr>
+                <p:cNvPr id="7" name="TextBox 6">
+                  <a:extLst>
+                    <a:ext uri="{FF2B5EF4-FFF2-40B4-BE49-F238E27FC236}">
+                      <a16:creationId xmlns:a16="http://schemas.microsoft.com/office/drawing/2014/main" id="{9F5B4BBF-DF63-5DB6-BBBE-7DCE6231E7D0}"/>
+                    </a:ext>
+                  </a:extLst>
+                </p:cNvPr>
+                <p:cNvSpPr txBox="1"/>
+                <p:nvPr/>
+              </p:nvSpPr>
+              <p:spPr>
+                <a:xfrm>
+                  <a:off x="886968" y="2340864"/>
+                  <a:ext cx="475488" cy="461665"/>
+                </a:xfrm>
+                <a:prstGeom prst="rect">
+                  <a:avLst/>
+                </a:prstGeom>
+                <a:noFill/>
+              </p:spPr>
+              <p:txBody>
+                <a:bodyPr wrap="square">
+                  <a:spAutoFit/>
+                </a:bodyPr>
+                <a:lstStyle/>
+                <a:p>
+                  <a:pPr algn="ctr"/>
+                  <a:r>
+                    <a:rPr lang="en-US" sz="2400" b="1" dirty="0">
+                      <a:solidFill>
+                        <a:srgbClr val="FFFFFF"/>
+                      </a:solidFill>
+                      <a:latin typeface="Aptos"/>
+                    </a:rPr>
+                    <a:t>🤵</a:t>
+                  </a:r>
+                  <a:endParaRPr sz="2400" b="1" dirty="0">
+                    <a:solidFill>
+                      <a:srgbClr val="FFFFFF"/>
+                    </a:solidFill>
+                    <a:latin typeface="Aptos"/>
+                  </a:endParaRPr>
+                </a:p>
+              </p:txBody>
+            </p:sp>
+          </p:grpSp>
+          <p:sp>
+            <p:nvSpPr>
+              <p:cNvPr id="8" name="TextBox 7">
+                <a:extLst>
+                  <a:ext uri="{FF2B5EF4-FFF2-40B4-BE49-F238E27FC236}">
+                    <a16:creationId xmlns:a16="http://schemas.microsoft.com/office/drawing/2014/main" id="{E1A34BF0-4D0D-A6D1-8720-A8D95522A5FA}"/>
+                  </a:ext>
+                </a:extLst>
+              </p:cNvPr>
+              <p:cNvSpPr txBox="1"/>
+              <p:nvPr/>
+            </p:nvSpPr>
+            <p:spPr>
+              <a:xfrm>
+                <a:off x="1527048" y="2340864"/>
+                <a:ext cx="4069080" cy="461665"/>
+              </a:xfrm>
+              <a:prstGeom prst="rect">
+                <a:avLst/>
+              </a:prstGeom>
+              <a:noFill/>
+            </p:spPr>
+            <p:txBody>
+              <a:bodyPr wrap="square">
+                <a:spAutoFit/>
+              </a:bodyPr>
+              <a:lstStyle/>
+              <a:p>
+                <a:pPr algn="l"/>
+                <a:r>
+                  <a:rPr lang="en-US" sz="2400" b="1" dirty="0">
+                    <a:solidFill>
+                      <a:srgbClr val="121B2D"/>
+                    </a:solidFill>
+                    <a:latin typeface="Aptos"/>
+                  </a:rPr>
+                  <a:t>Customers</a:t>
+                </a:r>
+                <a:endParaRPr sz="2400" b="1" dirty="0">
+                  <a:solidFill>
+                    <a:srgbClr val="121B2D"/>
+                  </a:solidFill>
+                  <a:latin typeface="Aptos"/>
+                </a:endParaRPr>
+              </a:p>
+            </p:txBody>
+          </p:sp>
+        </p:grpSp>
+        <p:grpSp>
+          <p:nvGrpSpPr>
+            <p:cNvPr id="34" name="Group 33">
+              <a:extLst>
+                <a:ext uri="{FF2B5EF4-FFF2-40B4-BE49-F238E27FC236}">
+                  <a16:creationId xmlns:a16="http://schemas.microsoft.com/office/drawing/2014/main" id="{5487A824-617D-51CA-3482-3090F30CE01D}"/>
+                </a:ext>
+              </a:extLst>
+            </p:cNvPr>
+            <p:cNvGrpSpPr/>
+            <p:nvPr/>
+          </p:nvGrpSpPr>
+          <p:grpSpPr>
+            <a:xfrm>
+              <a:off x="7002742" y="2305484"/>
+              <a:ext cx="4910328" cy="932688"/>
+              <a:chOff x="6199632" y="2057400"/>
+              <a:chExt cx="4910328" cy="932688"/>
+            </a:xfrm>
+          </p:grpSpPr>
+          <p:grpSp>
+            <p:nvGrpSpPr>
+              <p:cNvPr id="31" name="Group 30">
+                <a:extLst>
+                  <a:ext uri="{FF2B5EF4-FFF2-40B4-BE49-F238E27FC236}">
+                    <a16:creationId xmlns:a16="http://schemas.microsoft.com/office/drawing/2014/main" id="{B1601866-A81E-89FB-5FFA-12A9F7E21CB5}"/>
+                  </a:ext>
+                </a:extLst>
+              </p:cNvPr>
+              <p:cNvGrpSpPr/>
+              <p:nvPr/>
+            </p:nvGrpSpPr>
+            <p:grpSpPr>
+              <a:xfrm>
+                <a:off x="6199632" y="2057400"/>
+                <a:ext cx="3368114" cy="932688"/>
+                <a:chOff x="6199632" y="2057400"/>
+                <a:chExt cx="3368114" cy="932688"/>
+              </a:xfrm>
+            </p:grpSpPr>
+            <p:sp>
+              <p:nvSpPr>
+                <p:cNvPr id="10" name="Rounded Rectangle 9">
+                  <a:extLst>
+                    <a:ext uri="{FF2B5EF4-FFF2-40B4-BE49-F238E27FC236}">
+                      <a16:creationId xmlns:a16="http://schemas.microsoft.com/office/drawing/2014/main" id="{A06E91AC-398D-5965-D0DD-64EB59DD6910}"/>
+                    </a:ext>
+                  </a:extLst>
+                </p:cNvPr>
+                <p:cNvSpPr/>
+                <p:nvPr/>
+              </p:nvSpPr>
+              <p:spPr>
+                <a:xfrm>
+                  <a:off x="6199632" y="2057400"/>
+                  <a:ext cx="3368114" cy="932688"/>
+                </a:xfrm>
+                <a:prstGeom prst="roundRect">
+                  <a:avLst/>
+                </a:prstGeom>
+                <a:solidFill>
+                  <a:srgbClr val="F6F8FC"/>
+                </a:solidFill>
+                <a:ln>
+                  <a:solidFill>
+                    <a:srgbClr val="E0E5EE"/>
+                  </a:solidFill>
+                </a:ln>
+              </p:spPr>
+              <p:style>
+                <a:lnRef idx="1">
+                  <a:schemeClr val="accent1"/>
+                </a:lnRef>
+                <a:fillRef idx="3">
+                  <a:schemeClr val="accent1"/>
+                </a:fillRef>
+                <a:effectRef idx="2">
+                  <a:schemeClr val="accent1"/>
+                </a:effectRef>
+                <a:fontRef idx="minor">
+                  <a:schemeClr val="lt1"/>
+                </a:fontRef>
+              </p:style>
+              <p:txBody>
+                <a:bodyPr rtlCol="0" anchor="ctr"/>
+                <a:lstStyle/>
+                <a:p>
+                  <a:pPr algn="ctr"/>
+                  <a:endParaRPr/>
+                </a:p>
+              </p:txBody>
+            </p:sp>
+            <p:sp>
+              <p:nvSpPr>
+                <p:cNvPr id="11" name="Oval 10">
+                  <a:extLst>
+                    <a:ext uri="{FF2B5EF4-FFF2-40B4-BE49-F238E27FC236}">
+                      <a16:creationId xmlns:a16="http://schemas.microsoft.com/office/drawing/2014/main" id="{A453DFEB-8B56-806A-22EF-F1516694AA87}"/>
+                    </a:ext>
+                  </a:extLst>
+                </p:cNvPr>
+                <p:cNvSpPr/>
+                <p:nvPr/>
+              </p:nvSpPr>
+              <p:spPr>
+                <a:xfrm>
+                  <a:off x="6400800" y="2304288"/>
+                  <a:ext cx="475488" cy="475488"/>
+                </a:xfrm>
+                <a:prstGeom prst="ellipse">
+                  <a:avLst/>
+                </a:prstGeom>
+                <a:solidFill>
+                  <a:schemeClr val="accent2"/>
+                </a:solidFill>
+                <a:ln>
+                  <a:solidFill>
+                    <a:srgbClr val="3D7EFF"/>
+                  </a:solidFill>
+                </a:ln>
+              </p:spPr>
+              <p:style>
+                <a:lnRef idx="1">
+                  <a:schemeClr val="accent1"/>
+                </a:lnRef>
+                <a:fillRef idx="3">
+                  <a:schemeClr val="accent1"/>
+                </a:fillRef>
+                <a:effectRef idx="2">
+                  <a:schemeClr val="accent1"/>
+                </a:effectRef>
+                <a:fontRef idx="minor">
+                  <a:schemeClr val="lt1"/>
+                </a:fontRef>
+              </p:style>
+              <p:txBody>
+                <a:bodyPr rtlCol="0" anchor="ctr"/>
+                <a:lstStyle/>
+                <a:p>
+                  <a:pPr algn="ctr"/>
+                  <a:endParaRPr dirty="0"/>
+                </a:p>
+              </p:txBody>
+            </p:sp>
+            <p:sp>
+              <p:nvSpPr>
+                <p:cNvPr id="12" name="TextBox 11">
+                  <a:extLst>
+                    <a:ext uri="{FF2B5EF4-FFF2-40B4-BE49-F238E27FC236}">
+                      <a16:creationId xmlns:a16="http://schemas.microsoft.com/office/drawing/2014/main" id="{B50CDA61-7295-0CD3-11AB-E291B0047DF5}"/>
+                    </a:ext>
+                  </a:extLst>
+                </p:cNvPr>
+                <p:cNvSpPr txBox="1"/>
+                <p:nvPr/>
+              </p:nvSpPr>
+              <p:spPr>
+                <a:xfrm>
+                  <a:off x="6400800" y="2281535"/>
+                  <a:ext cx="475488" cy="461665"/>
+                </a:xfrm>
+                <a:prstGeom prst="rect">
+                  <a:avLst/>
+                </a:prstGeom>
+                <a:noFill/>
+              </p:spPr>
+              <p:txBody>
+                <a:bodyPr wrap="square">
+                  <a:spAutoFit/>
+                </a:bodyPr>
+                <a:lstStyle/>
+                <a:p>
+                  <a:pPr algn="ctr"/>
+                  <a:r>
+                    <a:rPr lang="en-US" sz="2400" b="1" dirty="0">
+                      <a:solidFill>
+                        <a:srgbClr val="FFFFFF"/>
+                      </a:solidFill>
+                      <a:latin typeface="Aptos"/>
+                    </a:rPr>
+                    <a:t>🛏️</a:t>
+                  </a:r>
+                  <a:endParaRPr sz="2400" b="1" dirty="0">
+                    <a:solidFill>
+                      <a:srgbClr val="FFFFFF"/>
+                    </a:solidFill>
+                    <a:latin typeface="Aptos"/>
+                  </a:endParaRPr>
+                </a:p>
+              </p:txBody>
+            </p:sp>
+          </p:grpSp>
+          <p:sp>
+            <p:nvSpPr>
+              <p:cNvPr id="13" name="TextBox 12">
+                <a:extLst>
+                  <a:ext uri="{FF2B5EF4-FFF2-40B4-BE49-F238E27FC236}">
+                    <a16:creationId xmlns:a16="http://schemas.microsoft.com/office/drawing/2014/main" id="{7C2A4510-DA00-F2DE-9143-BCC11A682D75}"/>
+                  </a:ext>
+                </a:extLst>
+              </p:cNvPr>
+              <p:cNvSpPr txBox="1"/>
+              <p:nvPr/>
+            </p:nvSpPr>
+            <p:spPr>
+              <a:xfrm>
+                <a:off x="7040880" y="2340864"/>
+                <a:ext cx="4069080" cy="461665"/>
+              </a:xfrm>
+              <a:prstGeom prst="rect">
+                <a:avLst/>
+              </a:prstGeom>
+              <a:noFill/>
+            </p:spPr>
+            <p:txBody>
+              <a:bodyPr wrap="square">
+                <a:spAutoFit/>
+              </a:bodyPr>
+              <a:lstStyle/>
+              <a:p>
+                <a:pPr algn="l"/>
+                <a:r>
+                  <a:rPr lang="en-US" sz="2400" b="1" dirty="0">
+                    <a:solidFill>
+                      <a:srgbClr val="121B2D"/>
+                    </a:solidFill>
+                    <a:latin typeface="Aptos"/>
+                  </a:rPr>
+                  <a:t>Rooms</a:t>
+                </a:r>
+                <a:endParaRPr sz="2400" b="1" dirty="0">
+                  <a:solidFill>
+                    <a:srgbClr val="121B2D"/>
+                  </a:solidFill>
+                  <a:latin typeface="Aptos"/>
+                </a:endParaRPr>
+              </a:p>
+            </p:txBody>
+          </p:sp>
+        </p:grpSp>
+        <p:grpSp>
+          <p:nvGrpSpPr>
+            <p:cNvPr id="36" name="Group 35">
+              <a:extLst>
+                <a:ext uri="{FF2B5EF4-FFF2-40B4-BE49-F238E27FC236}">
+                  <a16:creationId xmlns:a16="http://schemas.microsoft.com/office/drawing/2014/main" id="{8D2D1AC4-BCD4-6C3E-2160-EDB424260173}"/>
+                </a:ext>
+              </a:extLst>
+            </p:cNvPr>
+            <p:cNvGrpSpPr/>
+            <p:nvPr/>
+          </p:nvGrpSpPr>
+          <p:grpSpPr>
+            <a:xfrm>
+              <a:off x="3276002" y="3961737"/>
+              <a:ext cx="6394811" cy="849054"/>
+              <a:chOff x="685799" y="3867912"/>
+              <a:chExt cx="6394811" cy="849054"/>
+            </a:xfrm>
+          </p:grpSpPr>
+          <p:grpSp>
+            <p:nvGrpSpPr>
+              <p:cNvPr id="33" name="Group 32">
+                <a:extLst>
+                  <a:ext uri="{FF2B5EF4-FFF2-40B4-BE49-F238E27FC236}">
+                    <a16:creationId xmlns:a16="http://schemas.microsoft.com/office/drawing/2014/main" id="{38169490-F9FC-A952-FD42-B47B59A5EDA6}"/>
+                  </a:ext>
+                </a:extLst>
+              </p:cNvPr>
+              <p:cNvGrpSpPr/>
+              <p:nvPr/>
+            </p:nvGrpSpPr>
+            <p:grpSpPr>
+              <a:xfrm>
+                <a:off x="685799" y="3867912"/>
+                <a:ext cx="6054763" cy="849054"/>
+                <a:chOff x="685799" y="3867912"/>
+                <a:chExt cx="6054763" cy="849054"/>
+              </a:xfrm>
+            </p:grpSpPr>
+            <p:sp>
+              <p:nvSpPr>
+                <p:cNvPr id="15" name="Rounded Rectangle 14">
+                  <a:extLst>
+                    <a:ext uri="{FF2B5EF4-FFF2-40B4-BE49-F238E27FC236}">
+                      <a16:creationId xmlns:a16="http://schemas.microsoft.com/office/drawing/2014/main" id="{5673BC91-BAC1-6D81-42EB-AA35A17ED7BD}"/>
+                    </a:ext>
+                  </a:extLst>
+                </p:cNvPr>
+                <p:cNvSpPr/>
+                <p:nvPr/>
+              </p:nvSpPr>
+              <p:spPr>
+                <a:xfrm>
+                  <a:off x="685799" y="3867912"/>
+                  <a:ext cx="6054763" cy="849054"/>
+                </a:xfrm>
+                <a:prstGeom prst="roundRect">
+                  <a:avLst/>
+                </a:prstGeom>
+                <a:solidFill>
+                  <a:srgbClr val="F6F8FC"/>
+                </a:solidFill>
+                <a:ln>
+                  <a:solidFill>
+                    <a:srgbClr val="E0E5EE"/>
+                  </a:solidFill>
+                </a:ln>
+              </p:spPr>
+              <p:style>
+                <a:lnRef idx="1">
+                  <a:schemeClr val="accent1"/>
+                </a:lnRef>
+                <a:fillRef idx="3">
+                  <a:schemeClr val="accent1"/>
+                </a:fillRef>
+                <a:effectRef idx="2">
+                  <a:schemeClr val="accent1"/>
+                </a:effectRef>
+                <a:fontRef idx="minor">
+                  <a:schemeClr val="lt1"/>
+                </a:fontRef>
+              </p:style>
+              <p:txBody>
+                <a:bodyPr rtlCol="0" anchor="ctr"/>
+                <a:lstStyle/>
+                <a:p>
+                  <a:pPr algn="ctr"/>
+                  <a:endParaRPr/>
+                </a:p>
+              </p:txBody>
+            </p:sp>
+            <p:sp>
+              <p:nvSpPr>
+                <p:cNvPr id="16" name="Oval 15">
+                  <a:extLst>
+                    <a:ext uri="{FF2B5EF4-FFF2-40B4-BE49-F238E27FC236}">
+                      <a16:creationId xmlns:a16="http://schemas.microsoft.com/office/drawing/2014/main" id="{B2C6FBE4-7CAA-0683-3DCB-4B2857CAB3B7}"/>
+                    </a:ext>
+                  </a:extLst>
+                </p:cNvPr>
+                <p:cNvSpPr/>
+                <p:nvPr/>
+              </p:nvSpPr>
+              <p:spPr>
+                <a:xfrm>
+                  <a:off x="2374800" y="4067271"/>
+                  <a:ext cx="475488" cy="475488"/>
+                </a:xfrm>
+                <a:prstGeom prst="ellipse">
+                  <a:avLst/>
+                </a:prstGeom>
+                <a:solidFill>
+                  <a:srgbClr val="FFC000"/>
+                </a:solidFill>
+                <a:ln>
+                  <a:solidFill>
+                    <a:srgbClr val="6F42C1"/>
+                  </a:solidFill>
+                </a:ln>
+              </p:spPr>
+              <p:style>
+                <a:lnRef idx="1">
+                  <a:schemeClr val="accent1"/>
+                </a:lnRef>
+                <a:fillRef idx="3">
+                  <a:schemeClr val="accent1"/>
+                </a:fillRef>
+                <a:effectRef idx="2">
+                  <a:schemeClr val="accent1"/>
+                </a:effectRef>
+                <a:fontRef idx="minor">
+                  <a:schemeClr val="lt1"/>
+                </a:fontRef>
+              </p:style>
+              <p:txBody>
+                <a:bodyPr rtlCol="0" anchor="ctr"/>
+                <a:lstStyle/>
+                <a:p>
+                  <a:pPr algn="ctr"/>
+                  <a:endParaRPr/>
+                </a:p>
+              </p:txBody>
+            </p:sp>
+            <p:sp>
+              <p:nvSpPr>
+                <p:cNvPr id="17" name="TextBox 16">
+                  <a:extLst>
+                    <a:ext uri="{FF2B5EF4-FFF2-40B4-BE49-F238E27FC236}">
+                      <a16:creationId xmlns:a16="http://schemas.microsoft.com/office/drawing/2014/main" id="{DB9CE985-446C-7E7C-5440-C351ACB75FFD}"/>
+                    </a:ext>
+                  </a:extLst>
+                </p:cNvPr>
+                <p:cNvSpPr txBox="1"/>
+                <p:nvPr/>
+              </p:nvSpPr>
+              <p:spPr>
+                <a:xfrm>
+                  <a:off x="2382601" y="4113205"/>
+                  <a:ext cx="475488" cy="461665"/>
+                </a:xfrm>
+                <a:prstGeom prst="rect">
+                  <a:avLst/>
+                </a:prstGeom>
+                <a:noFill/>
+              </p:spPr>
+              <p:txBody>
+                <a:bodyPr wrap="square">
+                  <a:spAutoFit/>
+                </a:bodyPr>
+                <a:lstStyle/>
+                <a:p>
+                  <a:pPr algn="ctr"/>
+                  <a:r>
+                    <a:rPr lang="en-US" sz="2400" b="1" dirty="0">
+                      <a:solidFill>
+                        <a:srgbClr val="FFFFFF"/>
+                      </a:solidFill>
+                      <a:latin typeface="Aptos"/>
+                    </a:rPr>
+                    <a:t>📅</a:t>
+                  </a:r>
+                  <a:endParaRPr sz="2400" b="1" dirty="0">
+                    <a:solidFill>
+                      <a:srgbClr val="FFFFFF"/>
+                    </a:solidFill>
+                    <a:latin typeface="Aptos"/>
+                  </a:endParaRPr>
+                </a:p>
+              </p:txBody>
+            </p:sp>
+          </p:grpSp>
+          <p:sp>
+            <p:nvSpPr>
+              <p:cNvPr id="18" name="TextBox 17">
+                <a:extLst>
+                  <a:ext uri="{FF2B5EF4-FFF2-40B4-BE49-F238E27FC236}">
+                    <a16:creationId xmlns:a16="http://schemas.microsoft.com/office/drawing/2014/main" id="{931FB2E1-8CA8-5C75-E1DA-7863A7164F53}"/>
+                  </a:ext>
+                </a:extLst>
+              </p:cNvPr>
+              <p:cNvSpPr txBox="1"/>
+              <p:nvPr/>
+            </p:nvSpPr>
+            <p:spPr>
+              <a:xfrm>
+                <a:off x="3011530" y="4081094"/>
+                <a:ext cx="4069080" cy="461665"/>
+              </a:xfrm>
+              <a:prstGeom prst="rect">
+                <a:avLst/>
+              </a:prstGeom>
+              <a:noFill/>
+            </p:spPr>
+            <p:txBody>
+              <a:bodyPr wrap="square">
+                <a:spAutoFit/>
+              </a:bodyPr>
+              <a:lstStyle/>
+              <a:p>
+                <a:pPr algn="l"/>
+                <a:r>
+                  <a:rPr lang="en-US" sz="2400" b="1" dirty="0">
+                    <a:solidFill>
+                      <a:srgbClr val="121B2D"/>
+                    </a:solidFill>
+                    <a:latin typeface="Aptos"/>
+                  </a:rPr>
+                  <a:t>Reservations</a:t>
+                </a:r>
+                <a:endParaRPr sz="2400" b="1" dirty="0">
+                  <a:solidFill>
+                    <a:srgbClr val="121B2D"/>
+                  </a:solidFill>
+                  <a:latin typeface="Aptos"/>
+                </a:endParaRPr>
+              </a:p>
+            </p:txBody>
+          </p:sp>
+        </p:grpSp>
+        <p:grpSp>
+          <p:nvGrpSpPr>
+            <p:cNvPr id="35" name="Group 34">
+              <a:extLst>
+                <a:ext uri="{FF2B5EF4-FFF2-40B4-BE49-F238E27FC236}">
+                  <a16:creationId xmlns:a16="http://schemas.microsoft.com/office/drawing/2014/main" id="{85334700-081B-1E95-6C2C-F4A7D2E3DCF2}"/>
+                </a:ext>
+              </a:extLst>
+            </p:cNvPr>
+            <p:cNvGrpSpPr/>
+            <p:nvPr/>
+          </p:nvGrpSpPr>
+          <p:grpSpPr>
+            <a:xfrm>
+              <a:off x="2557866" y="5297388"/>
+              <a:ext cx="7812989" cy="849054"/>
+              <a:chOff x="5492422" y="3867912"/>
+              <a:chExt cx="7812989" cy="849054"/>
+            </a:xfrm>
+          </p:grpSpPr>
+          <p:grpSp>
+            <p:nvGrpSpPr>
+              <p:cNvPr id="32" name="Group 31">
+                <a:extLst>
+                  <a:ext uri="{FF2B5EF4-FFF2-40B4-BE49-F238E27FC236}">
+                    <a16:creationId xmlns:a16="http://schemas.microsoft.com/office/drawing/2014/main" id="{2D7CF502-E2AF-CD04-6602-96799C476092}"/>
+                  </a:ext>
+                </a:extLst>
+              </p:cNvPr>
+              <p:cNvGrpSpPr/>
+              <p:nvPr/>
+            </p:nvGrpSpPr>
+            <p:grpSpPr>
+              <a:xfrm>
+                <a:off x="5492422" y="3867912"/>
+                <a:ext cx="7812989" cy="849054"/>
+                <a:chOff x="5492422" y="3867912"/>
+                <a:chExt cx="7812989" cy="849054"/>
+              </a:xfrm>
+            </p:grpSpPr>
+            <p:sp>
+              <p:nvSpPr>
+                <p:cNvPr id="20" name="Rounded Rectangle 19">
+                  <a:extLst>
+                    <a:ext uri="{FF2B5EF4-FFF2-40B4-BE49-F238E27FC236}">
+                      <a16:creationId xmlns:a16="http://schemas.microsoft.com/office/drawing/2014/main" id="{3C6EDB9B-9CBE-4184-5DE1-BE5AF0ECECAA}"/>
+                    </a:ext>
+                  </a:extLst>
+                </p:cNvPr>
+                <p:cNvSpPr/>
+                <p:nvPr/>
+              </p:nvSpPr>
+              <p:spPr>
+                <a:xfrm>
+                  <a:off x="5492422" y="3867912"/>
+                  <a:ext cx="7812989" cy="849054"/>
+                </a:xfrm>
+                <a:prstGeom prst="roundRect">
+                  <a:avLst/>
+                </a:prstGeom>
+                <a:solidFill>
+                  <a:srgbClr val="F6F8FC"/>
+                </a:solidFill>
+                <a:ln>
+                  <a:solidFill>
+                    <a:srgbClr val="E0E5EE"/>
+                  </a:solidFill>
+                </a:ln>
+              </p:spPr>
+              <p:style>
+                <a:lnRef idx="1">
+                  <a:schemeClr val="accent1"/>
+                </a:lnRef>
+                <a:fillRef idx="3">
+                  <a:schemeClr val="accent1"/>
+                </a:fillRef>
+                <a:effectRef idx="2">
+                  <a:schemeClr val="accent1"/>
+                </a:effectRef>
+                <a:fontRef idx="minor">
+                  <a:schemeClr val="lt1"/>
+                </a:fontRef>
+              </p:style>
+              <p:txBody>
+                <a:bodyPr rtlCol="0" anchor="ctr"/>
+                <a:lstStyle/>
+                <a:p>
+                  <a:pPr algn="ctr"/>
+                  <a:endParaRPr/>
+                </a:p>
+              </p:txBody>
+            </p:sp>
+            <p:sp>
+              <p:nvSpPr>
+                <p:cNvPr id="21" name="Oval 20">
+                  <a:extLst>
+                    <a:ext uri="{FF2B5EF4-FFF2-40B4-BE49-F238E27FC236}">
+                      <a16:creationId xmlns:a16="http://schemas.microsoft.com/office/drawing/2014/main" id="{ADCCF63C-E526-BE6F-4915-639B7D942530}"/>
+                    </a:ext>
+                  </a:extLst>
+                </p:cNvPr>
+                <p:cNvSpPr/>
+                <p:nvPr/>
+              </p:nvSpPr>
+              <p:spPr>
+                <a:xfrm>
+                  <a:off x="7939334" y="4014212"/>
+                  <a:ext cx="475488" cy="475488"/>
+                </a:xfrm>
+                <a:prstGeom prst="ellipse">
+                  <a:avLst/>
+                </a:prstGeom>
+                <a:solidFill>
+                  <a:schemeClr val="accent5">
+                    <a:lumMod val="60000"/>
+                    <a:lumOff val="40000"/>
+                  </a:schemeClr>
+                </a:solidFill>
+                <a:ln>
+                  <a:solidFill>
+                    <a:srgbClr val="6F42C1"/>
+                  </a:solidFill>
+                </a:ln>
+              </p:spPr>
+              <p:style>
+                <a:lnRef idx="1">
+                  <a:schemeClr val="accent1"/>
+                </a:lnRef>
+                <a:fillRef idx="3">
+                  <a:schemeClr val="accent1"/>
+                </a:fillRef>
+                <a:effectRef idx="2">
+                  <a:schemeClr val="accent1"/>
+                </a:effectRef>
+                <a:fontRef idx="minor">
+                  <a:schemeClr val="lt1"/>
+                </a:fontRef>
+              </p:style>
+              <p:txBody>
+                <a:bodyPr rtlCol="0" anchor="ctr"/>
+                <a:lstStyle/>
+                <a:p>
+                  <a:pPr algn="ctr"/>
+                  <a:endParaRPr dirty="0"/>
+                </a:p>
+              </p:txBody>
+            </p:sp>
+            <p:sp>
+              <p:nvSpPr>
+                <p:cNvPr id="22" name="TextBox 21">
+                  <a:extLst>
+                    <a:ext uri="{FF2B5EF4-FFF2-40B4-BE49-F238E27FC236}">
+                      <a16:creationId xmlns:a16="http://schemas.microsoft.com/office/drawing/2014/main" id="{A0F787F3-24F1-725B-7188-9BF28A5F46AA}"/>
+                    </a:ext>
+                  </a:extLst>
+                </p:cNvPr>
+                <p:cNvSpPr txBox="1"/>
+                <p:nvPr/>
+              </p:nvSpPr>
+              <p:spPr>
+                <a:xfrm>
+                  <a:off x="7939334" y="4021125"/>
+                  <a:ext cx="475488" cy="461665"/>
+                </a:xfrm>
+                <a:prstGeom prst="rect">
+                  <a:avLst/>
+                </a:prstGeom>
+                <a:noFill/>
+              </p:spPr>
+              <p:txBody>
+                <a:bodyPr wrap="square">
+                  <a:spAutoFit/>
+                </a:bodyPr>
+                <a:lstStyle/>
+                <a:p>
+                  <a:pPr algn="ctr"/>
+                  <a:r>
+                    <a:rPr lang="en-US" sz="2400" b="1" dirty="0">
+                      <a:solidFill>
+                        <a:srgbClr val="FFFFFF"/>
+                      </a:solidFill>
+                      <a:latin typeface="Aptos"/>
+                    </a:rPr>
+                    <a:t>📊</a:t>
+                  </a:r>
+                  <a:endParaRPr sz="2400" b="1" dirty="0">
+                    <a:solidFill>
+                      <a:srgbClr val="FFFFFF"/>
+                    </a:solidFill>
+                    <a:latin typeface="Aptos"/>
+                  </a:endParaRPr>
+                </a:p>
+              </p:txBody>
+            </p:sp>
+          </p:grpSp>
+          <p:sp>
+            <p:nvSpPr>
+              <p:cNvPr id="23" name="TextBox 22">
+                <a:extLst>
+                  <a:ext uri="{FF2B5EF4-FFF2-40B4-BE49-F238E27FC236}">
+                    <a16:creationId xmlns:a16="http://schemas.microsoft.com/office/drawing/2014/main" id="{40933620-0A5A-7C30-A8BA-BB861E6BA5EB}"/>
+                  </a:ext>
+                </a:extLst>
+              </p:cNvPr>
+              <p:cNvSpPr txBox="1"/>
+              <p:nvPr/>
+            </p:nvSpPr>
+            <p:spPr>
+              <a:xfrm>
+                <a:off x="8579414" y="4052457"/>
+                <a:ext cx="4069080" cy="461665"/>
+              </a:xfrm>
+              <a:prstGeom prst="rect">
+                <a:avLst/>
+              </a:prstGeom>
+              <a:noFill/>
+            </p:spPr>
+            <p:txBody>
+              <a:bodyPr wrap="square">
+                <a:spAutoFit/>
+              </a:bodyPr>
+              <a:lstStyle/>
+              <a:p>
+                <a:pPr algn="l"/>
+                <a:r>
+                  <a:rPr lang="en-US" sz="2400" b="1" dirty="0">
+                    <a:solidFill>
+                      <a:srgbClr val="121B2D"/>
+                    </a:solidFill>
+                    <a:latin typeface="Aptos"/>
+                  </a:rPr>
+                  <a:t>Dashboard</a:t>
+                </a:r>
+                <a:endParaRPr sz="2400" b="1" dirty="0">
+                  <a:solidFill>
+                    <a:srgbClr val="121B2D"/>
+                  </a:solidFill>
+                  <a:latin typeface="Aptos"/>
+                </a:endParaRPr>
+              </a:p>
+            </p:txBody>
+          </p:sp>
+        </p:grpSp>
+        <p:sp>
+          <p:nvSpPr>
+            <p:cNvPr id="38" name="Arrow: Right 37">
+              <a:extLst>
+                <a:ext uri="{FF2B5EF4-FFF2-40B4-BE49-F238E27FC236}">
+                  <a16:creationId xmlns:a16="http://schemas.microsoft.com/office/drawing/2014/main" id="{DEA3B73E-13B5-858E-D68B-243ADF3D1AD2}"/>
+                </a:ext>
+              </a:extLst>
+            </p:cNvPr>
+            <p:cNvSpPr/>
+            <p:nvPr/>
+          </p:nvSpPr>
+          <p:spPr>
+            <a:xfrm rot="5400000">
+              <a:off x="3726957" y="3280034"/>
+              <a:ext cx="627594" cy="670397"/>
+            </a:xfrm>
+            <a:prstGeom prst="rightArrow">
+              <a:avLst/>
+            </a:prstGeom>
+            <a:solidFill>
+              <a:schemeClr val="dk1">
+                <a:alpha val="50000"/>
+              </a:schemeClr>
+            </a:solidFill>
+            <a:ln>
+              <a:noFill/>
+            </a:ln>
+          </p:spPr>
+          <p:style>
+            <a:lnRef idx="0">
+              <a:scrgbClr r="0" g="0" b="0"/>
+            </a:lnRef>
+            <a:fillRef idx="0">
+              <a:scrgbClr r="0" g="0" b="0"/>
+            </a:fillRef>
+            <a:effectRef idx="0">
+              <a:scrgbClr r="0" g="0" b="0"/>
+            </a:effectRef>
+            <a:fontRef idx="minor">
+              <a:schemeClr val="lt1"/>
+            </a:fontRef>
+          </p:style>
+          <p:txBody>
+            <a:bodyPr rtlCol="0" anchor="ctr"/>
+            <a:lstStyle/>
+            <a:p>
+              <a:pPr algn="ctr"/>
+              <a:endParaRPr lang="en-US"/>
+            </a:p>
+          </p:txBody>
+        </p:sp>
+        <p:sp>
+          <p:nvSpPr>
+            <p:cNvPr id="40" name="Arrow: Right 39">
+              <a:extLst>
+                <a:ext uri="{FF2B5EF4-FFF2-40B4-BE49-F238E27FC236}">
+                  <a16:creationId xmlns:a16="http://schemas.microsoft.com/office/drawing/2014/main" id="{790A25FB-AC16-D843-3F37-68AEB9B0FC17}"/>
+                </a:ext>
+              </a:extLst>
+            </p:cNvPr>
+            <p:cNvSpPr/>
+            <p:nvPr/>
+          </p:nvSpPr>
+          <p:spPr>
+            <a:xfrm rot="5400000">
+              <a:off x="8603713" y="3277524"/>
+              <a:ext cx="627594" cy="670397"/>
+            </a:xfrm>
+            <a:prstGeom prst="rightArrow">
+              <a:avLst/>
+            </a:prstGeom>
+            <a:solidFill>
+              <a:schemeClr val="dk1">
+                <a:alpha val="50000"/>
+              </a:schemeClr>
+            </a:solidFill>
+            <a:ln>
+              <a:noFill/>
+            </a:ln>
+          </p:spPr>
+          <p:style>
+            <a:lnRef idx="0">
+              <a:scrgbClr r="0" g="0" b="0"/>
+            </a:lnRef>
+            <a:fillRef idx="0">
+              <a:scrgbClr r="0" g="0" b="0"/>
+            </a:fillRef>
+            <a:effectRef idx="0">
+              <a:scrgbClr r="0" g="0" b="0"/>
+            </a:effectRef>
+            <a:fontRef idx="minor">
+              <a:schemeClr val="lt1"/>
+            </a:fontRef>
+          </p:style>
+          <p:txBody>
+            <a:bodyPr rtlCol="0" anchor="ctr"/>
+            <a:lstStyle/>
+            <a:p>
+              <a:pPr algn="ctr"/>
+              <a:endParaRPr lang="en-US"/>
+            </a:p>
+          </p:txBody>
+        </p:sp>
+      </p:grpSp>
+    </p:spTree>
+    <p:extLst>
+      <p:ext uri="{BB962C8B-B14F-4D97-AF65-F5344CB8AC3E}">
+        <p14:creationId xmlns:p14="http://schemas.microsoft.com/office/powerpoint/2010/main" val="3437304807"/>
+      </p:ext>
+    </p:extLst>
+  </p:cSld>
+  <p:clrMapOvr>
+    <a:masterClrMapping/>
+  </p:clrMapOvr>
+</p:sld>
+</file>
+
 <file path=ppt/slides/slide2.xml><?xml version="1.0" encoding="utf-8"?>
 <p:sld xmlns:a="http://schemas.openxmlformats.org/drawingml/2006/main" xmlns:r="http://schemas.openxmlformats.org/officeDocument/2006/relationships" xmlns:p="http://schemas.openxmlformats.org/presentationml/2006/main">
   <p:cSld>

--- a/abp-community-talks-2026.05.pptx
+++ b/abp-community-talks-2026.05.pptx
@@ -5,7 +5,7 @@
     <p:sldMasterId id="2147483648" r:id="rId1"/>
   </p:sldMasterIdLst>
   <p:notesMasterIdLst>
-    <p:notesMasterId r:id="rId18"/>
+    <p:notesMasterId r:id="rId24"/>
   </p:notesMasterIdLst>
   <p:sldIdLst>
     <p:sldId id="323" r:id="rId2"/>
@@ -24,30 +24,36 @@
     <p:sldId id="256" r:id="rId15"/>
     <p:sldId id="257" r:id="rId16"/>
     <p:sldId id="348" r:id="rId17"/>
+    <p:sldId id="349" r:id="rId18"/>
+    <p:sldId id="353" r:id="rId19"/>
+    <p:sldId id="354" r:id="rId20"/>
+    <p:sldId id="355" r:id="rId21"/>
+    <p:sldId id="351" r:id="rId22"/>
+    <p:sldId id="352" r:id="rId23"/>
   </p:sldIdLst>
   <p:sldSz cx="12192000" cy="6858000"/>
   <p:notesSz cx="6858000" cy="9144000"/>
   <p:embeddedFontLst>
     <p:embeddedFont>
       <p:font typeface="Lexend" panose="020B0604020202020204" charset="-94"/>
-      <p:regular r:id="rId19"/>
-      <p:bold r:id="rId20"/>
+      <p:regular r:id="rId25"/>
+      <p:bold r:id="rId26"/>
     </p:embeddedFont>
     <p:embeddedFont>
       <p:font typeface="Lexend Light" panose="020B0604020202020204" charset="-94"/>
-      <p:regular r:id="rId21"/>
+      <p:regular r:id="rId27"/>
     </p:embeddedFont>
     <p:embeddedFont>
       <p:font typeface="Play" panose="020B0604020202020204" charset="0"/>
-      <p:regular r:id="rId22"/>
-      <p:bold r:id="rId23"/>
+      <p:regular r:id="rId28"/>
+      <p:bold r:id="rId29"/>
     </p:embeddedFont>
     <p:embeddedFont>
       <p:font typeface="Poppins" panose="00000500000000000000" pitchFamily="2" charset="-94"/>
-      <p:regular r:id="rId24"/>
-      <p:bold r:id="rId25"/>
-      <p:italic r:id="rId26"/>
-      <p:boldItalic r:id="rId27"/>
+      <p:regular r:id="rId30"/>
+      <p:bold r:id="rId31"/>
+      <p:italic r:id="rId32"/>
+      <p:boldItalic r:id="rId33"/>
     </p:embeddedFont>
   </p:embeddedFontLst>
   <p:defaultTextStyle>
@@ -302,13 +308,23 @@
             <p14:sldId id="348"/>
           </p14:sldIdLst>
         </p14:section>
+        <p14:section name="Project Steps" id="{2E7C0FCA-AAB3-4022-8274-D39FF82EF12F}">
+          <p14:sldIdLst>
+            <p14:sldId id="349"/>
+            <p14:sldId id="353"/>
+            <p14:sldId id="354"/>
+            <p14:sldId id="355"/>
+            <p14:sldId id="351"/>
+            <p14:sldId id="352"/>
+          </p14:sldIdLst>
+        </p14:section>
       </p14:sectionLst>
     </p:ext>
     <p:ext uri="{EFAFB233-063F-42B5-8137-9DF3F51BA10A}">
       <p15:sldGuideLst xmlns:p15="http://schemas.microsoft.com/office/powerpoint/2012/main"/>
     </p:ext>
     <p:ext uri="GoogleSlidesCustomDataVersion2">
-      <go:slidesCustomData xmlns:go="http://customooxmlschemas.google.com/" xmlns:ahyp="http://schemas.microsoft.com/office/drawing/2018/hyperlinkcolor" xmlns:p15="http://schemas.microsoft.com/office/powerpoint/2012/main" xmlns:p14="http://schemas.microsoft.com/office/powerpoint/2010/main" xmlns:com="http://schemas.openxmlformats.org/drawingml/2006/compatibility" xmlns:pvml="urn:schemas-microsoft-com:office:powerpoint" xmlns:v="urn:schemas-microsoft-com:vml" xmlns:o="urn:schemas-microsoft-com:office:office" xmlns:dgm="http://schemas.openxmlformats.org/drawingml/2006/diagram" xmlns:c="http://schemas.openxmlformats.org/drawingml/2006/chart" xmlns:mv="urn:schemas-microsoft-com:mac:vml" xmlns:mc="http://schemas.openxmlformats.org/markup-compatibility/2006" xmlns="" r:id="rId48" roundtripDataSignature="AMtx7mihNSh0nE7P5bmNZynwZ07PSv3TUg=="/>
+      <go:slidesCustomData xmlns="" xmlns:mc="http://schemas.openxmlformats.org/markup-compatibility/2006" xmlns:mv="urn:schemas-microsoft-com:mac:vml" xmlns:c="http://schemas.openxmlformats.org/drawingml/2006/chart" xmlns:dgm="http://schemas.openxmlformats.org/drawingml/2006/diagram" xmlns:o="urn:schemas-microsoft-com:office:office" xmlns:v="urn:schemas-microsoft-com:vml" xmlns:pvml="urn:schemas-microsoft-com:office:powerpoint" xmlns:com="http://schemas.openxmlformats.org/drawingml/2006/compatibility" xmlns:p14="http://schemas.microsoft.com/office/powerpoint/2010/main" xmlns:p15="http://schemas.microsoft.com/office/powerpoint/2012/main" xmlns:ahyp="http://schemas.microsoft.com/office/drawing/2018/hyperlinkcolor" xmlns:go="http://customooxmlschemas.google.com/" r:id="rId48" roundtripDataSignature="AMtx7mihNSh0nE7P5bmNZynwZ07PSv3TUg=="/>
     </p:ext>
   </p:extLst>
 </p:presentation>
@@ -2768,6 +2784,405 @@
     <p:extLst>
       <p:ext uri="{BB962C8B-B14F-4D97-AF65-F5344CB8AC3E}">
         <p14:creationId xmlns:p14="http://schemas.microsoft.com/office/powerpoint/2010/main" val="3205976025"/>
+      </p:ext>
+    </p:extLst>
+  </p:cSld>
+  <p:clrMapOvr>
+    <a:masterClrMapping/>
+  </p:clrMapOvr>
+</p:notes>
+</file>
+
+<file path=ppt/notesSlides/notesSlide16.xml><?xml version="1.0" encoding="utf-8"?>
+<p:notes xmlns:a="http://schemas.openxmlformats.org/drawingml/2006/main" xmlns:r="http://schemas.openxmlformats.org/officeDocument/2006/relationships" xmlns:p="http://schemas.openxmlformats.org/presentationml/2006/main">
+  <p:cSld>
+    <p:spTree>
+      <p:nvGrpSpPr>
+        <p:cNvPr id="1" name=""/>
+        <p:cNvGrpSpPr/>
+        <p:nvPr/>
+      </p:nvGrpSpPr>
+      <p:grpSpPr>
+        <a:xfrm>
+          <a:off x="0" y="0"/>
+          <a:ext cx="0" cy="0"/>
+          <a:chOff x="0" y="0"/>
+          <a:chExt cx="0" cy="0"/>
+        </a:xfrm>
+      </p:grpSpPr>
+      <p:sp>
+        <p:nvSpPr>
+          <p:cNvPr id="2" name="Slide Image Placeholder 1"/>
+          <p:cNvSpPr>
+            <a:spLocks noGrp="1" noRot="1" noChangeAspect="1"/>
+          </p:cNvSpPr>
+          <p:nvPr>
+            <p:ph type="sldImg"/>
+          </p:nvPr>
+        </p:nvSpPr>
+        <p:spPr/>
+      </p:sp>
+      <p:sp>
+        <p:nvSpPr>
+          <p:cNvPr id="3" name="Notes Placeholder 2"/>
+          <p:cNvSpPr>
+            <a:spLocks noGrp="1"/>
+          </p:cNvSpPr>
+          <p:nvPr>
+            <p:ph type="body" idx="1"/>
+          </p:nvPr>
+        </p:nvSpPr>
+        <p:spPr/>
+        <p:txBody>
+          <a:bodyPr/>
+          <a:lstStyle/>
+          <a:p>
+            <a:endParaRPr lang="en-US" dirty="0"/>
+          </a:p>
+        </p:txBody>
+      </p:sp>
+      <p:sp>
+        <p:nvSpPr>
+          <p:cNvPr id="4" name="Slide Number Placeholder 3"/>
+          <p:cNvSpPr>
+            <a:spLocks noGrp="1"/>
+          </p:cNvSpPr>
+          <p:nvPr>
+            <p:ph type="sldNum" idx="12"/>
+          </p:nvPr>
+        </p:nvSpPr>
+        <p:spPr/>
+        <p:txBody>
+          <a:bodyPr/>
+          <a:lstStyle/>
+          <a:p>
+            <a:pPr marL="0" marR="0" lvl="0" indent="0" algn="r" rtl="0">
+              <a:lnSpc>
+                <a:spcPct val="100000"/>
+              </a:lnSpc>
+              <a:spcBef>
+                <a:spcPts val="0"/>
+              </a:spcBef>
+              <a:spcAft>
+                <a:spcPts val="0"/>
+              </a:spcAft>
+              <a:buClr>
+                <a:srgbClr val="000000"/>
+              </a:buClr>
+              <a:buSzPts val="1200"/>
+              <a:buFont typeface="Arial"/>
+              <a:buNone/>
+            </a:pPr>
+            <a:fld id="{00000000-1234-1234-1234-123412341234}" type="slidenum">
+              <a:rPr lang="tr-TR" sz="1200" b="0" i="0" u="none" strike="noStrike" cap="none" smtClean="0">
+                <a:solidFill>
+                  <a:schemeClr val="dk1"/>
+                </a:solidFill>
+                <a:latin typeface="Arial"/>
+                <a:ea typeface="Arial"/>
+                <a:cs typeface="Arial"/>
+                <a:sym typeface="Arial"/>
+              </a:rPr>
+              <a:t>17</a:t>
+            </a:fld>
+            <a:endParaRPr lang="tr-TR" sz="1200" b="0" i="0" u="none" strike="noStrike" cap="none" dirty="0">
+              <a:solidFill>
+                <a:schemeClr val="dk1"/>
+              </a:solidFill>
+              <a:latin typeface="Arial"/>
+              <a:ea typeface="Arial"/>
+              <a:cs typeface="Arial"/>
+              <a:sym typeface="Arial"/>
+            </a:endParaRPr>
+          </a:p>
+        </p:txBody>
+      </p:sp>
+    </p:spTree>
+    <p:extLst>
+      <p:ext uri="{BB962C8B-B14F-4D97-AF65-F5344CB8AC3E}">
+        <p14:creationId xmlns:p14="http://schemas.microsoft.com/office/powerpoint/2010/main" val="3845600231"/>
+      </p:ext>
+    </p:extLst>
+  </p:cSld>
+  <p:clrMapOvr>
+    <a:masterClrMapping/>
+  </p:clrMapOvr>
+</p:notes>
+</file>
+
+<file path=ppt/notesSlides/notesSlide17.xml><?xml version="1.0" encoding="utf-8"?>
+<p:notes xmlns:a="http://schemas.openxmlformats.org/drawingml/2006/main" xmlns:r="http://schemas.openxmlformats.org/officeDocument/2006/relationships" xmlns:p="http://schemas.openxmlformats.org/presentationml/2006/main">
+  <p:cSld>
+    <p:spTree>
+      <p:nvGrpSpPr>
+        <p:cNvPr id="1" name="">
+          <a:extLst>
+            <a:ext uri="{FF2B5EF4-FFF2-40B4-BE49-F238E27FC236}">
+              <a16:creationId xmlns:a16="http://schemas.microsoft.com/office/drawing/2014/main" id="{391CC4A3-4A7E-89F4-C2ED-9025AD0473E7}"/>
+            </a:ext>
+          </a:extLst>
+        </p:cNvPr>
+        <p:cNvGrpSpPr/>
+        <p:nvPr/>
+      </p:nvGrpSpPr>
+      <p:grpSpPr>
+        <a:xfrm>
+          <a:off x="0" y="0"/>
+          <a:ext cx="0" cy="0"/>
+          <a:chOff x="0" y="0"/>
+          <a:chExt cx="0" cy="0"/>
+        </a:xfrm>
+      </p:grpSpPr>
+      <p:sp>
+        <p:nvSpPr>
+          <p:cNvPr id="2" name="Slide Image Placeholder 1">
+            <a:extLst>
+              <a:ext uri="{FF2B5EF4-FFF2-40B4-BE49-F238E27FC236}">
+                <a16:creationId xmlns:a16="http://schemas.microsoft.com/office/drawing/2014/main" id="{952F4C20-CBDD-1A06-5D4D-5A97D0436B8B}"/>
+              </a:ext>
+            </a:extLst>
+          </p:cNvPr>
+          <p:cNvSpPr>
+            <a:spLocks noGrp="1" noRot="1" noChangeAspect="1"/>
+          </p:cNvSpPr>
+          <p:nvPr>
+            <p:ph type="sldImg"/>
+          </p:nvPr>
+        </p:nvSpPr>
+        <p:spPr/>
+      </p:sp>
+      <p:sp>
+        <p:nvSpPr>
+          <p:cNvPr id="3" name="Notes Placeholder 2">
+            <a:extLst>
+              <a:ext uri="{FF2B5EF4-FFF2-40B4-BE49-F238E27FC236}">
+                <a16:creationId xmlns:a16="http://schemas.microsoft.com/office/drawing/2014/main" id="{A8E4EAB5-4F77-2D42-ED68-D2EFC0225117}"/>
+              </a:ext>
+            </a:extLst>
+          </p:cNvPr>
+          <p:cNvSpPr>
+            <a:spLocks noGrp="1"/>
+          </p:cNvSpPr>
+          <p:nvPr>
+            <p:ph type="body" idx="1"/>
+          </p:nvPr>
+        </p:nvSpPr>
+        <p:spPr/>
+        <p:txBody>
+          <a:bodyPr/>
+          <a:lstStyle/>
+          <a:p>
+            <a:endParaRPr lang="en-US" dirty="0"/>
+          </a:p>
+        </p:txBody>
+      </p:sp>
+      <p:sp>
+        <p:nvSpPr>
+          <p:cNvPr id="4" name="Slide Number Placeholder 3">
+            <a:extLst>
+              <a:ext uri="{FF2B5EF4-FFF2-40B4-BE49-F238E27FC236}">
+                <a16:creationId xmlns:a16="http://schemas.microsoft.com/office/drawing/2014/main" id="{E58EED23-484D-35F5-1603-95E0E6B63BF8}"/>
+              </a:ext>
+            </a:extLst>
+          </p:cNvPr>
+          <p:cNvSpPr>
+            <a:spLocks noGrp="1"/>
+          </p:cNvSpPr>
+          <p:nvPr>
+            <p:ph type="sldNum" idx="12"/>
+          </p:nvPr>
+        </p:nvSpPr>
+        <p:spPr/>
+        <p:txBody>
+          <a:bodyPr/>
+          <a:lstStyle/>
+          <a:p>
+            <a:pPr marL="0" marR="0" lvl="0" indent="0" algn="r" rtl="0">
+              <a:lnSpc>
+                <a:spcPct val="100000"/>
+              </a:lnSpc>
+              <a:spcBef>
+                <a:spcPts val="0"/>
+              </a:spcBef>
+              <a:spcAft>
+                <a:spcPts val="0"/>
+              </a:spcAft>
+              <a:buClr>
+                <a:srgbClr val="000000"/>
+              </a:buClr>
+              <a:buSzPts val="1200"/>
+              <a:buFont typeface="Arial"/>
+              <a:buNone/>
+            </a:pPr>
+            <a:fld id="{00000000-1234-1234-1234-123412341234}" type="slidenum">
+              <a:rPr lang="tr-TR" sz="1200" b="0" i="0" u="none" strike="noStrike" cap="none" smtClean="0">
+                <a:solidFill>
+                  <a:schemeClr val="dk1"/>
+                </a:solidFill>
+                <a:latin typeface="Arial"/>
+                <a:ea typeface="Arial"/>
+                <a:cs typeface="Arial"/>
+                <a:sym typeface="Arial"/>
+              </a:rPr>
+              <a:t>18</a:t>
+            </a:fld>
+            <a:endParaRPr lang="tr-TR" sz="1200" b="0" i="0" u="none" strike="noStrike" cap="none" dirty="0">
+              <a:solidFill>
+                <a:schemeClr val="dk1"/>
+              </a:solidFill>
+              <a:latin typeface="Arial"/>
+              <a:ea typeface="Arial"/>
+              <a:cs typeface="Arial"/>
+              <a:sym typeface="Arial"/>
+            </a:endParaRPr>
+          </a:p>
+        </p:txBody>
+      </p:sp>
+    </p:spTree>
+    <p:extLst>
+      <p:ext uri="{BB962C8B-B14F-4D97-AF65-F5344CB8AC3E}">
+        <p14:creationId xmlns:p14="http://schemas.microsoft.com/office/powerpoint/2010/main" val="4184973871"/>
+      </p:ext>
+    </p:extLst>
+  </p:cSld>
+  <p:clrMapOvr>
+    <a:masterClrMapping/>
+  </p:clrMapOvr>
+</p:notes>
+</file>
+
+<file path=ppt/notesSlides/notesSlide18.xml><?xml version="1.0" encoding="utf-8"?>
+<p:notes xmlns:a="http://schemas.openxmlformats.org/drawingml/2006/main" xmlns:r="http://schemas.openxmlformats.org/officeDocument/2006/relationships" xmlns:p="http://schemas.openxmlformats.org/presentationml/2006/main">
+  <p:cSld>
+    <p:spTree>
+      <p:nvGrpSpPr>
+        <p:cNvPr id="1" name="">
+          <a:extLst>
+            <a:ext uri="{FF2B5EF4-FFF2-40B4-BE49-F238E27FC236}">
+              <a16:creationId xmlns:a16="http://schemas.microsoft.com/office/drawing/2014/main" id="{BCE0D91C-5251-B484-9311-966D61C9346C}"/>
+            </a:ext>
+          </a:extLst>
+        </p:cNvPr>
+        <p:cNvGrpSpPr/>
+        <p:nvPr/>
+      </p:nvGrpSpPr>
+      <p:grpSpPr>
+        <a:xfrm>
+          <a:off x="0" y="0"/>
+          <a:ext cx="0" cy="0"/>
+          <a:chOff x="0" y="0"/>
+          <a:chExt cx="0" cy="0"/>
+        </a:xfrm>
+      </p:grpSpPr>
+      <p:sp>
+        <p:nvSpPr>
+          <p:cNvPr id="2" name="Slide Image Placeholder 1">
+            <a:extLst>
+              <a:ext uri="{FF2B5EF4-FFF2-40B4-BE49-F238E27FC236}">
+                <a16:creationId xmlns:a16="http://schemas.microsoft.com/office/drawing/2014/main" id="{145F6CFA-58C8-22A8-B4FB-E8CA5750C1AD}"/>
+              </a:ext>
+            </a:extLst>
+          </p:cNvPr>
+          <p:cNvSpPr>
+            <a:spLocks noGrp="1" noRot="1" noChangeAspect="1"/>
+          </p:cNvSpPr>
+          <p:nvPr>
+            <p:ph type="sldImg"/>
+          </p:nvPr>
+        </p:nvSpPr>
+        <p:spPr/>
+      </p:sp>
+      <p:sp>
+        <p:nvSpPr>
+          <p:cNvPr id="3" name="Notes Placeholder 2">
+            <a:extLst>
+              <a:ext uri="{FF2B5EF4-FFF2-40B4-BE49-F238E27FC236}">
+                <a16:creationId xmlns:a16="http://schemas.microsoft.com/office/drawing/2014/main" id="{5D7B69F3-1CDC-5149-5E0C-5EDF08CC27E7}"/>
+              </a:ext>
+            </a:extLst>
+          </p:cNvPr>
+          <p:cNvSpPr>
+            <a:spLocks noGrp="1"/>
+          </p:cNvSpPr>
+          <p:nvPr>
+            <p:ph type="body" idx="1"/>
+          </p:nvPr>
+        </p:nvSpPr>
+        <p:spPr/>
+        <p:txBody>
+          <a:bodyPr/>
+          <a:lstStyle/>
+          <a:p>
+            <a:endParaRPr lang="en-US" dirty="0"/>
+          </a:p>
+        </p:txBody>
+      </p:sp>
+      <p:sp>
+        <p:nvSpPr>
+          <p:cNvPr id="4" name="Slide Number Placeholder 3">
+            <a:extLst>
+              <a:ext uri="{FF2B5EF4-FFF2-40B4-BE49-F238E27FC236}">
+                <a16:creationId xmlns:a16="http://schemas.microsoft.com/office/drawing/2014/main" id="{F7B36E5A-0C85-A637-6CF7-8FB0E48EBA72}"/>
+              </a:ext>
+            </a:extLst>
+          </p:cNvPr>
+          <p:cNvSpPr>
+            <a:spLocks noGrp="1"/>
+          </p:cNvSpPr>
+          <p:nvPr>
+            <p:ph type="sldNum" idx="12"/>
+          </p:nvPr>
+        </p:nvSpPr>
+        <p:spPr/>
+        <p:txBody>
+          <a:bodyPr/>
+          <a:lstStyle/>
+          <a:p>
+            <a:pPr marL="0" marR="0" lvl="0" indent="0" algn="r" rtl="0">
+              <a:lnSpc>
+                <a:spcPct val="100000"/>
+              </a:lnSpc>
+              <a:spcBef>
+                <a:spcPts val="0"/>
+              </a:spcBef>
+              <a:spcAft>
+                <a:spcPts val="0"/>
+              </a:spcAft>
+              <a:buClr>
+                <a:srgbClr val="000000"/>
+              </a:buClr>
+              <a:buSzPts val="1200"/>
+              <a:buFont typeface="Arial"/>
+              <a:buNone/>
+            </a:pPr>
+            <a:fld id="{00000000-1234-1234-1234-123412341234}" type="slidenum">
+              <a:rPr lang="tr-TR" sz="1200" b="0" i="0" u="none" strike="noStrike" cap="none" smtClean="0">
+                <a:solidFill>
+                  <a:schemeClr val="dk1"/>
+                </a:solidFill>
+                <a:latin typeface="Arial"/>
+                <a:ea typeface="Arial"/>
+                <a:cs typeface="Arial"/>
+                <a:sym typeface="Arial"/>
+              </a:rPr>
+              <a:t>19</a:t>
+            </a:fld>
+            <a:endParaRPr lang="tr-TR" sz="1200" b="0" i="0" u="none" strike="noStrike" cap="none" dirty="0">
+              <a:solidFill>
+                <a:schemeClr val="dk1"/>
+              </a:solidFill>
+              <a:latin typeface="Arial"/>
+              <a:ea typeface="Arial"/>
+              <a:cs typeface="Arial"/>
+              <a:sym typeface="Arial"/>
+            </a:endParaRPr>
+          </a:p>
+        </p:txBody>
+      </p:sp>
+    </p:spTree>
+    <p:extLst>
+      <p:ext uri="{BB962C8B-B14F-4D97-AF65-F5344CB8AC3E}">
+        <p14:creationId xmlns:p14="http://schemas.microsoft.com/office/powerpoint/2010/main" val="1298938003"/>
       </p:ext>
     </p:extLst>
   </p:cSld>
@@ -22355,6 +22770,410 @@
 </p:sld>
 </file>
 
+<file path=ppt/slides/slide17.xml><?xml version="1.0" encoding="utf-8"?>
+<p:sld xmlns:a="http://schemas.openxmlformats.org/drawingml/2006/main" xmlns:r="http://schemas.openxmlformats.org/officeDocument/2006/relationships" xmlns:p="http://schemas.openxmlformats.org/presentationml/2006/main">
+  <p:cSld>
+    <p:spTree>
+      <p:nvGrpSpPr>
+        <p:cNvPr id="1" name=""/>
+        <p:cNvGrpSpPr/>
+        <p:nvPr/>
+      </p:nvGrpSpPr>
+      <p:grpSpPr>
+        <a:xfrm>
+          <a:off x="0" y="0"/>
+          <a:ext cx="0" cy="0"/>
+          <a:chOff x="0" y="0"/>
+          <a:chExt cx="0" cy="0"/>
+        </a:xfrm>
+      </p:grpSpPr>
+      <p:pic>
+        <p:nvPicPr>
+          <p:cNvPr id="3" name="Picture 2">
+            <a:extLst>
+              <a:ext uri="{FF2B5EF4-FFF2-40B4-BE49-F238E27FC236}">
+                <a16:creationId xmlns:a16="http://schemas.microsoft.com/office/drawing/2014/main" id="{215462B3-1E59-C2D8-316F-07972F239E83}"/>
+              </a:ext>
+            </a:extLst>
+          </p:cNvPr>
+          <p:cNvPicPr>
+            <a:picLocks noChangeAspect="1"/>
+          </p:cNvPicPr>
+          <p:nvPr/>
+        </p:nvPicPr>
+        <p:blipFill>
+          <a:blip r:embed="rId3"/>
+          <a:stretch>
+            <a:fillRect/>
+          </a:stretch>
+        </p:blipFill>
+        <p:spPr>
+          <a:xfrm>
+            <a:off x="122664" y="155477"/>
+            <a:ext cx="6311840" cy="2713662"/>
+          </a:xfrm>
+          <a:prstGeom prst="rect">
+            <a:avLst/>
+          </a:prstGeom>
+          <a:ln>
+            <a:noFill/>
+          </a:ln>
+          <a:effectLst>
+            <a:outerShdw blurRad="292100" dist="139700" dir="2700000" algn="tl" rotWithShape="0">
+              <a:srgbClr val="333333">
+                <a:alpha val="65000"/>
+              </a:srgbClr>
+            </a:outerShdw>
+          </a:effectLst>
+        </p:spPr>
+      </p:pic>
+      <p:pic>
+        <p:nvPicPr>
+          <p:cNvPr id="5" name="Picture 4">
+            <a:extLst>
+              <a:ext uri="{FF2B5EF4-FFF2-40B4-BE49-F238E27FC236}">
+                <a16:creationId xmlns:a16="http://schemas.microsoft.com/office/drawing/2014/main" id="{2F758E68-D693-EDE5-05F0-83513981B5E2}"/>
+              </a:ext>
+            </a:extLst>
+          </p:cNvPr>
+          <p:cNvPicPr>
+            <a:picLocks noChangeAspect="1"/>
+          </p:cNvPicPr>
+          <p:nvPr/>
+        </p:nvPicPr>
+        <p:blipFill>
+          <a:blip r:embed="rId4"/>
+          <a:stretch>
+            <a:fillRect/>
+          </a:stretch>
+        </p:blipFill>
+        <p:spPr>
+          <a:xfrm>
+            <a:off x="6708815" y="155477"/>
+            <a:ext cx="5249008" cy="2991267"/>
+          </a:xfrm>
+          <a:prstGeom prst="rect">
+            <a:avLst/>
+          </a:prstGeom>
+          <a:ln>
+            <a:noFill/>
+          </a:ln>
+          <a:effectLst>
+            <a:outerShdw blurRad="292100" dist="139700" dir="2700000" algn="tl" rotWithShape="0">
+              <a:srgbClr val="333333">
+                <a:alpha val="65000"/>
+              </a:srgbClr>
+            </a:outerShdw>
+          </a:effectLst>
+        </p:spPr>
+      </p:pic>
+      <p:sp>
+        <p:nvSpPr>
+          <p:cNvPr id="6" name="Arrow: Right 5">
+            <a:extLst>
+              <a:ext uri="{FF2B5EF4-FFF2-40B4-BE49-F238E27FC236}">
+                <a16:creationId xmlns:a16="http://schemas.microsoft.com/office/drawing/2014/main" id="{841D74C9-C042-B5D9-0C86-FC746AE779D2}"/>
+              </a:ext>
+            </a:extLst>
+          </p:cNvPr>
+          <p:cNvSpPr/>
+          <p:nvPr/>
+        </p:nvSpPr>
+        <p:spPr>
+          <a:xfrm rot="10800000">
+            <a:off x="6096000" y="2252546"/>
+            <a:ext cx="512956" cy="490654"/>
+          </a:xfrm>
+          <a:prstGeom prst="rightArrow">
+            <a:avLst/>
+          </a:prstGeom>
+        </p:spPr>
+        <p:style>
+          <a:lnRef idx="2">
+            <a:schemeClr val="accent5">
+              <a:shade val="15000"/>
+            </a:schemeClr>
+          </a:lnRef>
+          <a:fillRef idx="1">
+            <a:schemeClr val="accent5"/>
+          </a:fillRef>
+          <a:effectRef idx="0">
+            <a:schemeClr val="accent5"/>
+          </a:effectRef>
+          <a:fontRef idx="minor">
+            <a:schemeClr val="lt1"/>
+          </a:fontRef>
+        </p:style>
+        <p:txBody>
+          <a:bodyPr rtlCol="0" anchor="ctr"/>
+          <a:lstStyle/>
+          <a:p>
+            <a:pPr algn="ctr"/>
+            <a:endParaRPr lang="en-US"/>
+          </a:p>
+        </p:txBody>
+      </p:sp>
+      <p:sp>
+        <p:nvSpPr>
+          <p:cNvPr id="8" name="Arrow: Right 7">
+            <a:extLst>
+              <a:ext uri="{FF2B5EF4-FFF2-40B4-BE49-F238E27FC236}">
+                <a16:creationId xmlns:a16="http://schemas.microsoft.com/office/drawing/2014/main" id="{7D25007C-0D36-138E-BA64-836D949E3075}"/>
+              </a:ext>
+            </a:extLst>
+          </p:cNvPr>
+          <p:cNvSpPr/>
+          <p:nvPr/>
+        </p:nvSpPr>
+        <p:spPr>
+          <a:xfrm rot="10800000">
+            <a:off x="10976517" y="1624550"/>
+            <a:ext cx="512956" cy="490654"/>
+          </a:xfrm>
+          <a:prstGeom prst="rightArrow">
+            <a:avLst/>
+          </a:prstGeom>
+        </p:spPr>
+        <p:style>
+          <a:lnRef idx="2">
+            <a:schemeClr val="accent5">
+              <a:shade val="15000"/>
+            </a:schemeClr>
+          </a:lnRef>
+          <a:fillRef idx="1">
+            <a:schemeClr val="accent5"/>
+          </a:fillRef>
+          <a:effectRef idx="0">
+            <a:schemeClr val="accent5"/>
+          </a:effectRef>
+          <a:fontRef idx="minor">
+            <a:schemeClr val="lt1"/>
+          </a:fontRef>
+        </p:style>
+        <p:txBody>
+          <a:bodyPr rtlCol="0" anchor="ctr"/>
+          <a:lstStyle/>
+          <a:p>
+            <a:pPr algn="ctr"/>
+            <a:endParaRPr lang="en-US"/>
+          </a:p>
+        </p:txBody>
+      </p:sp>
+      <p:pic>
+        <p:nvPicPr>
+          <p:cNvPr id="12" name="Picture 11">
+            <a:extLst>
+              <a:ext uri="{FF2B5EF4-FFF2-40B4-BE49-F238E27FC236}">
+                <a16:creationId xmlns:a16="http://schemas.microsoft.com/office/drawing/2014/main" id="{820A499A-A80E-A9E9-F7C1-1BD2F908F82B}"/>
+              </a:ext>
+            </a:extLst>
+          </p:cNvPr>
+          <p:cNvPicPr>
+            <a:picLocks noChangeAspect="1"/>
+          </p:cNvPicPr>
+          <p:nvPr/>
+        </p:nvPicPr>
+        <p:blipFill>
+          <a:blip r:embed="rId5"/>
+          <a:stretch>
+            <a:fillRect/>
+          </a:stretch>
+        </p:blipFill>
+        <p:spPr>
+          <a:xfrm>
+            <a:off x="0" y="3584277"/>
+            <a:ext cx="12192000" cy="3115901"/>
+          </a:xfrm>
+          <a:prstGeom prst="rect">
+            <a:avLst/>
+          </a:prstGeom>
+          <a:ln>
+            <a:noFill/>
+          </a:ln>
+          <a:effectLst>
+            <a:outerShdw blurRad="292100" dist="139700" dir="2700000" algn="tl" rotWithShape="0">
+              <a:srgbClr val="333333">
+                <a:alpha val="65000"/>
+              </a:srgbClr>
+            </a:outerShdw>
+          </a:effectLst>
+        </p:spPr>
+      </p:pic>
+    </p:spTree>
+    <p:extLst>
+      <p:ext uri="{BB962C8B-B14F-4D97-AF65-F5344CB8AC3E}">
+        <p14:creationId xmlns:p14="http://schemas.microsoft.com/office/powerpoint/2010/main" val="1531918767"/>
+      </p:ext>
+    </p:extLst>
+  </p:cSld>
+  <p:clrMapOvr>
+    <a:masterClrMapping/>
+  </p:clrMapOvr>
+</p:sld>
+</file>
+
+<file path=ppt/slides/slide18.xml><?xml version="1.0" encoding="utf-8"?>
+<p:sld xmlns:a="http://schemas.openxmlformats.org/drawingml/2006/main" xmlns:r="http://schemas.openxmlformats.org/officeDocument/2006/relationships" xmlns:p="http://schemas.openxmlformats.org/presentationml/2006/main">
+  <p:cSld>
+    <p:spTree>
+      <p:nvGrpSpPr>
+        <p:cNvPr id="1" name="">
+          <a:extLst>
+            <a:ext uri="{FF2B5EF4-FFF2-40B4-BE49-F238E27FC236}">
+              <a16:creationId xmlns:a16="http://schemas.microsoft.com/office/drawing/2014/main" id="{BA7480AD-E413-A9A4-54BD-5B384A7EFA19}"/>
+            </a:ext>
+          </a:extLst>
+        </p:cNvPr>
+        <p:cNvGrpSpPr/>
+        <p:nvPr/>
+      </p:nvGrpSpPr>
+      <p:grpSpPr>
+        <a:xfrm>
+          <a:off x="0" y="0"/>
+          <a:ext cx="0" cy="0"/>
+          <a:chOff x="0" y="0"/>
+          <a:chExt cx="0" cy="0"/>
+        </a:xfrm>
+      </p:grpSpPr>
+      <p:pic>
+        <p:nvPicPr>
+          <p:cNvPr id="4" name="Picture 3">
+            <a:extLst>
+              <a:ext uri="{FF2B5EF4-FFF2-40B4-BE49-F238E27FC236}">
+                <a16:creationId xmlns:a16="http://schemas.microsoft.com/office/drawing/2014/main" id="{B0EF4240-72DE-06BD-07DB-760454DEF8AD}"/>
+              </a:ext>
+            </a:extLst>
+          </p:cNvPr>
+          <p:cNvPicPr>
+            <a:picLocks noChangeAspect="1"/>
+          </p:cNvPicPr>
+          <p:nvPr/>
+        </p:nvPicPr>
+        <p:blipFill>
+          <a:blip r:embed="rId3"/>
+          <a:stretch>
+            <a:fillRect/>
+          </a:stretch>
+        </p:blipFill>
+        <p:spPr>
+          <a:xfrm>
+            <a:off x="0" y="0"/>
+            <a:ext cx="6991350" cy="6572250"/>
+          </a:xfrm>
+          <a:prstGeom prst="rect">
+            <a:avLst/>
+          </a:prstGeom>
+        </p:spPr>
+      </p:pic>
+      <p:pic>
+        <p:nvPicPr>
+          <p:cNvPr id="8" name="Picture 7">
+            <a:extLst>
+              <a:ext uri="{FF2B5EF4-FFF2-40B4-BE49-F238E27FC236}">
+                <a16:creationId xmlns:a16="http://schemas.microsoft.com/office/drawing/2014/main" id="{B12DF984-C960-2718-4792-82BB07E0D091}"/>
+              </a:ext>
+            </a:extLst>
+          </p:cNvPr>
+          <p:cNvPicPr>
+            <a:picLocks noChangeAspect="1"/>
+          </p:cNvPicPr>
+          <p:nvPr/>
+        </p:nvPicPr>
+        <p:blipFill>
+          <a:blip r:embed="rId4"/>
+          <a:stretch>
+            <a:fillRect/>
+          </a:stretch>
+        </p:blipFill>
+        <p:spPr>
+          <a:xfrm>
+            <a:off x="7215187" y="0"/>
+            <a:ext cx="4816979" cy="3895827"/>
+          </a:xfrm>
+          <a:prstGeom prst="rect">
+            <a:avLst/>
+          </a:prstGeom>
+        </p:spPr>
+      </p:pic>
+    </p:spTree>
+    <p:extLst>
+      <p:ext uri="{BB962C8B-B14F-4D97-AF65-F5344CB8AC3E}">
+        <p14:creationId xmlns:p14="http://schemas.microsoft.com/office/powerpoint/2010/main" val="857997857"/>
+      </p:ext>
+    </p:extLst>
+  </p:cSld>
+  <p:clrMapOvr>
+    <a:masterClrMapping/>
+  </p:clrMapOvr>
+</p:sld>
+</file>
+
+<file path=ppt/slides/slide19.xml><?xml version="1.0" encoding="utf-8"?>
+<p:sld xmlns:a="http://schemas.openxmlformats.org/drawingml/2006/main" xmlns:r="http://schemas.openxmlformats.org/officeDocument/2006/relationships" xmlns:p="http://schemas.openxmlformats.org/presentationml/2006/main">
+  <p:cSld>
+    <p:spTree>
+      <p:nvGrpSpPr>
+        <p:cNvPr id="1" name="">
+          <a:extLst>
+            <a:ext uri="{FF2B5EF4-FFF2-40B4-BE49-F238E27FC236}">
+              <a16:creationId xmlns:a16="http://schemas.microsoft.com/office/drawing/2014/main" id="{059B0B09-FA7C-8CDC-7502-5B7760059877}"/>
+            </a:ext>
+          </a:extLst>
+        </p:cNvPr>
+        <p:cNvGrpSpPr/>
+        <p:nvPr/>
+      </p:nvGrpSpPr>
+      <p:grpSpPr>
+        <a:xfrm>
+          <a:off x="0" y="0"/>
+          <a:ext cx="0" cy="0"/>
+          <a:chOff x="0" y="0"/>
+          <a:chExt cx="0" cy="0"/>
+        </a:xfrm>
+      </p:grpSpPr>
+      <p:pic>
+        <p:nvPicPr>
+          <p:cNvPr id="3" name="Picture 2">
+            <a:extLst>
+              <a:ext uri="{FF2B5EF4-FFF2-40B4-BE49-F238E27FC236}">
+                <a16:creationId xmlns:a16="http://schemas.microsoft.com/office/drawing/2014/main" id="{5A5741E7-53D9-B0B5-3EA7-76E849F70FAF}"/>
+              </a:ext>
+            </a:extLst>
+          </p:cNvPr>
+          <p:cNvPicPr>
+            <a:picLocks noChangeAspect="1"/>
+          </p:cNvPicPr>
+          <p:nvPr/>
+        </p:nvPicPr>
+        <p:blipFill>
+          <a:blip r:embed="rId3"/>
+          <a:stretch>
+            <a:fillRect/>
+          </a:stretch>
+        </p:blipFill>
+        <p:spPr>
+          <a:xfrm>
+            <a:off x="349445" y="624468"/>
+            <a:ext cx="11493110" cy="5402649"/>
+          </a:xfrm>
+          <a:prstGeom prst="rect">
+            <a:avLst/>
+          </a:prstGeom>
+        </p:spPr>
+      </p:pic>
+    </p:spTree>
+    <p:extLst>
+      <p:ext uri="{BB962C8B-B14F-4D97-AF65-F5344CB8AC3E}">
+        <p14:creationId xmlns:p14="http://schemas.microsoft.com/office/powerpoint/2010/main" val="2573109293"/>
+      </p:ext>
+    </p:extLst>
+  </p:cSld>
+  <p:clrMapOvr>
+    <a:masterClrMapping/>
+  </p:clrMapOvr>
+</p:sld>
+</file>
+
 <file path=ppt/slides/slide2.xml><?xml version="1.0" encoding="utf-8"?>
 <p:sld xmlns:a="http://schemas.openxmlformats.org/drawingml/2006/main" xmlns:r="http://schemas.openxmlformats.org/officeDocument/2006/relationships" xmlns:p="http://schemas.openxmlformats.org/presentationml/2006/main">
   <p:cSld>
@@ -22655,6 +23474,610 @@
     <p:extLst>
       <p:ext uri="{BB962C8B-B14F-4D97-AF65-F5344CB8AC3E}">
         <p14:creationId xmlns:p14="http://schemas.microsoft.com/office/powerpoint/2010/main" val="584080398"/>
+      </p:ext>
+    </p:extLst>
+  </p:cSld>
+  <p:clrMapOvr>
+    <a:masterClrMapping/>
+  </p:clrMapOvr>
+</p:sld>
+</file>
+
+<file path=ppt/slides/slide20.xml><?xml version="1.0" encoding="utf-8"?>
+<p:sld xmlns:a="http://schemas.openxmlformats.org/drawingml/2006/main" xmlns:r="http://schemas.openxmlformats.org/officeDocument/2006/relationships" xmlns:p="http://schemas.openxmlformats.org/presentationml/2006/main">
+  <p:cSld>
+    <p:spTree>
+      <p:nvGrpSpPr>
+        <p:cNvPr id="1" name=""/>
+        <p:cNvGrpSpPr/>
+        <p:nvPr/>
+      </p:nvGrpSpPr>
+      <p:grpSpPr>
+        <a:xfrm>
+          <a:off x="0" y="0"/>
+          <a:ext cx="0" cy="0"/>
+          <a:chOff x="0" y="0"/>
+          <a:chExt cx="0" cy="0"/>
+        </a:xfrm>
+      </p:grpSpPr>
+      <p:pic>
+        <p:nvPicPr>
+          <p:cNvPr id="3" name="Picture 2">
+            <a:extLst>
+              <a:ext uri="{FF2B5EF4-FFF2-40B4-BE49-F238E27FC236}">
+                <a16:creationId xmlns:a16="http://schemas.microsoft.com/office/drawing/2014/main" id="{1E94034C-B036-064E-BF46-72916D1B3362}"/>
+              </a:ext>
+            </a:extLst>
+          </p:cNvPr>
+          <p:cNvPicPr>
+            <a:picLocks noChangeAspect="1"/>
+          </p:cNvPicPr>
+          <p:nvPr/>
+        </p:nvPicPr>
+        <p:blipFill>
+          <a:blip r:embed="rId2"/>
+          <a:stretch>
+            <a:fillRect/>
+          </a:stretch>
+        </p:blipFill>
+        <p:spPr>
+          <a:xfrm>
+            <a:off x="356839" y="667840"/>
+            <a:ext cx="11478322" cy="5351380"/>
+          </a:xfrm>
+          <a:prstGeom prst="rect">
+            <a:avLst/>
+          </a:prstGeom>
+        </p:spPr>
+      </p:pic>
+    </p:spTree>
+    <p:extLst>
+      <p:ext uri="{BB962C8B-B14F-4D97-AF65-F5344CB8AC3E}">
+        <p14:creationId xmlns:p14="http://schemas.microsoft.com/office/powerpoint/2010/main" val="279582981"/>
+      </p:ext>
+    </p:extLst>
+  </p:cSld>
+  <p:clrMapOvr>
+    <a:masterClrMapping/>
+  </p:clrMapOvr>
+</p:sld>
+</file>
+
+<file path=ppt/slides/slide21.xml><?xml version="1.0" encoding="utf-8"?>
+<p:sld xmlns:a="http://schemas.openxmlformats.org/drawingml/2006/main" xmlns:r="http://schemas.openxmlformats.org/officeDocument/2006/relationships" xmlns:p="http://schemas.openxmlformats.org/presentationml/2006/main">
+  <p:cSld>
+    <p:spTree>
+      <p:nvGrpSpPr>
+        <p:cNvPr id="1" name=""/>
+        <p:cNvGrpSpPr/>
+        <p:nvPr/>
+      </p:nvGrpSpPr>
+      <p:grpSpPr>
+        <a:xfrm>
+          <a:off x="0" y="0"/>
+          <a:ext cx="0" cy="0"/>
+          <a:chOff x="0" y="0"/>
+          <a:chExt cx="0" cy="0"/>
+        </a:xfrm>
+      </p:grpSpPr>
+      <p:sp>
+        <p:nvSpPr>
+          <p:cNvPr id="3" name="TextBox 2">
+            <a:extLst>
+              <a:ext uri="{FF2B5EF4-FFF2-40B4-BE49-F238E27FC236}">
+                <a16:creationId xmlns:a16="http://schemas.microsoft.com/office/drawing/2014/main" id="{7528EA37-9F16-CC91-5705-B648C1DD6A20}"/>
+              </a:ext>
+            </a:extLst>
+          </p:cNvPr>
+          <p:cNvSpPr txBox="1"/>
+          <p:nvPr/>
+        </p:nvSpPr>
+        <p:spPr>
+          <a:xfrm>
+            <a:off x="243972" y="0"/>
+            <a:ext cx="9676471" cy="2677656"/>
+          </a:xfrm>
+          <a:prstGeom prst="rect">
+            <a:avLst/>
+          </a:prstGeom>
+          <a:noFill/>
+        </p:spPr>
+        <p:txBody>
+          <a:bodyPr wrap="square">
+            <a:spAutoFit/>
+          </a:bodyPr>
+          <a:lstStyle/>
+          <a:p>
+            <a:pPr marL="0" marR="0">
+              <a:buNone/>
+            </a:pPr>
+            <a:r>
+              <a:rPr lang="en-US" sz="2800" b="1" dirty="0">
+                <a:effectLst/>
+                <a:latin typeface="Lexend" panose="020B0604020202020204" charset="-94"/>
+              </a:rPr>
+              <a:t>ACTIONS: </a:t>
+            </a:r>
+          </a:p>
+          <a:p>
+            <a:pPr marL="342900" indent="-342900">
+              <a:buFont typeface="Arial" panose="020B0604020202020204" pitchFamily="34" charset="0"/>
+              <a:buChar char="•"/>
+            </a:pPr>
+            <a:r>
+              <a:rPr lang="en-US" sz="2000" b="1" dirty="0">
+                <a:effectLst/>
+                <a:latin typeface="Lexend" panose="020B0604020202020204" charset="-94"/>
+              </a:rPr>
+              <a:t>HTTP:  </a:t>
+            </a:r>
+            <a:r>
+              <a:rPr lang="en-US" sz="2000" dirty="0">
+                <a:latin typeface="Lexend" panose="020B0604020202020204" charset="-94"/>
+              </a:rPr>
+              <a:t>Create custom HTTP endpoints and Web APIs for your application.</a:t>
+            </a:r>
+          </a:p>
+          <a:p>
+            <a:pPr marL="342900" indent="-342900">
+              <a:buFont typeface="Arial" panose="020B0604020202020204" pitchFamily="34" charset="0"/>
+              <a:buChar char="•"/>
+            </a:pPr>
+            <a:r>
+              <a:rPr lang="en-US" sz="2000" b="1" dirty="0">
+                <a:effectLst/>
+                <a:latin typeface="Lexend" panose="020B0604020202020204" charset="-94"/>
+              </a:rPr>
+              <a:t>Handlers: </a:t>
+            </a:r>
+            <a:r>
+              <a:rPr lang="en-US" sz="2000" dirty="0">
+                <a:latin typeface="Lexend" panose="020B0604020202020204" charset="-94"/>
+              </a:rPr>
+              <a:t>Listen for distributed events and run custom logic when an event is published.</a:t>
+            </a:r>
+          </a:p>
+          <a:p>
+            <a:pPr marL="342900" indent="-342900">
+              <a:buFont typeface="Arial" panose="020B0604020202020204" pitchFamily="34" charset="0"/>
+              <a:buChar char="•"/>
+            </a:pPr>
+            <a:r>
+              <a:rPr lang="en-US" sz="2000" b="1" dirty="0">
+                <a:effectLst/>
+                <a:latin typeface="Lexend" panose="020B0604020202020204" charset="-94"/>
+              </a:rPr>
+              <a:t>Jobs: </a:t>
+            </a:r>
+            <a:r>
+              <a:rPr lang="en-US" sz="2000" dirty="0">
+                <a:effectLst/>
+                <a:latin typeface="Lexend" panose="020B0604020202020204" charset="-94"/>
+              </a:rPr>
+              <a:t>Background jobs…</a:t>
+            </a:r>
+            <a:r>
+              <a:rPr lang="en-US" sz="2000" b="1" dirty="0">
+                <a:effectLst/>
+                <a:latin typeface="Lexend" panose="020B0604020202020204" charset="-94"/>
+              </a:rPr>
+              <a:t> </a:t>
+            </a:r>
+            <a:r>
+              <a:rPr lang="en-US" sz="2000" dirty="0">
+                <a:latin typeface="Lexend" panose="020B0604020202020204" charset="-94"/>
+              </a:rPr>
+              <a:t>Run asynchronous tasks in the background, such as sending emails, generating reports, or processing data.</a:t>
+            </a:r>
+            <a:endParaRPr lang="en-US" sz="2000" b="1" dirty="0">
+              <a:effectLst/>
+              <a:latin typeface="Lexend" panose="020B0604020202020204" charset="-94"/>
+            </a:endParaRPr>
+          </a:p>
+          <a:p>
+            <a:pPr marL="342900" indent="-342900">
+              <a:buFont typeface="Arial" panose="020B0604020202020204" pitchFamily="34" charset="0"/>
+              <a:buChar char="•"/>
+            </a:pPr>
+            <a:r>
+              <a:rPr lang="en-US" sz="2000" b="1" dirty="0">
+                <a:effectLst/>
+                <a:latin typeface="Lexend" panose="020B0604020202020204" charset="-94"/>
+              </a:rPr>
+              <a:t>Workers: </a:t>
+            </a:r>
+            <a:r>
+              <a:rPr lang="en-US" sz="2000" dirty="0">
+                <a:latin typeface="Lexend" panose="020B0604020202020204" charset="-94"/>
+              </a:rPr>
+              <a:t>Background workers…Run recurring tasks automatically on a defined schedule or interval.</a:t>
+            </a:r>
+            <a:r>
+              <a:rPr lang="en-US" sz="1100" dirty="0">
+                <a:effectLst/>
+                <a:latin typeface="Lexend" panose="020B0604020202020204" charset="-94"/>
+              </a:rPr>
+              <a:t> </a:t>
+            </a:r>
+          </a:p>
+        </p:txBody>
+      </p:sp>
+      <p:sp>
+        <p:nvSpPr>
+          <p:cNvPr id="7" name="TextBox 6">
+            <a:extLst>
+              <a:ext uri="{FF2B5EF4-FFF2-40B4-BE49-F238E27FC236}">
+                <a16:creationId xmlns:a16="http://schemas.microsoft.com/office/drawing/2014/main" id="{32DF3960-71C6-D9B8-1FEE-32FB7BD8CE69}"/>
+              </a:ext>
+            </a:extLst>
+          </p:cNvPr>
+          <p:cNvSpPr txBox="1"/>
+          <p:nvPr/>
+        </p:nvSpPr>
+        <p:spPr>
+          <a:xfrm>
+            <a:off x="243972" y="2667271"/>
+            <a:ext cx="9676471" cy="3046988"/>
+          </a:xfrm>
+          <a:prstGeom prst="rect">
+            <a:avLst/>
+          </a:prstGeom>
+          <a:noFill/>
+        </p:spPr>
+        <p:txBody>
+          <a:bodyPr wrap="square">
+            <a:spAutoFit/>
+          </a:bodyPr>
+          <a:lstStyle/>
+          <a:p>
+            <a:pPr marL="0" marR="0">
+              <a:buNone/>
+            </a:pPr>
+            <a:r>
+              <a:rPr lang="en-US" sz="2800" b="1" dirty="0">
+                <a:effectLst/>
+                <a:latin typeface="Lexend" panose="020B0604020202020204" charset="-94"/>
+              </a:rPr>
+              <a:t>PAGES: </a:t>
+            </a:r>
+          </a:p>
+          <a:p>
+            <a:pPr marL="342900" indent="-342900">
+              <a:buFont typeface="Arial" panose="020B0604020202020204" pitchFamily="34" charset="0"/>
+              <a:buChar char="•"/>
+            </a:pPr>
+            <a:r>
+              <a:rPr lang="en-US" sz="2000" b="1" dirty="0">
+                <a:latin typeface="Lexend" panose="020B0604020202020204" charset="-94"/>
+              </a:rPr>
+              <a:t>Group </a:t>
+            </a:r>
+            <a:r>
+              <a:rPr lang="en-US" sz="2000" b="1" dirty="0">
+                <a:effectLst/>
+                <a:latin typeface="Lexend" panose="020B0604020202020204" charset="-94"/>
+              </a:rPr>
+              <a:t>: </a:t>
+            </a:r>
+            <a:r>
+              <a:rPr lang="en-US" sz="2000" dirty="0"/>
+              <a:t>Grouping features for navigation menu.</a:t>
+            </a:r>
+            <a:endParaRPr lang="en-US" sz="2000" b="1" dirty="0">
+              <a:effectLst/>
+              <a:latin typeface="Lexend" panose="020B0604020202020204" charset="-94"/>
+            </a:endParaRPr>
+          </a:p>
+          <a:p>
+            <a:pPr marL="342900" indent="-342900">
+              <a:buFont typeface="Arial" panose="020B0604020202020204" pitchFamily="34" charset="0"/>
+              <a:buChar char="•"/>
+            </a:pPr>
+            <a:r>
+              <a:rPr lang="en-US" sz="2000" b="1" dirty="0">
+                <a:latin typeface="Lexend" panose="020B0604020202020204" charset="-94"/>
+              </a:rPr>
+              <a:t>New: </a:t>
+            </a:r>
+            <a:r>
+              <a:rPr lang="en-US" sz="2000" dirty="0"/>
+              <a:t>Create a new standalone page. You can add multiple pages to the application.</a:t>
+            </a:r>
+            <a:endParaRPr lang="en-US" sz="2000" b="1" dirty="0">
+              <a:latin typeface="Lexend" panose="020B0604020202020204" charset="-94"/>
+            </a:endParaRPr>
+          </a:p>
+          <a:p>
+            <a:pPr marL="342900" indent="-342900">
+              <a:buFont typeface="Arial" panose="020B0604020202020204" pitchFamily="34" charset="0"/>
+              <a:buChar char="•"/>
+            </a:pPr>
+            <a:r>
+              <a:rPr lang="en-US" sz="2000" b="1" dirty="0">
+                <a:latin typeface="Lexend" panose="020B0604020202020204" charset="-94"/>
+              </a:rPr>
+              <a:t>Form: </a:t>
+            </a:r>
+            <a:r>
+              <a:rPr lang="en-US" sz="2000" dirty="0"/>
+              <a:t>Create forms for adding and updating entity records.</a:t>
+            </a:r>
+            <a:endParaRPr lang="en-US" sz="2000" b="1" dirty="0">
+              <a:latin typeface="Lexend" panose="020B0604020202020204" charset="-94"/>
+            </a:endParaRPr>
+          </a:p>
+          <a:p>
+            <a:pPr marL="342900" indent="-342900">
+              <a:buFont typeface="Arial" panose="020B0604020202020204" pitchFamily="34" charset="0"/>
+              <a:buChar char="•"/>
+            </a:pPr>
+            <a:r>
+              <a:rPr lang="en-US" sz="2000" b="1" dirty="0">
+                <a:latin typeface="Lexend" panose="020B0604020202020204" charset="-94"/>
+              </a:rPr>
+              <a:t>Permissions: </a:t>
+            </a:r>
+            <a:r>
+              <a:rPr lang="en-US" sz="2000" dirty="0"/>
+              <a:t>Control access to the page and the actions users can perform.</a:t>
+            </a:r>
+            <a:endParaRPr lang="en-US" sz="2000" b="1" dirty="0">
+              <a:latin typeface="Lexend" panose="020B0604020202020204" charset="-94"/>
+            </a:endParaRPr>
+          </a:p>
+          <a:p>
+            <a:pPr marL="342900" indent="-342900">
+              <a:buFont typeface="Arial" panose="020B0604020202020204" pitchFamily="34" charset="0"/>
+              <a:buChar char="•"/>
+            </a:pPr>
+            <a:r>
+              <a:rPr lang="en-US" sz="2000" b="1" dirty="0">
+                <a:latin typeface="Lexend" panose="020B0604020202020204" charset="-94"/>
+              </a:rPr>
+              <a:t>Health</a:t>
+            </a:r>
+            <a:r>
+              <a:rPr lang="en-US" sz="2400" b="1" dirty="0">
+                <a:latin typeface="Lexend" panose="020B0604020202020204" charset="-94"/>
+              </a:rPr>
+              <a:t>:</a:t>
+            </a:r>
+            <a:r>
+              <a:rPr lang="en-US" sz="2000" dirty="0"/>
+              <a:t> Find configuration and design issues in the Low-Code Designer. This is not an application runtime health check.</a:t>
+            </a:r>
+          </a:p>
+          <a:p>
+            <a:pPr marL="342900" indent="-342900">
+              <a:buFont typeface="Arial" panose="020B0604020202020204" pitchFamily="34" charset="0"/>
+              <a:buChar char="•"/>
+            </a:pPr>
+            <a:endParaRPr lang="en-US" sz="2000" b="1" dirty="0">
+              <a:latin typeface="Lexend" panose="020B0604020202020204" charset="-94"/>
+            </a:endParaRPr>
+          </a:p>
+        </p:txBody>
+      </p:sp>
+    </p:spTree>
+    <p:extLst>
+      <p:ext uri="{BB962C8B-B14F-4D97-AF65-F5344CB8AC3E}">
+        <p14:creationId xmlns:p14="http://schemas.microsoft.com/office/powerpoint/2010/main" val="1468254017"/>
+      </p:ext>
+    </p:extLst>
+  </p:cSld>
+  <p:clrMapOvr>
+    <a:masterClrMapping/>
+  </p:clrMapOvr>
+</p:sld>
+</file>
+
+<file path=ppt/slides/slide22.xml><?xml version="1.0" encoding="utf-8"?>
+<p:sld xmlns:a="http://schemas.openxmlformats.org/drawingml/2006/main" xmlns:r="http://schemas.openxmlformats.org/officeDocument/2006/relationships" xmlns:p="http://schemas.openxmlformats.org/presentationml/2006/main">
+  <p:cSld>
+    <p:spTree>
+      <p:nvGrpSpPr>
+        <p:cNvPr id="1" name="">
+          <a:extLst>
+            <a:ext uri="{FF2B5EF4-FFF2-40B4-BE49-F238E27FC236}">
+              <a16:creationId xmlns:a16="http://schemas.microsoft.com/office/drawing/2014/main" id="{BCAEDB66-569A-A9DD-667C-0F3FA70094BD}"/>
+            </a:ext>
+          </a:extLst>
+        </p:cNvPr>
+        <p:cNvGrpSpPr/>
+        <p:nvPr/>
+      </p:nvGrpSpPr>
+      <p:grpSpPr>
+        <a:xfrm>
+          <a:off x="0" y="0"/>
+          <a:ext cx="0" cy="0"/>
+          <a:chOff x="0" y="0"/>
+          <a:chExt cx="0" cy="0"/>
+        </a:xfrm>
+      </p:grpSpPr>
+      <p:sp>
+        <p:nvSpPr>
+          <p:cNvPr id="3" name="TextBox 2">
+            <a:extLst>
+              <a:ext uri="{FF2B5EF4-FFF2-40B4-BE49-F238E27FC236}">
+                <a16:creationId xmlns:a16="http://schemas.microsoft.com/office/drawing/2014/main" id="{8382E826-EE1C-B508-3928-FCE4C18BD51F}"/>
+              </a:ext>
+            </a:extLst>
+          </p:cNvPr>
+          <p:cNvSpPr txBox="1"/>
+          <p:nvPr/>
+        </p:nvSpPr>
+        <p:spPr>
+          <a:xfrm>
+            <a:off x="677193" y="2499739"/>
+            <a:ext cx="9676471" cy="1569660"/>
+          </a:xfrm>
+          <a:prstGeom prst="rect">
+            <a:avLst/>
+          </a:prstGeom>
+          <a:noFill/>
+        </p:spPr>
+        <p:txBody>
+          <a:bodyPr wrap="square">
+            <a:spAutoFit/>
+          </a:bodyPr>
+          <a:lstStyle/>
+          <a:p>
+            <a:pPr marL="0" marR="0">
+              <a:buNone/>
+            </a:pPr>
+            <a:r>
+              <a:rPr lang="en-US" sz="2800" b="1" dirty="0">
+                <a:effectLst/>
+                <a:latin typeface="Lexend" panose="020B0604020202020204" charset="-94"/>
+              </a:rPr>
+              <a:t>PERMISSIONS:</a:t>
+            </a:r>
+          </a:p>
+          <a:p>
+            <a:r>
+              <a:rPr lang="en-US" sz="2000" dirty="0"/>
+              <a:t>Create custom permissions to control access to pages and actions. Permissions can be organized under parent permissions.</a:t>
+            </a:r>
+          </a:p>
+          <a:p>
+            <a:pPr marL="0" marR="0">
+              <a:buNone/>
+            </a:pPr>
+            <a:endParaRPr lang="en-US" sz="2800" b="1" dirty="0">
+              <a:effectLst/>
+              <a:latin typeface="Lexend" panose="020B0604020202020204" charset="-94"/>
+            </a:endParaRPr>
+          </a:p>
+        </p:txBody>
+      </p:sp>
+      <p:sp>
+        <p:nvSpPr>
+          <p:cNvPr id="6" name="TextBox 5">
+            <a:extLst>
+              <a:ext uri="{FF2B5EF4-FFF2-40B4-BE49-F238E27FC236}">
+                <a16:creationId xmlns:a16="http://schemas.microsoft.com/office/drawing/2014/main" id="{80288C43-E5DC-EBAC-348D-C0E9B4D93AAB}"/>
+              </a:ext>
+            </a:extLst>
+          </p:cNvPr>
+          <p:cNvSpPr txBox="1"/>
+          <p:nvPr/>
+        </p:nvSpPr>
+        <p:spPr>
+          <a:xfrm>
+            <a:off x="677192" y="4069399"/>
+            <a:ext cx="9676471" cy="1138773"/>
+          </a:xfrm>
+          <a:prstGeom prst="rect">
+            <a:avLst/>
+          </a:prstGeom>
+          <a:noFill/>
+        </p:spPr>
+        <p:txBody>
+          <a:bodyPr wrap="square">
+            <a:spAutoFit/>
+          </a:bodyPr>
+          <a:lstStyle/>
+          <a:p>
+            <a:pPr marL="0" marR="0">
+              <a:buNone/>
+            </a:pPr>
+            <a:r>
+              <a:rPr lang="en-US" sz="2800" b="1" dirty="0">
+                <a:latin typeface="Lexend" panose="020B0604020202020204" charset="-94"/>
+              </a:rPr>
+              <a:t>HEALTH</a:t>
+            </a:r>
+            <a:r>
+              <a:rPr lang="en-US" sz="2800" b="1" dirty="0">
+                <a:effectLst/>
+                <a:latin typeface="Lexend" panose="020B0604020202020204" charset="-94"/>
+              </a:rPr>
+              <a:t>:</a:t>
+            </a:r>
+          </a:p>
+          <a:p>
+            <a:r>
+              <a:rPr lang="en-US" sz="2000" dirty="0"/>
+              <a:t>Checks the Low-Code model for broken references and configuration issues before they cause runtime errors.</a:t>
+            </a:r>
+            <a:endParaRPr lang="en-US" sz="2800" b="1" dirty="0">
+              <a:effectLst/>
+              <a:latin typeface="Lexend" panose="020B0604020202020204" charset="-94"/>
+            </a:endParaRPr>
+          </a:p>
+        </p:txBody>
+      </p:sp>
+      <p:sp>
+        <p:nvSpPr>
+          <p:cNvPr id="9" name="TextBox 8">
+            <a:extLst>
+              <a:ext uri="{FF2B5EF4-FFF2-40B4-BE49-F238E27FC236}">
+                <a16:creationId xmlns:a16="http://schemas.microsoft.com/office/drawing/2014/main" id="{4D333647-7250-D87F-750A-A0DBE4F2EE43}"/>
+              </a:ext>
+            </a:extLst>
+          </p:cNvPr>
+          <p:cNvSpPr txBox="1"/>
+          <p:nvPr/>
+        </p:nvSpPr>
+        <p:spPr>
+          <a:xfrm>
+            <a:off x="677192" y="791579"/>
+            <a:ext cx="9676471" cy="1138773"/>
+          </a:xfrm>
+          <a:prstGeom prst="rect">
+            <a:avLst/>
+          </a:prstGeom>
+          <a:noFill/>
+        </p:spPr>
+        <p:txBody>
+          <a:bodyPr wrap="square">
+            <a:spAutoFit/>
+          </a:bodyPr>
+          <a:lstStyle/>
+          <a:p>
+            <a:pPr marL="0" marR="0">
+              <a:buNone/>
+            </a:pPr>
+            <a:r>
+              <a:rPr lang="en-US" sz="2800" b="1" dirty="0">
+                <a:effectLst/>
+                <a:latin typeface="Lexend" panose="020B0604020202020204" charset="-94"/>
+              </a:rPr>
+              <a:t>FORMS: </a:t>
+            </a:r>
+          </a:p>
+          <a:p>
+            <a:r>
+              <a:rPr lang="en-US" sz="2000" dirty="0"/>
+              <a:t>Creates a form for an entity, automatically generating fields from its properties. Typically used for </a:t>
+            </a:r>
+            <a:r>
+              <a:rPr lang="en-US" sz="2000" b="1" dirty="0"/>
+              <a:t>Create</a:t>
+            </a:r>
+            <a:r>
+              <a:rPr lang="en-US" sz="2000" dirty="0"/>
+              <a:t> and </a:t>
+            </a:r>
+            <a:r>
+              <a:rPr lang="en-US" sz="2000" b="1" dirty="0"/>
+              <a:t>Update</a:t>
+            </a:r>
+            <a:r>
+              <a:rPr lang="en-US" sz="2000" dirty="0"/>
+              <a:t> operations.</a:t>
+            </a:r>
+            <a:endParaRPr lang="en-US" sz="1100" dirty="0">
+              <a:effectLst/>
+              <a:latin typeface="Lexend" panose="020B0604020202020204" charset="-94"/>
+            </a:endParaRPr>
+          </a:p>
+        </p:txBody>
+      </p:sp>
+    </p:spTree>
+    <p:extLst>
+      <p:ext uri="{BB962C8B-B14F-4D97-AF65-F5344CB8AC3E}">
+        <p14:creationId xmlns:p14="http://schemas.microsoft.com/office/powerpoint/2010/main" val="696302834"/>
       </p:ext>
     </p:extLst>
   </p:cSld>

--- a/abp-community-talks-2026.05.pptx
+++ b/abp-community-talks-2026.05.pptx
@@ -5,7 +5,7 @@
     <p:sldMasterId id="2147483648" r:id="rId1"/>
   </p:sldMasterIdLst>
   <p:notesMasterIdLst>
-    <p:notesMasterId r:id="rId24"/>
+    <p:notesMasterId r:id="rId25"/>
   </p:notesMasterIdLst>
   <p:sldIdLst>
     <p:sldId id="323" r:id="rId2"/>
@@ -26,34 +26,35 @@
     <p:sldId id="348" r:id="rId17"/>
     <p:sldId id="349" r:id="rId18"/>
     <p:sldId id="353" r:id="rId19"/>
-    <p:sldId id="354" r:id="rId20"/>
-    <p:sldId id="355" r:id="rId21"/>
-    <p:sldId id="351" r:id="rId22"/>
-    <p:sldId id="352" r:id="rId23"/>
+    <p:sldId id="355" r:id="rId20"/>
+    <p:sldId id="356" r:id="rId21"/>
+    <p:sldId id="354" r:id="rId22"/>
+    <p:sldId id="351" r:id="rId23"/>
+    <p:sldId id="352" r:id="rId24"/>
   </p:sldIdLst>
   <p:sldSz cx="12192000" cy="6858000"/>
   <p:notesSz cx="6858000" cy="9144000"/>
   <p:embeddedFontLst>
     <p:embeddedFont>
       <p:font typeface="Lexend" panose="020B0604020202020204" charset="-94"/>
-      <p:regular r:id="rId25"/>
-      <p:bold r:id="rId26"/>
+      <p:regular r:id="rId26"/>
+      <p:bold r:id="rId27"/>
     </p:embeddedFont>
     <p:embeddedFont>
       <p:font typeface="Lexend Light" panose="020B0604020202020204" charset="-94"/>
-      <p:regular r:id="rId27"/>
+      <p:regular r:id="rId28"/>
     </p:embeddedFont>
     <p:embeddedFont>
       <p:font typeface="Play" panose="020B0604020202020204" charset="0"/>
-      <p:regular r:id="rId28"/>
-      <p:bold r:id="rId29"/>
+      <p:regular r:id="rId29"/>
+      <p:bold r:id="rId30"/>
     </p:embeddedFont>
     <p:embeddedFont>
       <p:font typeface="Poppins" panose="00000500000000000000" pitchFamily="2" charset="-94"/>
-      <p:regular r:id="rId30"/>
-      <p:bold r:id="rId31"/>
-      <p:italic r:id="rId32"/>
-      <p:boldItalic r:id="rId33"/>
+      <p:regular r:id="rId31"/>
+      <p:bold r:id="rId32"/>
+      <p:italic r:id="rId33"/>
+      <p:boldItalic r:id="rId34"/>
     </p:embeddedFont>
   </p:embeddedFontLst>
   <p:defaultTextStyle>
@@ -312,8 +313,9 @@
           <p14:sldIdLst>
             <p14:sldId id="349"/>
             <p14:sldId id="353"/>
+            <p14:sldId id="355"/>
+            <p14:sldId id="356"/>
             <p14:sldId id="354"/>
-            <p14:sldId id="355"/>
             <p14:sldId id="351"/>
             <p14:sldId id="352"/>
           </p14:sldIdLst>
@@ -3165,7 +3167,7 @@
                 <a:cs typeface="Arial"/>
                 <a:sym typeface="Arial"/>
               </a:rPr>
-              <a:t>19</a:t>
+              <a:t>21</a:t>
             </a:fld>
             <a:endParaRPr lang="tr-TR" sz="1200" b="0" i="0" u="none" strike="noStrike" cap="none" dirty="0">
               <a:solidFill>
@@ -23087,14 +23089,51 @@
         </p:blipFill>
         <p:spPr>
           <a:xfrm>
-            <a:off x="7215187" y="0"/>
-            <a:ext cx="4816979" cy="3895827"/>
+            <a:off x="7077812" y="510955"/>
+            <a:ext cx="5021262" cy="4061045"/>
           </a:xfrm>
           <a:prstGeom prst="rect">
             <a:avLst/>
           </a:prstGeom>
         </p:spPr>
       </p:pic>
+      <p:sp>
+        <p:nvSpPr>
+          <p:cNvPr id="2" name="TextBox 1">
+            <a:extLst>
+              <a:ext uri="{FF2B5EF4-FFF2-40B4-BE49-F238E27FC236}">
+                <a16:creationId xmlns:a16="http://schemas.microsoft.com/office/drawing/2014/main" id="{86A04204-184B-C5B3-898B-5B4B8EEE294B}"/>
+              </a:ext>
+            </a:extLst>
+          </p:cNvPr>
+          <p:cNvSpPr txBox="1"/>
+          <p:nvPr/>
+        </p:nvSpPr>
+        <p:spPr>
+          <a:xfrm>
+            <a:off x="8820963" y="110845"/>
+            <a:ext cx="2821259" cy="400110"/>
+          </a:xfrm>
+          <a:prstGeom prst="rect">
+            <a:avLst/>
+          </a:prstGeom>
+          <a:noFill/>
+        </p:spPr>
+        <p:txBody>
+          <a:bodyPr wrap="square" rtlCol="0">
+            <a:spAutoFit/>
+          </a:bodyPr>
+          <a:lstStyle/>
+          <a:p>
+            <a:r>
+              <a:rPr lang="en-US" sz="2000" b="1" dirty="0">
+                <a:latin typeface="Lexend" panose="020B0604020202020204" charset="-94"/>
+              </a:rPr>
+              <a:t>CUSTOMER</a:t>
+            </a:r>
+          </a:p>
+        </p:txBody>
+      </p:sp>
     </p:spTree>
     <p:extLst>
       <p:ext uri="{BB962C8B-B14F-4D97-AF65-F5344CB8AC3E}">
@@ -23113,13 +23152,7 @@
   <p:cSld>
     <p:spTree>
       <p:nvGrpSpPr>
-        <p:cNvPr id="1" name="">
-          <a:extLst>
-            <a:ext uri="{FF2B5EF4-FFF2-40B4-BE49-F238E27FC236}">
-              <a16:creationId xmlns:a16="http://schemas.microsoft.com/office/drawing/2014/main" id="{059B0B09-FA7C-8CDC-7502-5B7760059877}"/>
-            </a:ext>
-          </a:extLst>
-        </p:cNvPr>
+        <p:cNvPr id="1" name=""/>
         <p:cNvGrpSpPr/>
         <p:nvPr/>
       </p:nvGrpSpPr>
@@ -23136,7 +23169,7 @@
           <p:cNvPr id="3" name="Picture 2">
             <a:extLst>
               <a:ext uri="{FF2B5EF4-FFF2-40B4-BE49-F238E27FC236}">
-                <a16:creationId xmlns:a16="http://schemas.microsoft.com/office/drawing/2014/main" id="{5A5741E7-53D9-B0B5-3EA7-76E849F70FAF}"/>
+                <a16:creationId xmlns:a16="http://schemas.microsoft.com/office/drawing/2014/main" id="{1E94034C-B036-064E-BF46-72916D1B3362}"/>
               </a:ext>
             </a:extLst>
           </p:cNvPr>
@@ -23146,25 +23179,62 @@
           <p:nvPr/>
         </p:nvPicPr>
         <p:blipFill>
-          <a:blip r:embed="rId3"/>
+          <a:blip r:embed="rId2"/>
           <a:stretch>
             <a:fillRect/>
           </a:stretch>
         </p:blipFill>
         <p:spPr>
           <a:xfrm>
-            <a:off x="349445" y="624468"/>
-            <a:ext cx="11493110" cy="5402649"/>
+            <a:off x="356839" y="667840"/>
+            <a:ext cx="11478322" cy="5351380"/>
           </a:xfrm>
           <a:prstGeom prst="rect">
             <a:avLst/>
           </a:prstGeom>
         </p:spPr>
       </p:pic>
+      <p:sp>
+        <p:nvSpPr>
+          <p:cNvPr id="4" name="TextBox 3">
+            <a:extLst>
+              <a:ext uri="{FF2B5EF4-FFF2-40B4-BE49-F238E27FC236}">
+                <a16:creationId xmlns:a16="http://schemas.microsoft.com/office/drawing/2014/main" id="{8AE0BAED-163A-0CC4-3A0E-EECE8094485E}"/>
+              </a:ext>
+            </a:extLst>
+          </p:cNvPr>
+          <p:cNvSpPr txBox="1"/>
+          <p:nvPr/>
+        </p:nvSpPr>
+        <p:spPr>
+          <a:xfrm>
+            <a:off x="356839" y="200823"/>
+            <a:ext cx="2821259" cy="400110"/>
+          </a:xfrm>
+          <a:prstGeom prst="rect">
+            <a:avLst/>
+          </a:prstGeom>
+          <a:noFill/>
+        </p:spPr>
+        <p:txBody>
+          <a:bodyPr wrap="square" rtlCol="0">
+            <a:spAutoFit/>
+          </a:bodyPr>
+          <a:lstStyle/>
+          <a:p>
+            <a:r>
+              <a:rPr lang="en-US" sz="2000" b="1" dirty="0">
+                <a:latin typeface="Lexend" panose="020B0604020202020204" charset="-94"/>
+              </a:rPr>
+              <a:t>ROOM</a:t>
+            </a:r>
+          </a:p>
+        </p:txBody>
+      </p:sp>
     </p:spTree>
     <p:extLst>
       <p:ext uri="{BB962C8B-B14F-4D97-AF65-F5344CB8AC3E}">
-        <p14:creationId xmlns:p14="http://schemas.microsoft.com/office/powerpoint/2010/main" val="2573109293"/>
+        <p14:creationId xmlns:p14="http://schemas.microsoft.com/office/powerpoint/2010/main" val="279582981"/>
       </p:ext>
     </p:extLst>
   </p:cSld>
@@ -23505,7 +23575,7 @@
           <p:cNvPr id="3" name="Picture 2">
             <a:extLst>
               <a:ext uri="{FF2B5EF4-FFF2-40B4-BE49-F238E27FC236}">
-                <a16:creationId xmlns:a16="http://schemas.microsoft.com/office/drawing/2014/main" id="{1E94034C-B036-064E-BF46-72916D1B3362}"/>
+                <a16:creationId xmlns:a16="http://schemas.microsoft.com/office/drawing/2014/main" id="{F9F193F7-3B1A-0249-E72E-74E736B2F4D3}"/>
               </a:ext>
             </a:extLst>
           </p:cNvPr>
@@ -23522,18 +23592,165 @@
         </p:blipFill>
         <p:spPr>
           <a:xfrm>
-            <a:off x="356839" y="667840"/>
-            <a:ext cx="11478322" cy="5351380"/>
+            <a:off x="-1" y="0"/>
+            <a:ext cx="6445529" cy="2977376"/>
           </a:xfrm>
           <a:prstGeom prst="rect">
             <a:avLst/>
           </a:prstGeom>
         </p:spPr>
       </p:pic>
+      <p:pic>
+        <p:nvPicPr>
+          <p:cNvPr id="5" name="Picture 4">
+            <a:extLst>
+              <a:ext uri="{FF2B5EF4-FFF2-40B4-BE49-F238E27FC236}">
+                <a16:creationId xmlns:a16="http://schemas.microsoft.com/office/drawing/2014/main" id="{6F8BB956-22CF-0552-2FE5-5CC248BCB663}"/>
+              </a:ext>
+            </a:extLst>
+          </p:cNvPr>
+          <p:cNvPicPr>
+            <a:picLocks noChangeAspect="1"/>
+          </p:cNvPicPr>
+          <p:nvPr/>
+        </p:nvPicPr>
+        <p:blipFill>
+          <a:blip r:embed="rId3"/>
+          <a:stretch>
+            <a:fillRect/>
+          </a:stretch>
+        </p:blipFill>
+        <p:spPr>
+          <a:xfrm>
+            <a:off x="4797653" y="2678325"/>
+            <a:ext cx="7394347" cy="4179675"/>
+          </a:xfrm>
+          <a:prstGeom prst="rect">
+            <a:avLst/>
+          </a:prstGeom>
+        </p:spPr>
+      </p:pic>
+      <p:sp>
+        <p:nvSpPr>
+          <p:cNvPr id="4" name="TextBox 3">
+            <a:extLst>
+              <a:ext uri="{FF2B5EF4-FFF2-40B4-BE49-F238E27FC236}">
+                <a16:creationId xmlns:a16="http://schemas.microsoft.com/office/drawing/2014/main" id="{B815DBE6-6DC0-CE9B-DC03-09C42581BDA9}"/>
+              </a:ext>
+            </a:extLst>
+          </p:cNvPr>
+          <p:cNvSpPr txBox="1"/>
+          <p:nvPr/>
+        </p:nvSpPr>
+        <p:spPr>
+          <a:xfrm>
+            <a:off x="8296856" y="99693"/>
+            <a:ext cx="2821259" cy="400110"/>
+          </a:xfrm>
+          <a:prstGeom prst="rect">
+            <a:avLst/>
+          </a:prstGeom>
+          <a:noFill/>
+        </p:spPr>
+        <p:txBody>
+          <a:bodyPr wrap="square" rtlCol="0">
+            <a:spAutoFit/>
+          </a:bodyPr>
+          <a:lstStyle/>
+          <a:p>
+            <a:r>
+              <a:rPr lang="en-US" sz="2000" b="1" dirty="0">
+                <a:latin typeface="Lexend" panose="020B0604020202020204" charset="-94"/>
+              </a:rPr>
+              <a:t>ROOM GALLERY</a:t>
+            </a:r>
+          </a:p>
+        </p:txBody>
+      </p:sp>
+      <p:sp>
+        <p:nvSpPr>
+          <p:cNvPr id="7" name="TextBox 6">
+            <a:extLst>
+              <a:ext uri="{FF2B5EF4-FFF2-40B4-BE49-F238E27FC236}">
+                <a16:creationId xmlns:a16="http://schemas.microsoft.com/office/drawing/2014/main" id="{E92EE732-9352-BD75-B744-2E79F8E368BD}"/>
+              </a:ext>
+            </a:extLst>
+          </p:cNvPr>
+          <p:cNvSpPr txBox="1"/>
+          <p:nvPr/>
+        </p:nvSpPr>
+        <p:spPr>
+          <a:xfrm>
+            <a:off x="5553656" y="6258446"/>
+            <a:ext cx="542344" cy="400110"/>
+          </a:xfrm>
+          <a:prstGeom prst="rect">
+            <a:avLst/>
+          </a:prstGeom>
+          <a:noFill/>
+        </p:spPr>
+        <p:txBody>
+          <a:bodyPr wrap="square" rtlCol="0">
+            <a:spAutoFit/>
+          </a:bodyPr>
+          <a:lstStyle/>
+          <a:p>
+            <a:r>
+              <a:rPr lang="en-US" sz="2000" b="1" dirty="0">
+                <a:solidFill>
+                  <a:srgbClr val="FF0000"/>
+                </a:solidFill>
+                <a:latin typeface="Lexend" panose="020B0604020202020204" charset="-94"/>
+              </a:rPr>
+              <a:t>(2)</a:t>
+            </a:r>
+          </a:p>
+        </p:txBody>
+      </p:sp>
+      <p:sp>
+        <p:nvSpPr>
+          <p:cNvPr id="9" name="TextBox 8">
+            <a:extLst>
+              <a:ext uri="{FF2B5EF4-FFF2-40B4-BE49-F238E27FC236}">
+                <a16:creationId xmlns:a16="http://schemas.microsoft.com/office/drawing/2014/main" id="{74E3B68D-15C5-5996-105D-2E9458233FAA}"/>
+              </a:ext>
+            </a:extLst>
+          </p:cNvPr>
+          <p:cNvSpPr txBox="1"/>
+          <p:nvPr/>
+        </p:nvSpPr>
+        <p:spPr>
+          <a:xfrm>
+            <a:off x="237586" y="2538093"/>
+            <a:ext cx="542344" cy="400110"/>
+          </a:xfrm>
+          <a:prstGeom prst="rect">
+            <a:avLst/>
+          </a:prstGeom>
+          <a:noFill/>
+        </p:spPr>
+        <p:txBody>
+          <a:bodyPr wrap="square" rtlCol="0">
+            <a:spAutoFit/>
+          </a:bodyPr>
+          <a:lstStyle/>
+          <a:p>
+            <a:r>
+              <a:rPr lang="en-US" sz="2000" b="1" dirty="0">
+                <a:solidFill>
+                  <a:srgbClr val="FF0000"/>
+                </a:solidFill>
+                <a:latin typeface="Lexend" panose="020B0604020202020204" charset="-94"/>
+              </a:rPr>
+              <a:t>(1)</a:t>
+            </a:r>
+          </a:p>
+        </p:txBody>
+      </p:sp>
     </p:spTree>
     <p:extLst>
       <p:ext uri="{BB962C8B-B14F-4D97-AF65-F5344CB8AC3E}">
-        <p14:creationId xmlns:p14="http://schemas.microsoft.com/office/powerpoint/2010/main" val="279582981"/>
+        <p14:creationId xmlns:p14="http://schemas.microsoft.com/office/powerpoint/2010/main" val="462823634"/>
       </p:ext>
     </p:extLst>
   </p:cSld>
@@ -23544,6 +23761,109 @@
 </file>
 
 <file path=ppt/slides/slide21.xml><?xml version="1.0" encoding="utf-8"?>
+<p:sld xmlns:a="http://schemas.openxmlformats.org/drawingml/2006/main" xmlns:r="http://schemas.openxmlformats.org/officeDocument/2006/relationships" xmlns:p="http://schemas.openxmlformats.org/presentationml/2006/main">
+  <p:cSld>
+    <p:spTree>
+      <p:nvGrpSpPr>
+        <p:cNvPr id="1" name="">
+          <a:extLst>
+            <a:ext uri="{FF2B5EF4-FFF2-40B4-BE49-F238E27FC236}">
+              <a16:creationId xmlns:a16="http://schemas.microsoft.com/office/drawing/2014/main" id="{059B0B09-FA7C-8CDC-7502-5B7760059877}"/>
+            </a:ext>
+          </a:extLst>
+        </p:cNvPr>
+        <p:cNvGrpSpPr/>
+        <p:nvPr/>
+      </p:nvGrpSpPr>
+      <p:grpSpPr>
+        <a:xfrm>
+          <a:off x="0" y="0"/>
+          <a:ext cx="0" cy="0"/>
+          <a:chOff x="0" y="0"/>
+          <a:chExt cx="0" cy="0"/>
+        </a:xfrm>
+      </p:grpSpPr>
+      <p:sp>
+        <p:nvSpPr>
+          <p:cNvPr id="4" name="TextBox 3">
+            <a:extLst>
+              <a:ext uri="{FF2B5EF4-FFF2-40B4-BE49-F238E27FC236}">
+                <a16:creationId xmlns:a16="http://schemas.microsoft.com/office/drawing/2014/main" id="{B427DAB5-0A64-30F8-1201-FAA6B348956D}"/>
+              </a:ext>
+            </a:extLst>
+          </p:cNvPr>
+          <p:cNvSpPr txBox="1"/>
+          <p:nvPr/>
+        </p:nvSpPr>
+        <p:spPr>
+          <a:xfrm>
+            <a:off x="349445" y="144298"/>
+            <a:ext cx="2821259" cy="400110"/>
+          </a:xfrm>
+          <a:prstGeom prst="rect">
+            <a:avLst/>
+          </a:prstGeom>
+          <a:noFill/>
+        </p:spPr>
+        <p:txBody>
+          <a:bodyPr wrap="square" rtlCol="0">
+            <a:spAutoFit/>
+          </a:bodyPr>
+          <a:lstStyle/>
+          <a:p>
+            <a:r>
+              <a:rPr lang="en-US" sz="2000" b="1" dirty="0">
+                <a:latin typeface="Lexend" panose="020B0604020202020204" charset="-94"/>
+              </a:rPr>
+              <a:t>RESERVATION</a:t>
+            </a:r>
+          </a:p>
+        </p:txBody>
+      </p:sp>
+      <p:pic>
+        <p:nvPicPr>
+          <p:cNvPr id="6" name="Picture 5">
+            <a:extLst>
+              <a:ext uri="{FF2B5EF4-FFF2-40B4-BE49-F238E27FC236}">
+                <a16:creationId xmlns:a16="http://schemas.microsoft.com/office/drawing/2014/main" id="{A3C2A60B-9383-8242-AC35-A3BE0E2DF41D}"/>
+              </a:ext>
+            </a:extLst>
+          </p:cNvPr>
+          <p:cNvPicPr>
+            <a:picLocks noChangeAspect="1"/>
+          </p:cNvPicPr>
+          <p:nvPr/>
+        </p:nvPicPr>
+        <p:blipFill>
+          <a:blip r:embed="rId3"/>
+          <a:stretch>
+            <a:fillRect/>
+          </a:stretch>
+        </p:blipFill>
+        <p:spPr>
+          <a:xfrm>
+            <a:off x="473728" y="774327"/>
+            <a:ext cx="9648825" cy="4610100"/>
+          </a:xfrm>
+          <a:prstGeom prst="rect">
+            <a:avLst/>
+          </a:prstGeom>
+        </p:spPr>
+      </p:pic>
+    </p:spTree>
+    <p:extLst>
+      <p:ext uri="{BB962C8B-B14F-4D97-AF65-F5344CB8AC3E}">
+        <p14:creationId xmlns:p14="http://schemas.microsoft.com/office/powerpoint/2010/main" val="2573109293"/>
+      </p:ext>
+    </p:extLst>
+  </p:cSld>
+  <p:clrMapOvr>
+    <a:masterClrMapping/>
+  </p:clrMapOvr>
+</p:sld>
+</file>
+
+<file path=ppt/slides/slide22.xml><?xml version="1.0" encoding="utf-8"?>
 <p:sld xmlns:a="http://schemas.openxmlformats.org/drawingml/2006/main" xmlns:r="http://schemas.openxmlformats.org/officeDocument/2006/relationships" xmlns:p="http://schemas.openxmlformats.org/presentationml/2006/main">
   <p:cSld>
     <p:spTree>
@@ -23871,7 +24191,7 @@
 </p:sld>
 </file>
 
-<file path=ppt/slides/slide22.xml><?xml version="1.0" encoding="utf-8"?>
+<file path=ppt/slides/slide23.xml><?xml version="1.0" encoding="utf-8"?>
 <p:sld xmlns:a="http://schemas.openxmlformats.org/drawingml/2006/main" xmlns:r="http://schemas.openxmlformats.org/officeDocument/2006/relationships" xmlns:p="http://schemas.openxmlformats.org/presentationml/2006/main">
   <p:cSld>
     <p:spTree>

--- a/abp-community-talks-2026.05.pptx
+++ b/abp-community-talks-2026.05.pptx
@@ -5,7 +5,7 @@
     <p:sldMasterId id="2147483648" r:id="rId1"/>
   </p:sldMasterIdLst>
   <p:notesMasterIdLst>
-    <p:notesMasterId r:id="rId25"/>
+    <p:notesMasterId r:id="rId26"/>
   </p:notesMasterIdLst>
   <p:sldIdLst>
     <p:sldId id="323" r:id="rId2"/>
@@ -29,32 +29,33 @@
     <p:sldId id="355" r:id="rId20"/>
     <p:sldId id="356" r:id="rId21"/>
     <p:sldId id="354" r:id="rId22"/>
-    <p:sldId id="351" r:id="rId23"/>
-    <p:sldId id="352" r:id="rId24"/>
+    <p:sldId id="358" r:id="rId23"/>
+    <p:sldId id="351" r:id="rId24"/>
+    <p:sldId id="352" r:id="rId25"/>
   </p:sldIdLst>
   <p:sldSz cx="12192000" cy="6858000"/>
   <p:notesSz cx="6858000" cy="9144000"/>
   <p:embeddedFontLst>
     <p:embeddedFont>
       <p:font typeface="Lexend" panose="020B0604020202020204" charset="-94"/>
-      <p:regular r:id="rId26"/>
-      <p:bold r:id="rId27"/>
+      <p:regular r:id="rId27"/>
+      <p:bold r:id="rId28"/>
     </p:embeddedFont>
     <p:embeddedFont>
       <p:font typeface="Lexend Light" panose="020B0604020202020204" charset="-94"/>
-      <p:regular r:id="rId28"/>
+      <p:regular r:id="rId29"/>
     </p:embeddedFont>
     <p:embeddedFont>
       <p:font typeface="Play" panose="020B0604020202020204" charset="0"/>
-      <p:regular r:id="rId29"/>
-      <p:bold r:id="rId30"/>
+      <p:regular r:id="rId30"/>
+      <p:bold r:id="rId31"/>
     </p:embeddedFont>
     <p:embeddedFont>
       <p:font typeface="Poppins" panose="00000500000000000000" pitchFamily="2" charset="-94"/>
-      <p:regular r:id="rId31"/>
-      <p:bold r:id="rId32"/>
-      <p:italic r:id="rId33"/>
-      <p:boldItalic r:id="rId34"/>
+      <p:regular r:id="rId32"/>
+      <p:bold r:id="rId33"/>
+      <p:italic r:id="rId34"/>
+      <p:boldItalic r:id="rId35"/>
     </p:embeddedFont>
   </p:embeddedFontLst>
   <p:defaultTextStyle>
@@ -316,6 +317,7 @@
             <p14:sldId id="355"/>
             <p14:sldId id="356"/>
             <p14:sldId id="354"/>
+            <p14:sldId id="358"/>
             <p14:sldId id="351"/>
             <p14:sldId id="352"/>
           </p14:sldIdLst>
@@ -326,7 +328,7 @@
       <p15:sldGuideLst xmlns:p15="http://schemas.microsoft.com/office/powerpoint/2012/main"/>
     </p:ext>
     <p:ext uri="GoogleSlidesCustomDataVersion2">
-      <go:slidesCustomData xmlns="" xmlns:mc="http://schemas.openxmlformats.org/markup-compatibility/2006" xmlns:mv="urn:schemas-microsoft-com:mac:vml" xmlns:c="http://schemas.openxmlformats.org/drawingml/2006/chart" xmlns:dgm="http://schemas.openxmlformats.org/drawingml/2006/diagram" xmlns:o="urn:schemas-microsoft-com:office:office" xmlns:v="urn:schemas-microsoft-com:vml" xmlns:pvml="urn:schemas-microsoft-com:office:powerpoint" xmlns:com="http://schemas.openxmlformats.org/drawingml/2006/compatibility" xmlns:p14="http://schemas.microsoft.com/office/powerpoint/2010/main" xmlns:p15="http://schemas.microsoft.com/office/powerpoint/2012/main" xmlns:ahyp="http://schemas.microsoft.com/office/drawing/2018/hyperlinkcolor" xmlns:go="http://customooxmlschemas.google.com/" r:id="rId48" roundtripDataSignature="AMtx7mihNSh0nE7P5bmNZynwZ07PSv3TUg=="/>
+      <go:slidesCustomData xmlns:go="http://customooxmlschemas.google.com/" xmlns:ahyp="http://schemas.microsoft.com/office/drawing/2018/hyperlinkcolor" xmlns:p15="http://schemas.microsoft.com/office/powerpoint/2012/main" xmlns:p14="http://schemas.microsoft.com/office/powerpoint/2010/main" xmlns:com="http://schemas.openxmlformats.org/drawingml/2006/compatibility" xmlns:pvml="urn:schemas-microsoft-com:office:powerpoint" xmlns:v="urn:schemas-microsoft-com:vml" xmlns:o="urn:schemas-microsoft-com:office:office" xmlns:dgm="http://schemas.openxmlformats.org/drawingml/2006/diagram" xmlns:c="http://schemas.openxmlformats.org/drawingml/2006/chart" xmlns:mv="urn:schemas-microsoft-com:mac:vml" xmlns:mc="http://schemas.openxmlformats.org/markup-compatibility/2006" xmlns="" r:id="rId48" roundtripDataSignature="AMtx7mihNSh0nE7P5bmNZynwZ07PSv3TUg=="/>
     </p:ext>
   </p:extLst>
 </p:presentation>
@@ -3194,6 +3196,830 @@
 </p:notes>
 </file>
 
+<file path=ppt/notesSlides/notesSlide19.xml><?xml version="1.0" encoding="utf-8"?>
+<p:notes xmlns:a="http://schemas.openxmlformats.org/drawingml/2006/main" xmlns:r="http://schemas.openxmlformats.org/officeDocument/2006/relationships" xmlns:p="http://schemas.openxmlformats.org/presentationml/2006/main">
+  <p:cSld>
+    <p:spTree>
+      <p:nvGrpSpPr>
+        <p:cNvPr id="1" name="">
+          <a:extLst>
+            <a:ext uri="{FF2B5EF4-FFF2-40B4-BE49-F238E27FC236}">
+              <a16:creationId xmlns:a16="http://schemas.microsoft.com/office/drawing/2014/main" id="{CC4C9F87-3E21-3671-5FDB-AFE2BE069391}"/>
+            </a:ext>
+          </a:extLst>
+        </p:cNvPr>
+        <p:cNvGrpSpPr/>
+        <p:nvPr/>
+      </p:nvGrpSpPr>
+      <p:grpSpPr>
+        <a:xfrm>
+          <a:off x="0" y="0"/>
+          <a:ext cx="0" cy="0"/>
+          <a:chOff x="0" y="0"/>
+          <a:chExt cx="0" cy="0"/>
+        </a:xfrm>
+      </p:grpSpPr>
+      <p:sp>
+        <p:nvSpPr>
+          <p:cNvPr id="2" name="Slide Image Placeholder 1">
+            <a:extLst>
+              <a:ext uri="{FF2B5EF4-FFF2-40B4-BE49-F238E27FC236}">
+                <a16:creationId xmlns:a16="http://schemas.microsoft.com/office/drawing/2014/main" id="{0DA31767-9ECB-A6EC-F1D2-E66704E0E76F}"/>
+              </a:ext>
+            </a:extLst>
+          </p:cNvPr>
+          <p:cNvSpPr>
+            <a:spLocks noGrp="1" noRot="1" noChangeAspect="1"/>
+          </p:cNvSpPr>
+          <p:nvPr>
+            <p:ph type="sldImg"/>
+          </p:nvPr>
+        </p:nvSpPr>
+        <p:spPr/>
+      </p:sp>
+      <p:sp>
+        <p:nvSpPr>
+          <p:cNvPr id="3" name="Notes Placeholder 2">
+            <a:extLst>
+              <a:ext uri="{FF2B5EF4-FFF2-40B4-BE49-F238E27FC236}">
+                <a16:creationId xmlns:a16="http://schemas.microsoft.com/office/drawing/2014/main" id="{AE389C61-8990-0396-7F27-12C7FC9273B1}"/>
+              </a:ext>
+            </a:extLst>
+          </p:cNvPr>
+          <p:cNvSpPr>
+            <a:spLocks noGrp="1"/>
+          </p:cNvSpPr>
+          <p:nvPr>
+            <p:ph type="body" idx="1"/>
+          </p:nvPr>
+        </p:nvSpPr>
+        <p:spPr/>
+        <p:txBody>
+          <a:bodyPr/>
+          <a:lstStyle/>
+          <a:p>
+            <a:pPr marL="457200" marR="0" lvl="0" indent="-228600" algn="l" defTabSz="914400" rtl="0" eaLnBrk="1" fontAlgn="auto" latinLnBrk="0" hangingPunct="1">
+              <a:lnSpc>
+                <a:spcPct val="100000"/>
+              </a:lnSpc>
+              <a:spcBef>
+                <a:spcPts val="0"/>
+              </a:spcBef>
+              <a:spcAft>
+                <a:spcPts val="0"/>
+              </a:spcAft>
+              <a:buClr>
+                <a:srgbClr val="000000"/>
+              </a:buClr>
+              <a:buSzPts val="1400"/>
+              <a:buFont typeface="Arial"/>
+              <a:buNone/>
+              <a:tabLst/>
+              <a:defRPr/>
+            </a:pPr>
+            <a:r>
+              <a:rPr lang="en-US" sz="1200" b="0" i="0" u="none" strike="noStrike" cap="none" dirty="0">
+                <a:solidFill>
+                  <a:schemeClr val="dk1"/>
+                </a:solidFill>
+                <a:effectLst/>
+                <a:latin typeface="Arial"/>
+                <a:ea typeface="Arial"/>
+                <a:cs typeface="Arial"/>
+                <a:sym typeface="Arial"/>
+              </a:rPr>
+              <a:t>await </a:t>
+            </a:r>
+            <a:r>
+              <a:rPr lang="en-US" sz="1200" b="0" i="0" u="none" strike="noStrike" cap="none" dirty="0" err="1">
+                <a:solidFill>
+                  <a:schemeClr val="dk1"/>
+                </a:solidFill>
+                <a:effectLst/>
+                <a:latin typeface="Arial"/>
+                <a:ea typeface="Arial"/>
+                <a:cs typeface="Arial"/>
+                <a:sym typeface="Arial"/>
+              </a:rPr>
+              <a:t>http.postAsync</a:t>
+            </a:r>
+            <a:r>
+              <a:rPr lang="en-US" sz="1200" b="0" i="0" u="none" strike="noStrike" cap="none" dirty="0">
+                <a:solidFill>
+                  <a:schemeClr val="dk1"/>
+                </a:solidFill>
+                <a:effectLst/>
+                <a:latin typeface="Arial"/>
+                <a:ea typeface="Arial"/>
+                <a:cs typeface="Arial"/>
+                <a:sym typeface="Arial"/>
+              </a:rPr>
+              <a:t>(" https://webhook.site/f39fa556-4629-4ea7-bdb3-6698dc60a334", </a:t>
+            </a:r>
+            <a:r>
+              <a:rPr lang="en-US" sz="1200" b="0" i="0" u="none" strike="noStrike" cap="none" dirty="0" err="1">
+                <a:solidFill>
+                  <a:schemeClr val="dk1"/>
+                </a:solidFill>
+                <a:effectLst/>
+                <a:latin typeface="Arial"/>
+                <a:ea typeface="Arial"/>
+                <a:cs typeface="Arial"/>
+                <a:sym typeface="Arial"/>
+              </a:rPr>
+              <a:t>args.data</a:t>
+            </a:r>
+            <a:r>
+              <a:rPr lang="en-US" sz="1200" b="0" i="0" u="none" strike="noStrike" cap="none" dirty="0">
+                <a:solidFill>
+                  <a:schemeClr val="dk1"/>
+                </a:solidFill>
+                <a:effectLst/>
+                <a:latin typeface="Arial"/>
+                <a:ea typeface="Arial"/>
+                <a:cs typeface="Arial"/>
+                <a:sym typeface="Arial"/>
+              </a:rPr>
+              <a:t>);</a:t>
+            </a:r>
+          </a:p>
+          <a:p>
+            <a:pPr marL="457200" marR="0" lvl="0" indent="-228600" algn="l" defTabSz="914400" rtl="0" eaLnBrk="1" fontAlgn="auto" latinLnBrk="0" hangingPunct="1">
+              <a:lnSpc>
+                <a:spcPct val="100000"/>
+              </a:lnSpc>
+              <a:spcBef>
+                <a:spcPts val="0"/>
+              </a:spcBef>
+              <a:spcAft>
+                <a:spcPts val="0"/>
+              </a:spcAft>
+              <a:buClr>
+                <a:srgbClr val="000000"/>
+              </a:buClr>
+              <a:buSzPts val="1400"/>
+              <a:buFont typeface="Arial"/>
+              <a:buNone/>
+              <a:tabLst/>
+              <a:defRPr/>
+            </a:pPr>
+            <a:endParaRPr lang="en-US" sz="1200" b="0" i="0" u="none" strike="noStrike" cap="none" dirty="0">
+              <a:solidFill>
+                <a:schemeClr val="dk1"/>
+              </a:solidFill>
+              <a:effectLst/>
+              <a:latin typeface="Arial"/>
+              <a:ea typeface="Arial"/>
+              <a:cs typeface="Arial"/>
+              <a:sym typeface="Arial"/>
+            </a:endParaRPr>
+          </a:p>
+          <a:p>
+            <a:pPr marL="457200" marR="0" lvl="0" indent="-228600" algn="l" defTabSz="914400" rtl="0" eaLnBrk="1" fontAlgn="auto" latinLnBrk="0" hangingPunct="1">
+              <a:lnSpc>
+                <a:spcPct val="100000"/>
+              </a:lnSpc>
+              <a:spcBef>
+                <a:spcPts val="0"/>
+              </a:spcBef>
+              <a:spcAft>
+                <a:spcPts val="0"/>
+              </a:spcAft>
+              <a:buClr>
+                <a:srgbClr val="000000"/>
+              </a:buClr>
+              <a:buSzPts val="1400"/>
+              <a:buFont typeface="Arial"/>
+              <a:buNone/>
+              <a:tabLst/>
+              <a:defRPr/>
+            </a:pPr>
+            <a:r>
+              <a:rPr lang="en-US" sz="1200" b="0" i="0" u="none" strike="noStrike" cap="none" dirty="0">
+                <a:solidFill>
+                  <a:schemeClr val="dk1"/>
+                </a:solidFill>
+                <a:effectLst/>
+                <a:latin typeface="Arial"/>
+                <a:ea typeface="Arial"/>
+                <a:cs typeface="Arial"/>
+                <a:sym typeface="Arial"/>
+              </a:rPr>
+              <a:t>https://webhook.site/#!/view/f39fa556-4629-4ea7-bdb3-6698dc60a334/74687e09-27f5-4d81-bdb7-5634c0f70a4a/1</a:t>
+            </a:r>
+          </a:p>
+          <a:p>
+            <a:pPr marL="457200" marR="0" lvl="0" indent="-228600" algn="l" defTabSz="914400" rtl="0" eaLnBrk="1" fontAlgn="auto" latinLnBrk="0" hangingPunct="1">
+              <a:lnSpc>
+                <a:spcPct val="100000"/>
+              </a:lnSpc>
+              <a:spcBef>
+                <a:spcPts val="0"/>
+              </a:spcBef>
+              <a:spcAft>
+                <a:spcPts val="0"/>
+              </a:spcAft>
+              <a:buClr>
+                <a:srgbClr val="000000"/>
+              </a:buClr>
+              <a:buSzPts val="1400"/>
+              <a:buFont typeface="Arial"/>
+              <a:buNone/>
+              <a:tabLst/>
+              <a:defRPr/>
+            </a:pPr>
+            <a:endParaRPr lang="en-US" sz="1200" b="0" i="0" u="none" strike="noStrike" cap="none" dirty="0">
+              <a:solidFill>
+                <a:schemeClr val="dk1"/>
+              </a:solidFill>
+              <a:effectLst/>
+              <a:latin typeface="Arial"/>
+              <a:ea typeface="Arial"/>
+              <a:cs typeface="Arial"/>
+              <a:sym typeface="Arial"/>
+            </a:endParaRPr>
+          </a:p>
+          <a:p>
+            <a:endParaRPr lang="en-US" dirty="0"/>
+          </a:p>
+          <a:p>
+            <a:r>
+              <a:rPr lang="en-US" dirty="0"/>
+              <a:t>---</a:t>
+            </a:r>
+          </a:p>
+          <a:p>
+            <a:pPr latinLnBrk="1"/>
+            <a:r>
+              <a:rPr lang="en-US" sz="1200" b="0" i="0" u="none" strike="noStrike" cap="none" dirty="0">
+                <a:solidFill>
+                  <a:schemeClr val="dk1"/>
+                </a:solidFill>
+                <a:effectLst/>
+                <a:latin typeface="Arial"/>
+                <a:ea typeface="Arial"/>
+                <a:cs typeface="Arial"/>
+                <a:sym typeface="Arial"/>
+              </a:rPr>
+              <a:t>var </a:t>
+            </a:r>
+            <a:r>
+              <a:rPr lang="en-US" sz="1200" b="0" i="0" u="none" strike="noStrike" cap="none" dirty="0" err="1">
+                <a:solidFill>
+                  <a:schemeClr val="dk1"/>
+                </a:solidFill>
+                <a:effectLst/>
+                <a:latin typeface="Arial"/>
+                <a:ea typeface="Arial"/>
+                <a:cs typeface="Arial"/>
+                <a:sym typeface="Arial"/>
+              </a:rPr>
+              <a:t>checkinDate</a:t>
+            </a:r>
+            <a:r>
+              <a:rPr lang="en-US" sz="1200" b="0" i="0" u="none" strike="noStrike" cap="none" dirty="0">
+                <a:solidFill>
+                  <a:schemeClr val="dk1"/>
+                </a:solidFill>
+                <a:effectLst/>
+                <a:latin typeface="Arial"/>
+                <a:ea typeface="Arial"/>
+                <a:cs typeface="Arial"/>
+                <a:sym typeface="Arial"/>
+              </a:rPr>
+              <a:t> = </a:t>
+            </a:r>
+            <a:r>
+              <a:rPr lang="en-US" sz="1200" b="0" i="0" u="none" strike="noStrike" cap="none" dirty="0" err="1">
+                <a:solidFill>
+                  <a:schemeClr val="dk1"/>
+                </a:solidFill>
+                <a:effectLst/>
+                <a:latin typeface="Arial"/>
+                <a:ea typeface="Arial"/>
+                <a:cs typeface="Arial"/>
+                <a:sym typeface="Arial"/>
+              </a:rPr>
+              <a:t>args.getValue</a:t>
+            </a:r>
+            <a:r>
+              <a:rPr lang="en-US" sz="1200" b="0" i="0" u="none" strike="noStrike" cap="none" dirty="0">
+                <a:solidFill>
+                  <a:schemeClr val="dk1"/>
+                </a:solidFill>
+                <a:effectLst/>
+                <a:latin typeface="Arial"/>
+                <a:ea typeface="Arial"/>
+                <a:cs typeface="Arial"/>
+                <a:sym typeface="Arial"/>
+              </a:rPr>
+              <a:t>('</a:t>
+            </a:r>
+            <a:r>
+              <a:rPr lang="en-US" sz="1200" b="0" i="0" u="none" strike="noStrike" cap="none" dirty="0" err="1">
+                <a:solidFill>
+                  <a:schemeClr val="dk1"/>
+                </a:solidFill>
+                <a:effectLst/>
+                <a:latin typeface="Arial"/>
+                <a:ea typeface="Arial"/>
+                <a:cs typeface="Arial"/>
+                <a:sym typeface="Arial"/>
+              </a:rPr>
+              <a:t>CheckinDate</a:t>
+            </a:r>
+            <a:r>
+              <a:rPr lang="en-US" sz="1200" b="0" i="0" u="none" strike="noStrike" cap="none" dirty="0">
+                <a:solidFill>
+                  <a:schemeClr val="dk1"/>
+                </a:solidFill>
+                <a:effectLst/>
+                <a:latin typeface="Arial"/>
+                <a:ea typeface="Arial"/>
+                <a:cs typeface="Arial"/>
+                <a:sym typeface="Arial"/>
+              </a:rPr>
+              <a:t>');</a:t>
+            </a:r>
+          </a:p>
+          <a:p>
+            <a:pPr latinLnBrk="1"/>
+            <a:r>
+              <a:rPr lang="en-US" sz="1200" b="0" i="0" u="none" strike="noStrike" cap="none" dirty="0">
+                <a:solidFill>
+                  <a:schemeClr val="dk1"/>
+                </a:solidFill>
+                <a:effectLst/>
+                <a:latin typeface="Arial"/>
+                <a:ea typeface="Arial"/>
+                <a:cs typeface="Arial"/>
+                <a:sym typeface="Arial"/>
+              </a:rPr>
+              <a:t>if (</a:t>
+            </a:r>
+            <a:r>
+              <a:rPr lang="en-US" sz="1200" b="0" i="0" u="none" strike="noStrike" cap="none" dirty="0" err="1">
+                <a:solidFill>
+                  <a:schemeClr val="dk1"/>
+                </a:solidFill>
+                <a:effectLst/>
+                <a:latin typeface="Arial"/>
+                <a:ea typeface="Arial"/>
+                <a:cs typeface="Arial"/>
+                <a:sym typeface="Arial"/>
+              </a:rPr>
+              <a:t>Date.parse</a:t>
+            </a:r>
+            <a:r>
+              <a:rPr lang="en-US" sz="1200" b="0" i="0" u="none" strike="noStrike" cap="none" dirty="0">
+                <a:solidFill>
+                  <a:schemeClr val="dk1"/>
+                </a:solidFill>
+                <a:effectLst/>
+                <a:latin typeface="Arial"/>
+                <a:ea typeface="Arial"/>
+                <a:cs typeface="Arial"/>
+                <a:sym typeface="Arial"/>
+              </a:rPr>
+              <a:t>(</a:t>
+            </a:r>
+            <a:r>
+              <a:rPr lang="en-US" sz="1200" b="0" i="0" u="none" strike="noStrike" cap="none" dirty="0" err="1">
+                <a:solidFill>
+                  <a:schemeClr val="dk1"/>
+                </a:solidFill>
+                <a:effectLst/>
+                <a:latin typeface="Arial"/>
+                <a:ea typeface="Arial"/>
+                <a:cs typeface="Arial"/>
+                <a:sym typeface="Arial"/>
+              </a:rPr>
+              <a:t>checkinDate</a:t>
+            </a:r>
+            <a:r>
+              <a:rPr lang="en-US" sz="1200" b="0" i="0" u="none" strike="noStrike" cap="none" dirty="0">
+                <a:solidFill>
+                  <a:schemeClr val="dk1"/>
+                </a:solidFill>
+                <a:effectLst/>
+                <a:latin typeface="Arial"/>
+                <a:ea typeface="Arial"/>
+                <a:cs typeface="Arial"/>
+                <a:sym typeface="Arial"/>
+              </a:rPr>
+              <a:t>) &lt; </a:t>
+            </a:r>
+            <a:r>
+              <a:rPr lang="en-US" sz="1200" b="0" i="0" u="none" strike="noStrike" cap="none" dirty="0" err="1">
+                <a:solidFill>
+                  <a:schemeClr val="dk1"/>
+                </a:solidFill>
+                <a:effectLst/>
+                <a:latin typeface="Arial"/>
+                <a:ea typeface="Arial"/>
+                <a:cs typeface="Arial"/>
+                <a:sym typeface="Arial"/>
+              </a:rPr>
+              <a:t>Date.now</a:t>
+            </a:r>
+            <a:r>
+              <a:rPr lang="en-US" sz="1200" b="0" i="0" u="none" strike="noStrike" cap="none" dirty="0">
+                <a:solidFill>
+                  <a:schemeClr val="dk1"/>
+                </a:solidFill>
+                <a:effectLst/>
+                <a:latin typeface="Arial"/>
+                <a:ea typeface="Arial"/>
+                <a:cs typeface="Arial"/>
+                <a:sym typeface="Arial"/>
+              </a:rPr>
+              <a:t>()) {</a:t>
+            </a:r>
+          </a:p>
+          <a:p>
+            <a:pPr latinLnBrk="1"/>
+            <a:r>
+              <a:rPr lang="en-US" sz="1200" b="0" i="0" u="none" strike="noStrike" cap="none" dirty="0">
+                <a:solidFill>
+                  <a:schemeClr val="dk1"/>
+                </a:solidFill>
+                <a:effectLst/>
+                <a:latin typeface="Arial"/>
+                <a:ea typeface="Arial"/>
+                <a:cs typeface="Arial"/>
+                <a:sym typeface="Arial"/>
+              </a:rPr>
+              <a:t>   </a:t>
+            </a:r>
+            <a:r>
+              <a:rPr lang="en-US" sz="1200" b="0" i="0" u="none" strike="noStrike" cap="none" dirty="0" err="1">
+                <a:solidFill>
+                  <a:schemeClr val="dk1"/>
+                </a:solidFill>
+                <a:effectLst/>
+                <a:latin typeface="Arial"/>
+                <a:ea typeface="Arial"/>
+                <a:cs typeface="Arial"/>
+                <a:sym typeface="Arial"/>
+              </a:rPr>
+              <a:t>userFriendlyError</a:t>
+            </a:r>
+            <a:r>
+              <a:rPr lang="en-US" sz="1200" b="0" i="0" u="none" strike="noStrike" cap="none" dirty="0">
+                <a:solidFill>
+                  <a:schemeClr val="dk1"/>
+                </a:solidFill>
+                <a:effectLst/>
+                <a:latin typeface="Arial"/>
+                <a:ea typeface="Arial"/>
+                <a:cs typeface="Arial"/>
+                <a:sym typeface="Arial"/>
+              </a:rPr>
+              <a:t>('</a:t>
+            </a:r>
+            <a:r>
+              <a:rPr lang="en-US" sz="1200" b="0" i="0" u="none" strike="noStrike" cap="none" dirty="0" err="1">
+                <a:solidFill>
+                  <a:schemeClr val="dk1"/>
+                </a:solidFill>
+                <a:effectLst/>
+                <a:latin typeface="Arial"/>
+                <a:ea typeface="Arial"/>
+                <a:cs typeface="Arial"/>
+                <a:sym typeface="Arial"/>
+              </a:rPr>
+              <a:t>Checkin</a:t>
+            </a:r>
+            <a:r>
+              <a:rPr lang="en-US" sz="1200" b="0" i="0" u="none" strike="noStrike" cap="none" dirty="0">
+                <a:solidFill>
+                  <a:schemeClr val="dk1"/>
+                </a:solidFill>
+                <a:effectLst/>
+                <a:latin typeface="Arial"/>
+                <a:ea typeface="Arial"/>
+                <a:cs typeface="Arial"/>
+                <a:sym typeface="Arial"/>
+              </a:rPr>
+              <a:t> date must be a future date!');</a:t>
+            </a:r>
+          </a:p>
+          <a:p>
+            <a:pPr latinLnBrk="1"/>
+            <a:r>
+              <a:rPr lang="en-US" sz="1200" b="0" i="0" u="none" strike="noStrike" cap="none" dirty="0">
+                <a:solidFill>
+                  <a:schemeClr val="dk1"/>
+                </a:solidFill>
+                <a:effectLst/>
+                <a:latin typeface="Arial"/>
+                <a:ea typeface="Arial"/>
+                <a:cs typeface="Arial"/>
+                <a:sym typeface="Arial"/>
+              </a:rPr>
+              <a:t>}</a:t>
+            </a:r>
+          </a:p>
+          <a:p>
+            <a:pPr latinLnBrk="1"/>
+            <a:endParaRPr lang="en-US" sz="1200" b="0" i="0" u="none" strike="noStrike" cap="none" dirty="0">
+              <a:solidFill>
+                <a:schemeClr val="dk1"/>
+              </a:solidFill>
+              <a:effectLst/>
+              <a:latin typeface="Arial"/>
+              <a:ea typeface="Arial"/>
+              <a:cs typeface="Arial"/>
+              <a:sym typeface="Arial"/>
+            </a:endParaRPr>
+          </a:p>
+          <a:p>
+            <a:pPr latinLnBrk="1"/>
+            <a:r>
+              <a:rPr lang="en-US" sz="1200" b="0" i="0" u="none" strike="noStrike" cap="none" dirty="0">
+                <a:solidFill>
+                  <a:schemeClr val="dk1"/>
+                </a:solidFill>
+                <a:effectLst/>
+                <a:latin typeface="Arial"/>
+                <a:ea typeface="Arial"/>
+                <a:cs typeface="Arial"/>
+                <a:sym typeface="Arial"/>
+              </a:rPr>
+              <a:t>---</a:t>
+            </a:r>
+          </a:p>
+          <a:p>
+            <a:pPr latinLnBrk="1"/>
+            <a:endParaRPr lang="en-US" sz="1200" b="0" i="0" u="none" strike="noStrike" cap="none" dirty="0">
+              <a:solidFill>
+                <a:schemeClr val="dk1"/>
+              </a:solidFill>
+              <a:effectLst/>
+              <a:latin typeface="Arial"/>
+              <a:ea typeface="Arial"/>
+              <a:cs typeface="Arial"/>
+              <a:sym typeface="Arial"/>
+            </a:endParaRPr>
+          </a:p>
+          <a:p>
+            <a:pPr latinLnBrk="1"/>
+            <a:r>
+              <a:rPr lang="en-US" sz="1200" b="0" i="0" u="none" strike="noStrike" cap="none" dirty="0">
+                <a:solidFill>
+                  <a:schemeClr val="dk1"/>
+                </a:solidFill>
+                <a:effectLst/>
+                <a:latin typeface="Arial"/>
+                <a:ea typeface="Arial"/>
+                <a:cs typeface="Arial"/>
+                <a:sym typeface="Arial"/>
+              </a:rPr>
+              <a:t>var room = await </a:t>
+            </a:r>
+            <a:r>
+              <a:rPr lang="en-US" sz="1200" b="0" i="0" u="none" strike="noStrike" cap="none" dirty="0" err="1">
+                <a:solidFill>
+                  <a:schemeClr val="dk1"/>
+                </a:solidFill>
+                <a:effectLst/>
+                <a:latin typeface="Arial"/>
+                <a:ea typeface="Arial"/>
+                <a:cs typeface="Arial"/>
+                <a:sym typeface="Arial"/>
+              </a:rPr>
+              <a:t>db.get</a:t>
+            </a:r>
+            <a:r>
+              <a:rPr lang="en-US" sz="1200" b="0" i="0" u="none" strike="noStrike" cap="none" dirty="0">
+                <a:solidFill>
+                  <a:schemeClr val="dk1"/>
+                </a:solidFill>
+                <a:effectLst/>
+                <a:latin typeface="Arial"/>
+                <a:ea typeface="Arial"/>
+                <a:cs typeface="Arial"/>
+                <a:sym typeface="Arial"/>
+              </a:rPr>
+              <a:t>("Room", </a:t>
+            </a:r>
+            <a:r>
+              <a:rPr lang="en-US" sz="1200" b="0" i="0" u="none" strike="noStrike" cap="none" dirty="0" err="1">
+                <a:solidFill>
+                  <a:schemeClr val="dk1"/>
+                </a:solidFill>
+                <a:effectLst/>
+                <a:latin typeface="Arial"/>
+                <a:ea typeface="Arial"/>
+                <a:cs typeface="Arial"/>
+                <a:sym typeface="Arial"/>
+              </a:rPr>
+              <a:t>args.data.RoomId</a:t>
+            </a:r>
+            <a:r>
+              <a:rPr lang="en-US" sz="1200" b="0" i="0" u="none" strike="noStrike" cap="none" dirty="0">
+                <a:solidFill>
+                  <a:schemeClr val="dk1"/>
+                </a:solidFill>
+                <a:effectLst/>
+                <a:latin typeface="Arial"/>
+                <a:ea typeface="Arial"/>
+                <a:cs typeface="Arial"/>
+                <a:sym typeface="Arial"/>
+              </a:rPr>
+              <a:t>);</a:t>
+            </a:r>
+          </a:p>
+          <a:p>
+            <a:pPr latinLnBrk="1"/>
+            <a:r>
+              <a:rPr lang="en-US" sz="1200" b="0" i="0" u="none" strike="noStrike" cap="none" dirty="0" err="1">
+                <a:solidFill>
+                  <a:schemeClr val="dk1"/>
+                </a:solidFill>
+                <a:effectLst/>
+                <a:latin typeface="Arial"/>
+                <a:ea typeface="Arial"/>
+                <a:cs typeface="Arial"/>
+                <a:sym typeface="Arial"/>
+              </a:rPr>
+              <a:t>room.Status</a:t>
+            </a:r>
+            <a:r>
+              <a:rPr lang="en-US" sz="1200" b="0" i="0" u="none" strike="noStrike" cap="none" dirty="0">
+                <a:solidFill>
+                  <a:schemeClr val="dk1"/>
+                </a:solidFill>
+                <a:effectLst/>
+                <a:latin typeface="Arial"/>
+                <a:ea typeface="Arial"/>
+                <a:cs typeface="Arial"/>
+                <a:sym typeface="Arial"/>
+              </a:rPr>
+              <a:t> = </a:t>
+            </a:r>
+            <a:r>
+              <a:rPr lang="en-US" sz="1200" b="0" i="0" u="none" strike="noStrike" cap="none" dirty="0" err="1">
+                <a:solidFill>
+                  <a:schemeClr val="dk1"/>
+                </a:solidFill>
+                <a:effectLst/>
+                <a:latin typeface="Arial"/>
+                <a:ea typeface="Arial"/>
+                <a:cs typeface="Arial"/>
+                <a:sym typeface="Arial"/>
+              </a:rPr>
+              <a:t>RoomStatus.Occupied</a:t>
+            </a:r>
+            <a:r>
+              <a:rPr lang="en-US" sz="1200" b="0" i="0" u="none" strike="noStrike" cap="none" dirty="0">
+                <a:solidFill>
+                  <a:schemeClr val="dk1"/>
+                </a:solidFill>
+                <a:effectLst/>
+                <a:latin typeface="Arial"/>
+                <a:ea typeface="Arial"/>
+                <a:cs typeface="Arial"/>
+                <a:sym typeface="Arial"/>
+              </a:rPr>
+              <a:t>;</a:t>
+            </a:r>
+          </a:p>
+          <a:p>
+            <a:pPr latinLnBrk="1"/>
+            <a:r>
+              <a:rPr lang="en-US" sz="1200" b="0" i="0" u="none" strike="noStrike" cap="none" dirty="0">
+                <a:solidFill>
+                  <a:schemeClr val="dk1"/>
+                </a:solidFill>
+                <a:effectLst/>
+                <a:latin typeface="Arial"/>
+                <a:ea typeface="Arial"/>
+                <a:cs typeface="Arial"/>
+                <a:sym typeface="Arial"/>
+              </a:rPr>
+              <a:t>await </a:t>
+            </a:r>
+            <a:r>
+              <a:rPr lang="en-US" sz="1200" b="0" i="0" u="none" strike="noStrike" cap="none" dirty="0" err="1">
+                <a:solidFill>
+                  <a:schemeClr val="dk1"/>
+                </a:solidFill>
+                <a:effectLst/>
+                <a:latin typeface="Arial"/>
+                <a:ea typeface="Arial"/>
+                <a:cs typeface="Arial"/>
+                <a:sym typeface="Arial"/>
+              </a:rPr>
+              <a:t>db.update</a:t>
+            </a:r>
+            <a:r>
+              <a:rPr lang="en-US" sz="1200" b="0" i="0" u="none" strike="noStrike" cap="none" dirty="0">
+                <a:solidFill>
+                  <a:schemeClr val="dk1"/>
+                </a:solidFill>
+                <a:effectLst/>
+                <a:latin typeface="Arial"/>
+                <a:ea typeface="Arial"/>
+                <a:cs typeface="Arial"/>
+                <a:sym typeface="Arial"/>
+              </a:rPr>
+              <a:t>(room);</a:t>
+            </a:r>
+          </a:p>
+          <a:p>
+            <a:pPr latinLnBrk="1"/>
+            <a:endParaRPr lang="en-US" sz="1200" b="0" i="0" u="none" strike="noStrike" cap="none" dirty="0">
+              <a:solidFill>
+                <a:schemeClr val="dk1"/>
+              </a:solidFill>
+              <a:effectLst/>
+              <a:latin typeface="Arial"/>
+              <a:ea typeface="Arial"/>
+              <a:cs typeface="Arial"/>
+              <a:sym typeface="Arial"/>
+            </a:endParaRPr>
+          </a:p>
+          <a:p>
+            <a:endParaRPr lang="en-US" dirty="0"/>
+          </a:p>
+        </p:txBody>
+      </p:sp>
+      <p:sp>
+        <p:nvSpPr>
+          <p:cNvPr id="4" name="Slide Number Placeholder 3">
+            <a:extLst>
+              <a:ext uri="{FF2B5EF4-FFF2-40B4-BE49-F238E27FC236}">
+                <a16:creationId xmlns:a16="http://schemas.microsoft.com/office/drawing/2014/main" id="{13E145A8-C8E9-7339-F8EA-42B783D29936}"/>
+              </a:ext>
+            </a:extLst>
+          </p:cNvPr>
+          <p:cNvSpPr>
+            <a:spLocks noGrp="1"/>
+          </p:cNvSpPr>
+          <p:nvPr>
+            <p:ph type="sldNum" idx="12"/>
+          </p:nvPr>
+        </p:nvSpPr>
+        <p:spPr/>
+        <p:txBody>
+          <a:bodyPr/>
+          <a:lstStyle/>
+          <a:p>
+            <a:pPr marL="0" marR="0" lvl="0" indent="0" algn="r" rtl="0">
+              <a:lnSpc>
+                <a:spcPct val="100000"/>
+              </a:lnSpc>
+              <a:spcBef>
+                <a:spcPts val="0"/>
+              </a:spcBef>
+              <a:spcAft>
+                <a:spcPts val="0"/>
+              </a:spcAft>
+              <a:buClr>
+                <a:srgbClr val="000000"/>
+              </a:buClr>
+              <a:buSzPts val="1200"/>
+              <a:buFont typeface="Arial"/>
+              <a:buNone/>
+            </a:pPr>
+            <a:fld id="{00000000-1234-1234-1234-123412341234}" type="slidenum">
+              <a:rPr lang="tr-TR" sz="1200" b="0" i="0" u="none" strike="noStrike" cap="none" smtClean="0">
+                <a:solidFill>
+                  <a:schemeClr val="dk1"/>
+                </a:solidFill>
+                <a:latin typeface="Arial"/>
+                <a:ea typeface="Arial"/>
+                <a:cs typeface="Arial"/>
+                <a:sym typeface="Arial"/>
+              </a:rPr>
+              <a:t>22</a:t>
+            </a:fld>
+            <a:endParaRPr lang="tr-TR" sz="1200" b="0" i="0" u="none" strike="noStrike" cap="none" dirty="0">
+              <a:solidFill>
+                <a:schemeClr val="dk1"/>
+              </a:solidFill>
+              <a:latin typeface="Arial"/>
+              <a:ea typeface="Arial"/>
+              <a:cs typeface="Arial"/>
+              <a:sym typeface="Arial"/>
+            </a:endParaRPr>
+          </a:p>
+        </p:txBody>
+      </p:sp>
+    </p:spTree>
+    <p:extLst>
+      <p:ext uri="{BB962C8B-B14F-4D97-AF65-F5344CB8AC3E}">
+        <p14:creationId xmlns:p14="http://schemas.microsoft.com/office/powerpoint/2010/main" val="3390086630"/>
+      </p:ext>
+    </p:extLst>
+  </p:cSld>
+  <p:clrMapOvr>
+    <a:masterClrMapping/>
+  </p:clrMapOvr>
+</p:notes>
+</file>
+
 <file path=ppt/notesSlides/notesSlide2.xml><?xml version="1.0" encoding="utf-8"?>
 <p:notes xmlns:a="http://schemas.openxmlformats.org/drawingml/2006/main" xmlns:r="http://schemas.openxmlformats.org/officeDocument/2006/relationships" xmlns:p="http://schemas.openxmlformats.org/presentationml/2006/main">
   <p:cSld>
@@ -3302,6 +4128,123 @@
     <p:extLst>
       <p:ext uri="{BB962C8B-B14F-4D97-AF65-F5344CB8AC3E}">
         <p14:creationId xmlns:p14="http://schemas.microsoft.com/office/powerpoint/2010/main" val="3225775997"/>
+      </p:ext>
+    </p:extLst>
+  </p:cSld>
+  <p:clrMapOvr>
+    <a:masterClrMapping/>
+  </p:clrMapOvr>
+</p:notes>
+</file>
+
+<file path=ppt/notesSlides/notesSlide20.xml><?xml version="1.0" encoding="utf-8"?>
+<p:notes xmlns:a="http://schemas.openxmlformats.org/drawingml/2006/main" xmlns:r="http://schemas.openxmlformats.org/officeDocument/2006/relationships" xmlns:p="http://schemas.openxmlformats.org/presentationml/2006/main">
+  <p:cSld>
+    <p:spTree>
+      <p:nvGrpSpPr>
+        <p:cNvPr id="1" name=""/>
+        <p:cNvGrpSpPr/>
+        <p:nvPr/>
+      </p:nvGrpSpPr>
+      <p:grpSpPr>
+        <a:xfrm>
+          <a:off x="0" y="0"/>
+          <a:ext cx="0" cy="0"/>
+          <a:chOff x="0" y="0"/>
+          <a:chExt cx="0" cy="0"/>
+        </a:xfrm>
+      </p:grpSpPr>
+      <p:sp>
+        <p:nvSpPr>
+          <p:cNvPr id="2" name="Slide Image Placeholder 1"/>
+          <p:cNvSpPr>
+            <a:spLocks noGrp="1" noRot="1" noChangeAspect="1"/>
+          </p:cNvSpPr>
+          <p:nvPr>
+            <p:ph type="sldImg"/>
+          </p:nvPr>
+        </p:nvSpPr>
+        <p:spPr/>
+      </p:sp>
+      <p:sp>
+        <p:nvSpPr>
+          <p:cNvPr id="3" name="Notes Placeholder 2"/>
+          <p:cNvSpPr>
+            <a:spLocks noGrp="1"/>
+          </p:cNvSpPr>
+          <p:nvPr>
+            <p:ph type="body" idx="1"/>
+          </p:nvPr>
+        </p:nvSpPr>
+        <p:spPr/>
+        <p:txBody>
+          <a:bodyPr/>
+          <a:lstStyle/>
+          <a:p>
+            <a:endParaRPr lang="en-US" dirty="0"/>
+          </a:p>
+        </p:txBody>
+      </p:sp>
+      <p:sp>
+        <p:nvSpPr>
+          <p:cNvPr id="4" name="Slide Number Placeholder 3"/>
+          <p:cNvSpPr>
+            <a:spLocks noGrp="1"/>
+          </p:cNvSpPr>
+          <p:nvPr>
+            <p:ph type="sldNum" idx="12"/>
+          </p:nvPr>
+        </p:nvSpPr>
+        <p:spPr/>
+        <p:txBody>
+          <a:bodyPr/>
+          <a:lstStyle/>
+          <a:p>
+            <a:pPr marL="0" marR="0" lvl="0" indent="0" algn="r" rtl="0">
+              <a:lnSpc>
+                <a:spcPct val="100000"/>
+              </a:lnSpc>
+              <a:spcBef>
+                <a:spcPts val="0"/>
+              </a:spcBef>
+              <a:spcAft>
+                <a:spcPts val="0"/>
+              </a:spcAft>
+              <a:buClr>
+                <a:srgbClr val="000000"/>
+              </a:buClr>
+              <a:buSzPts val="1200"/>
+              <a:buFont typeface="Arial"/>
+              <a:buNone/>
+            </a:pPr>
+            <a:fld id="{00000000-1234-1234-1234-123412341234}" type="slidenum">
+              <a:rPr lang="tr-TR" sz="1200" b="0" i="0" u="none" strike="noStrike" cap="none" smtClean="0">
+                <a:solidFill>
+                  <a:schemeClr val="dk1"/>
+                </a:solidFill>
+                <a:latin typeface="Arial"/>
+                <a:ea typeface="Arial"/>
+                <a:cs typeface="Arial"/>
+                <a:sym typeface="Arial"/>
+              </a:rPr>
+              <a:t>24</a:t>
+            </a:fld>
+            <a:endParaRPr lang="tr-TR" sz="1200" b="0" i="0" u="none" strike="noStrike" cap="none" dirty="0">
+              <a:solidFill>
+                <a:schemeClr val="dk1"/>
+              </a:solidFill>
+              <a:latin typeface="Arial"/>
+              <a:ea typeface="Arial"/>
+              <a:cs typeface="Arial"/>
+              <a:sym typeface="Arial"/>
+            </a:endParaRPr>
+          </a:p>
+        </p:txBody>
+      </p:sp>
+    </p:spTree>
+    <p:extLst>
+      <p:ext uri="{BB962C8B-B14F-4D97-AF65-F5344CB8AC3E}">
+        <p14:creationId xmlns:p14="http://schemas.microsoft.com/office/powerpoint/2010/main" val="891878163"/>
       </p:ext>
     </p:extLst>
   </p:cSld>
@@ -23868,6 +24811,146 @@
   <p:cSld>
     <p:spTree>
       <p:nvGrpSpPr>
+        <p:cNvPr id="1" name="">
+          <a:extLst>
+            <a:ext uri="{FF2B5EF4-FFF2-40B4-BE49-F238E27FC236}">
+              <a16:creationId xmlns:a16="http://schemas.microsoft.com/office/drawing/2014/main" id="{FF2430FA-0910-DB8F-C48A-A127F1A7EBEC}"/>
+            </a:ext>
+          </a:extLst>
+        </p:cNvPr>
+        <p:cNvGrpSpPr/>
+        <p:nvPr/>
+      </p:nvGrpSpPr>
+      <p:grpSpPr>
+        <a:xfrm>
+          <a:off x="0" y="0"/>
+          <a:ext cx="0" cy="0"/>
+          <a:chOff x="0" y="0"/>
+          <a:chExt cx="0" cy="0"/>
+        </a:xfrm>
+      </p:grpSpPr>
+      <p:sp>
+        <p:nvSpPr>
+          <p:cNvPr id="4" name="TextBox 3">
+            <a:extLst>
+              <a:ext uri="{FF2B5EF4-FFF2-40B4-BE49-F238E27FC236}">
+                <a16:creationId xmlns:a16="http://schemas.microsoft.com/office/drawing/2014/main" id="{1419328C-EB13-F671-4498-155619F4AF5F}"/>
+              </a:ext>
+            </a:extLst>
+          </p:cNvPr>
+          <p:cNvSpPr txBox="1"/>
+          <p:nvPr/>
+        </p:nvSpPr>
+        <p:spPr>
+          <a:xfrm>
+            <a:off x="349445" y="144298"/>
+            <a:ext cx="2821259" cy="400110"/>
+          </a:xfrm>
+          <a:prstGeom prst="rect">
+            <a:avLst/>
+          </a:prstGeom>
+          <a:noFill/>
+        </p:spPr>
+        <p:txBody>
+          <a:bodyPr wrap="square" rtlCol="0">
+            <a:spAutoFit/>
+          </a:bodyPr>
+          <a:lstStyle/>
+          <a:p>
+            <a:r>
+              <a:rPr lang="en-US" sz="2000" b="1" dirty="0">
+                <a:latin typeface="Lexend" panose="020B0604020202020204" charset="-94"/>
+              </a:rPr>
+              <a:t>RESERVATION</a:t>
+            </a:r>
+          </a:p>
+        </p:txBody>
+      </p:sp>
+      <p:sp>
+        <p:nvSpPr>
+          <p:cNvPr id="7" name="TextBox 6">
+            <a:extLst>
+              <a:ext uri="{FF2B5EF4-FFF2-40B4-BE49-F238E27FC236}">
+                <a16:creationId xmlns:a16="http://schemas.microsoft.com/office/drawing/2014/main" id="{7E7CF318-4991-18B5-BA9F-35078AB7ABFB}"/>
+              </a:ext>
+            </a:extLst>
+          </p:cNvPr>
+          <p:cNvSpPr txBox="1"/>
+          <p:nvPr/>
+        </p:nvSpPr>
+        <p:spPr>
+          <a:xfrm>
+            <a:off x="2554762" y="141859"/>
+            <a:ext cx="2821259" cy="400110"/>
+          </a:xfrm>
+          <a:prstGeom prst="rect">
+            <a:avLst/>
+          </a:prstGeom>
+          <a:noFill/>
+        </p:spPr>
+        <p:txBody>
+          <a:bodyPr wrap="square" rtlCol="0">
+            <a:spAutoFit/>
+          </a:bodyPr>
+          <a:lstStyle/>
+          <a:p>
+            <a:r>
+              <a:rPr lang="en-US" sz="2000" dirty="0">
+                <a:latin typeface="Lexend" panose="020B0604020202020204" charset="-94"/>
+              </a:rPr>
+              <a:t>INTERCEPTORS</a:t>
+            </a:r>
+          </a:p>
+        </p:txBody>
+      </p:sp>
+      <p:pic>
+        <p:nvPicPr>
+          <p:cNvPr id="9" name="Picture 8">
+            <a:extLst>
+              <a:ext uri="{FF2B5EF4-FFF2-40B4-BE49-F238E27FC236}">
+                <a16:creationId xmlns:a16="http://schemas.microsoft.com/office/drawing/2014/main" id="{71CD7AD1-36BE-9FA4-A6CC-D9597BD45E75}"/>
+              </a:ext>
+            </a:extLst>
+          </p:cNvPr>
+          <p:cNvPicPr>
+            <a:picLocks noChangeAspect="1"/>
+          </p:cNvPicPr>
+          <p:nvPr/>
+        </p:nvPicPr>
+        <p:blipFill>
+          <a:blip r:embed="rId3"/>
+          <a:stretch>
+            <a:fillRect/>
+          </a:stretch>
+        </p:blipFill>
+        <p:spPr>
+          <a:xfrm>
+            <a:off x="349445" y="604353"/>
+            <a:ext cx="10661073" cy="6109349"/>
+          </a:xfrm>
+          <a:prstGeom prst="rect">
+            <a:avLst/>
+          </a:prstGeom>
+        </p:spPr>
+      </p:pic>
+    </p:spTree>
+    <p:extLst>
+      <p:ext uri="{BB962C8B-B14F-4D97-AF65-F5344CB8AC3E}">
+        <p14:creationId xmlns:p14="http://schemas.microsoft.com/office/powerpoint/2010/main" val="2931096491"/>
+      </p:ext>
+    </p:extLst>
+  </p:cSld>
+  <p:clrMapOvr>
+    <a:masterClrMapping/>
+  </p:clrMapOvr>
+</p:sld>
+</file>
+
+<file path=ppt/slides/slide23.xml><?xml version="1.0" encoding="utf-8"?>
+<p:sld xmlns:a="http://schemas.openxmlformats.org/drawingml/2006/main" xmlns:r="http://schemas.openxmlformats.org/officeDocument/2006/relationships" xmlns:p="http://schemas.openxmlformats.org/presentationml/2006/main">
+  <p:cSld>
+    <p:spTree>
+      <p:nvGrpSpPr>
         <p:cNvPr id="1" name=""/>
         <p:cNvGrpSpPr/>
         <p:nvPr/>
@@ -23894,7 +24977,7 @@
         </p:nvSpPr>
         <p:spPr>
           <a:xfrm>
-            <a:off x="243972" y="0"/>
+            <a:off x="505230" y="498763"/>
             <a:ext cx="9676471" cy="2677656"/>
           </a:xfrm>
           <a:prstGeom prst="rect">
@@ -24036,7 +25119,7 @@
         </p:nvSpPr>
         <p:spPr>
           <a:xfrm>
-            <a:off x="243972" y="2667271"/>
+            <a:off x="505230" y="3429000"/>
             <a:ext cx="9676471" cy="3046988"/>
           </a:xfrm>
           <a:prstGeom prst="rect">
@@ -24191,7 +25274,7 @@
 </p:sld>
 </file>
 
-<file path=ppt/slides/slide23.xml><?xml version="1.0" encoding="utf-8"?>
+<file path=ppt/slides/slide24.xml><?xml version="1.0" encoding="utf-8"?>
 <p:sld xmlns:a="http://schemas.openxmlformats.org/drawingml/2006/main" xmlns:r="http://schemas.openxmlformats.org/officeDocument/2006/relationships" xmlns:p="http://schemas.openxmlformats.org/presentationml/2006/main">
   <p:cSld>
     <p:spTree>

--- a/abp-community-talks-2026.05.pptx
+++ b/abp-community-talks-2026.05.pptx
@@ -5,7 +5,7 @@
     <p:sldMasterId id="2147483648" r:id="rId1"/>
   </p:sldMasterIdLst>
   <p:notesMasterIdLst>
-    <p:notesMasterId r:id="rId26"/>
+    <p:notesMasterId r:id="rId27"/>
   </p:notesMasterIdLst>
   <p:sldIdLst>
     <p:sldId id="323" r:id="rId2"/>
@@ -30,32 +30,40 @@
     <p:sldId id="356" r:id="rId21"/>
     <p:sldId id="354" r:id="rId22"/>
     <p:sldId id="358" r:id="rId23"/>
-    <p:sldId id="351" r:id="rId24"/>
-    <p:sldId id="352" r:id="rId25"/>
+    <p:sldId id="359" r:id="rId24"/>
+    <p:sldId id="351" r:id="rId25"/>
+    <p:sldId id="352" r:id="rId26"/>
   </p:sldIdLst>
   <p:sldSz cx="12192000" cy="6858000"/>
   <p:notesSz cx="6858000" cy="9144000"/>
   <p:embeddedFontLst>
     <p:embeddedFont>
+      <p:font typeface="Consolas" panose="020B0609020204030204" pitchFamily="49" charset="0"/>
+      <p:regular r:id="rId28"/>
+      <p:bold r:id="rId29"/>
+      <p:italic r:id="rId30"/>
+      <p:boldItalic r:id="rId31"/>
+    </p:embeddedFont>
+    <p:embeddedFont>
       <p:font typeface="Lexend" panose="020B0604020202020204" charset="-94"/>
-      <p:regular r:id="rId27"/>
-      <p:bold r:id="rId28"/>
+      <p:regular r:id="rId32"/>
+      <p:bold r:id="rId33"/>
     </p:embeddedFont>
     <p:embeddedFont>
       <p:font typeface="Lexend Light" panose="020B0604020202020204" charset="-94"/>
-      <p:regular r:id="rId29"/>
+      <p:regular r:id="rId34"/>
     </p:embeddedFont>
     <p:embeddedFont>
       <p:font typeface="Play" panose="020B0604020202020204" charset="0"/>
-      <p:regular r:id="rId30"/>
-      <p:bold r:id="rId31"/>
+      <p:regular r:id="rId35"/>
+      <p:bold r:id="rId36"/>
     </p:embeddedFont>
     <p:embeddedFont>
       <p:font typeface="Poppins" panose="00000500000000000000" pitchFamily="2" charset="-94"/>
-      <p:regular r:id="rId32"/>
-      <p:bold r:id="rId33"/>
-      <p:italic r:id="rId34"/>
-      <p:boldItalic r:id="rId35"/>
+      <p:regular r:id="rId37"/>
+      <p:bold r:id="rId38"/>
+      <p:italic r:id="rId39"/>
+      <p:boldItalic r:id="rId40"/>
     </p:embeddedFont>
   </p:embeddedFontLst>
   <p:defaultTextStyle>
@@ -318,6 +326,7 @@
             <p14:sldId id="356"/>
             <p14:sldId id="354"/>
             <p14:sldId id="358"/>
+            <p14:sldId id="359"/>
             <p14:sldId id="351"/>
             <p14:sldId id="352"/>
           </p14:sldIdLst>
@@ -328,7 +337,7 @@
       <p15:sldGuideLst xmlns:p15="http://schemas.microsoft.com/office/powerpoint/2012/main"/>
     </p:ext>
     <p:ext uri="GoogleSlidesCustomDataVersion2">
-      <go:slidesCustomData xmlns:go="http://customooxmlschemas.google.com/" xmlns:ahyp="http://schemas.microsoft.com/office/drawing/2018/hyperlinkcolor" xmlns:p15="http://schemas.microsoft.com/office/powerpoint/2012/main" xmlns:p14="http://schemas.microsoft.com/office/powerpoint/2010/main" xmlns:com="http://schemas.openxmlformats.org/drawingml/2006/compatibility" xmlns:pvml="urn:schemas-microsoft-com:office:powerpoint" xmlns:v="urn:schemas-microsoft-com:vml" xmlns:o="urn:schemas-microsoft-com:office:office" xmlns:dgm="http://schemas.openxmlformats.org/drawingml/2006/diagram" xmlns:c="http://schemas.openxmlformats.org/drawingml/2006/chart" xmlns:mv="urn:schemas-microsoft-com:mac:vml" xmlns:mc="http://schemas.openxmlformats.org/markup-compatibility/2006" xmlns="" r:id="rId48" roundtripDataSignature="AMtx7mihNSh0nE7P5bmNZynwZ07PSv3TUg=="/>
+      <go:slidesCustomData xmlns="" xmlns:mc="http://schemas.openxmlformats.org/markup-compatibility/2006" xmlns:mv="urn:schemas-microsoft-com:mac:vml" xmlns:c="http://schemas.openxmlformats.org/drawingml/2006/chart" xmlns:dgm="http://schemas.openxmlformats.org/drawingml/2006/diagram" xmlns:o="urn:schemas-microsoft-com:office:office" xmlns:v="urn:schemas-microsoft-com:vml" xmlns:pvml="urn:schemas-microsoft-com:office:powerpoint" xmlns:com="http://schemas.openxmlformats.org/drawingml/2006/compatibility" xmlns:p14="http://schemas.microsoft.com/office/powerpoint/2010/main" xmlns:p15="http://schemas.microsoft.com/office/powerpoint/2012/main" xmlns:ahyp="http://schemas.microsoft.com/office/drawing/2018/hyperlinkcolor" xmlns:go="http://customooxmlschemas.google.com/" r:id="rId48" roundtripDataSignature="AMtx7mihNSh0nE7P5bmNZynwZ07PSv3TUg=="/>
     </p:ext>
   </p:extLst>
 </p:presentation>
@@ -4142,6 +4151,147 @@
   <p:cSld>
     <p:spTree>
       <p:nvGrpSpPr>
+        <p:cNvPr id="1" name="">
+          <a:extLst>
+            <a:ext uri="{FF2B5EF4-FFF2-40B4-BE49-F238E27FC236}">
+              <a16:creationId xmlns:a16="http://schemas.microsoft.com/office/drawing/2014/main" id="{6E351010-B756-7F37-9F44-5D0C90D557E7}"/>
+            </a:ext>
+          </a:extLst>
+        </p:cNvPr>
+        <p:cNvGrpSpPr/>
+        <p:nvPr/>
+      </p:nvGrpSpPr>
+      <p:grpSpPr>
+        <a:xfrm>
+          <a:off x="0" y="0"/>
+          <a:ext cx="0" cy="0"/>
+          <a:chOff x="0" y="0"/>
+          <a:chExt cx="0" cy="0"/>
+        </a:xfrm>
+      </p:grpSpPr>
+      <p:sp>
+        <p:nvSpPr>
+          <p:cNvPr id="2" name="Slide Image Placeholder 1">
+            <a:extLst>
+              <a:ext uri="{FF2B5EF4-FFF2-40B4-BE49-F238E27FC236}">
+                <a16:creationId xmlns:a16="http://schemas.microsoft.com/office/drawing/2014/main" id="{ADD65C73-584C-8C33-6629-E98632E17E9D}"/>
+              </a:ext>
+            </a:extLst>
+          </p:cNvPr>
+          <p:cNvSpPr>
+            <a:spLocks noGrp="1" noRot="1" noChangeAspect="1"/>
+          </p:cNvSpPr>
+          <p:nvPr>
+            <p:ph type="sldImg"/>
+          </p:nvPr>
+        </p:nvSpPr>
+        <p:spPr/>
+      </p:sp>
+      <p:sp>
+        <p:nvSpPr>
+          <p:cNvPr id="3" name="Notes Placeholder 2">
+            <a:extLst>
+              <a:ext uri="{FF2B5EF4-FFF2-40B4-BE49-F238E27FC236}">
+                <a16:creationId xmlns:a16="http://schemas.microsoft.com/office/drawing/2014/main" id="{E800B196-A53B-F9D5-450C-21138450980B}"/>
+              </a:ext>
+            </a:extLst>
+          </p:cNvPr>
+          <p:cNvSpPr>
+            <a:spLocks noGrp="1"/>
+          </p:cNvSpPr>
+          <p:nvPr>
+            <p:ph type="body" idx="1"/>
+          </p:nvPr>
+        </p:nvSpPr>
+        <p:spPr/>
+        <p:txBody>
+          <a:bodyPr/>
+          <a:lstStyle/>
+          <a:p>
+            <a:endParaRPr lang="en-US" dirty="0"/>
+          </a:p>
+        </p:txBody>
+      </p:sp>
+      <p:sp>
+        <p:nvSpPr>
+          <p:cNvPr id="4" name="Slide Number Placeholder 3">
+            <a:extLst>
+              <a:ext uri="{FF2B5EF4-FFF2-40B4-BE49-F238E27FC236}">
+                <a16:creationId xmlns:a16="http://schemas.microsoft.com/office/drawing/2014/main" id="{C839407B-28AD-0588-40AF-0CE0420347A6}"/>
+              </a:ext>
+            </a:extLst>
+          </p:cNvPr>
+          <p:cNvSpPr>
+            <a:spLocks noGrp="1"/>
+          </p:cNvSpPr>
+          <p:nvPr>
+            <p:ph type="sldNum" idx="12"/>
+          </p:nvPr>
+        </p:nvSpPr>
+        <p:spPr/>
+        <p:txBody>
+          <a:bodyPr/>
+          <a:lstStyle/>
+          <a:p>
+            <a:pPr marL="0" marR="0" lvl="0" indent="0" algn="r" rtl="0">
+              <a:lnSpc>
+                <a:spcPct val="100000"/>
+              </a:lnSpc>
+              <a:spcBef>
+                <a:spcPts val="0"/>
+              </a:spcBef>
+              <a:spcAft>
+                <a:spcPts val="0"/>
+              </a:spcAft>
+              <a:buClr>
+                <a:srgbClr val="000000"/>
+              </a:buClr>
+              <a:buSzPts val="1200"/>
+              <a:buFont typeface="Arial"/>
+              <a:buNone/>
+            </a:pPr>
+            <a:fld id="{00000000-1234-1234-1234-123412341234}" type="slidenum">
+              <a:rPr lang="tr-TR" sz="1200" b="0" i="0" u="none" strike="noStrike" cap="none" smtClean="0">
+                <a:solidFill>
+                  <a:schemeClr val="dk1"/>
+                </a:solidFill>
+                <a:latin typeface="Arial"/>
+                <a:ea typeface="Arial"/>
+                <a:cs typeface="Arial"/>
+                <a:sym typeface="Arial"/>
+              </a:rPr>
+              <a:t>23</a:t>
+            </a:fld>
+            <a:endParaRPr lang="tr-TR" sz="1200" b="0" i="0" u="none" strike="noStrike" cap="none" dirty="0">
+              <a:solidFill>
+                <a:schemeClr val="dk1"/>
+              </a:solidFill>
+              <a:latin typeface="Arial"/>
+              <a:ea typeface="Arial"/>
+              <a:cs typeface="Arial"/>
+              <a:sym typeface="Arial"/>
+            </a:endParaRPr>
+          </a:p>
+        </p:txBody>
+      </p:sp>
+    </p:spTree>
+    <p:extLst>
+      <p:ext uri="{BB962C8B-B14F-4D97-AF65-F5344CB8AC3E}">
+        <p14:creationId xmlns:p14="http://schemas.microsoft.com/office/powerpoint/2010/main" val="1539647340"/>
+      </p:ext>
+    </p:extLst>
+  </p:cSld>
+  <p:clrMapOvr>
+    <a:masterClrMapping/>
+  </p:clrMapOvr>
+</p:notes>
+</file>
+
+<file path=ppt/notesSlides/notesSlide21.xml><?xml version="1.0" encoding="utf-8"?>
+<p:notes xmlns:a="http://schemas.openxmlformats.org/drawingml/2006/main" xmlns:r="http://schemas.openxmlformats.org/officeDocument/2006/relationships" xmlns:p="http://schemas.openxmlformats.org/presentationml/2006/main">
+  <p:cSld>
+    <p:spTree>
+      <p:nvGrpSpPr>
         <p:cNvPr id="1" name=""/>
         <p:cNvGrpSpPr/>
         <p:nvPr/>
@@ -4227,7 +4377,7 @@
                 <a:cs typeface="Arial"/>
                 <a:sym typeface="Arial"/>
               </a:rPr>
-              <a:t>24</a:t>
+              <a:t>25</a:t>
             </a:fld>
             <a:endParaRPr lang="tr-TR" sz="1200" b="0" i="0" u="none" strike="noStrike" cap="none" dirty="0">
               <a:solidFill>
@@ -24951,6 +25101,487 @@
   <p:cSld>
     <p:spTree>
       <p:nvGrpSpPr>
+        <p:cNvPr id="1" name="">
+          <a:extLst>
+            <a:ext uri="{FF2B5EF4-FFF2-40B4-BE49-F238E27FC236}">
+              <a16:creationId xmlns:a16="http://schemas.microsoft.com/office/drawing/2014/main" id="{E1E7CBBF-6331-5A3F-20AF-6C34EF6858AD}"/>
+            </a:ext>
+          </a:extLst>
+        </p:cNvPr>
+        <p:cNvGrpSpPr/>
+        <p:nvPr/>
+      </p:nvGrpSpPr>
+      <p:grpSpPr>
+        <a:xfrm>
+          <a:off x="0" y="0"/>
+          <a:ext cx="0" cy="0"/>
+          <a:chOff x="0" y="0"/>
+          <a:chExt cx="0" cy="0"/>
+        </a:xfrm>
+      </p:grpSpPr>
+      <p:sp>
+        <p:nvSpPr>
+          <p:cNvPr id="4" name="TextBox 3">
+            <a:extLst>
+              <a:ext uri="{FF2B5EF4-FFF2-40B4-BE49-F238E27FC236}">
+                <a16:creationId xmlns:a16="http://schemas.microsoft.com/office/drawing/2014/main" id="{3DA8A9CB-E34C-5908-59F0-C2400440B647}"/>
+              </a:ext>
+            </a:extLst>
+          </p:cNvPr>
+          <p:cNvSpPr txBox="1"/>
+          <p:nvPr/>
+        </p:nvSpPr>
+        <p:spPr>
+          <a:xfrm>
+            <a:off x="349445" y="144298"/>
+            <a:ext cx="2821259" cy="400110"/>
+          </a:xfrm>
+          <a:prstGeom prst="rect">
+            <a:avLst/>
+          </a:prstGeom>
+          <a:noFill/>
+        </p:spPr>
+        <p:txBody>
+          <a:bodyPr wrap="square" rtlCol="0">
+            <a:spAutoFit/>
+          </a:bodyPr>
+          <a:lstStyle/>
+          <a:p>
+            <a:r>
+              <a:rPr lang="en-US" sz="2000" b="1" dirty="0">
+                <a:latin typeface="Lexend" panose="020B0604020202020204" charset="-94"/>
+              </a:rPr>
+              <a:t>RESERVATION</a:t>
+            </a:r>
+          </a:p>
+        </p:txBody>
+      </p:sp>
+      <p:sp>
+        <p:nvSpPr>
+          <p:cNvPr id="7" name="TextBox 6">
+            <a:extLst>
+              <a:ext uri="{FF2B5EF4-FFF2-40B4-BE49-F238E27FC236}">
+                <a16:creationId xmlns:a16="http://schemas.microsoft.com/office/drawing/2014/main" id="{62A543A3-FA5D-EB0C-8AEB-37B88439CB5C}"/>
+              </a:ext>
+            </a:extLst>
+          </p:cNvPr>
+          <p:cNvSpPr txBox="1"/>
+          <p:nvPr/>
+        </p:nvSpPr>
+        <p:spPr>
+          <a:xfrm>
+            <a:off x="2554762" y="141859"/>
+            <a:ext cx="4190422" cy="400110"/>
+          </a:xfrm>
+          <a:prstGeom prst="rect">
+            <a:avLst/>
+          </a:prstGeom>
+          <a:noFill/>
+        </p:spPr>
+        <p:txBody>
+          <a:bodyPr wrap="square" rtlCol="0">
+            <a:spAutoFit/>
+          </a:bodyPr>
+          <a:lstStyle/>
+          <a:p>
+            <a:r>
+              <a:rPr lang="en-US" sz="2000" dirty="0">
+                <a:latin typeface="Lexend" panose="020B0604020202020204" charset="-94"/>
+              </a:rPr>
+              <a:t>CALCULATED PROPERTY</a:t>
+            </a:r>
+          </a:p>
+        </p:txBody>
+      </p:sp>
+      <p:sp>
+        <p:nvSpPr>
+          <p:cNvPr id="3" name="TextBox 2">
+            <a:extLst>
+              <a:ext uri="{FF2B5EF4-FFF2-40B4-BE49-F238E27FC236}">
+                <a16:creationId xmlns:a16="http://schemas.microsoft.com/office/drawing/2014/main" id="{27A7197A-3211-DB68-7685-7D3B0166D27D}"/>
+              </a:ext>
+            </a:extLst>
+          </p:cNvPr>
+          <p:cNvSpPr txBox="1"/>
+          <p:nvPr/>
+        </p:nvSpPr>
+        <p:spPr>
+          <a:xfrm>
+            <a:off x="693830" y="1901729"/>
+            <a:ext cx="8149441" cy="1090042"/>
+          </a:xfrm>
+          <a:prstGeom prst="rect">
+            <a:avLst/>
+          </a:prstGeom>
+          <a:noFill/>
+        </p:spPr>
+        <p:txBody>
+          <a:bodyPr wrap="square">
+            <a:spAutoFit/>
+          </a:bodyPr>
+          <a:lstStyle/>
+          <a:p>
+            <a:pPr marL="0" marR="0">
+              <a:lnSpc>
+                <a:spcPts val="1300"/>
+              </a:lnSpc>
+              <a:buNone/>
+            </a:pPr>
+            <a:r>
+              <a:rPr lang="en-US" sz="2800" b="1" dirty="0">
+                <a:effectLst/>
+                <a:latin typeface="Calibri" panose="020F0502020204030204" pitchFamily="34" charset="0"/>
+              </a:rPr>
+              <a:t> </a:t>
+            </a:r>
+          </a:p>
+          <a:p>
+            <a:pPr marL="0" marR="0">
+              <a:buNone/>
+            </a:pPr>
+            <a:r>
+              <a:rPr lang="tr-TR" sz="1800" b="1" dirty="0">
+                <a:solidFill>
+                  <a:srgbClr val="979797"/>
+                </a:solidFill>
+                <a:effectLst/>
+                <a:latin typeface="Consolas" panose="020B0609020204030204" pitchFamily="49" charset="0"/>
+              </a:rPr>
+              <a:t>(</a:t>
+            </a:r>
+            <a:r>
+              <a:rPr lang="en-US" sz="1800" b="1" dirty="0">
+                <a:solidFill>
+                  <a:srgbClr val="3AC0A8"/>
+                </a:solidFill>
+                <a:effectLst/>
+                <a:latin typeface="Consolas" panose="020B0609020204030204" pitchFamily="49" charset="0"/>
+              </a:rPr>
+              <a:t>Year</a:t>
+            </a:r>
+            <a:r>
+              <a:rPr lang="en-US" sz="1800" b="1" dirty="0">
+                <a:solidFill>
+                  <a:srgbClr val="979797"/>
+                </a:solidFill>
+                <a:effectLst/>
+                <a:latin typeface="Consolas" panose="020B0609020204030204" pitchFamily="49" charset="0"/>
+              </a:rPr>
+              <a:t>(</a:t>
+            </a:r>
+            <a:r>
+              <a:rPr lang="en-US" sz="1800" b="1" dirty="0" err="1">
+                <a:solidFill>
+                  <a:srgbClr val="6CA4CF"/>
+                </a:solidFill>
+                <a:effectLst/>
+                <a:latin typeface="Consolas" panose="020B0609020204030204" pitchFamily="49" charset="0"/>
+              </a:rPr>
+              <a:t>CheckoutDate</a:t>
+            </a:r>
+            <a:r>
+              <a:rPr lang="en-US" sz="1800" b="1" dirty="0">
+                <a:solidFill>
+                  <a:srgbClr val="979797"/>
+                </a:solidFill>
+                <a:effectLst/>
+                <a:latin typeface="Consolas" panose="020B0609020204030204" pitchFamily="49" charset="0"/>
+              </a:rPr>
+              <a:t>) - </a:t>
+            </a:r>
+            <a:r>
+              <a:rPr lang="en-US" sz="1800" b="1" dirty="0">
+                <a:solidFill>
+                  <a:srgbClr val="3AC0A8"/>
+                </a:solidFill>
+                <a:effectLst/>
+                <a:latin typeface="Consolas" panose="020B0609020204030204" pitchFamily="49" charset="0"/>
+              </a:rPr>
+              <a:t>Year</a:t>
+            </a:r>
+            <a:r>
+              <a:rPr lang="en-US" sz="1800" b="1" dirty="0">
+                <a:solidFill>
+                  <a:srgbClr val="979797"/>
+                </a:solidFill>
+                <a:effectLst/>
+                <a:latin typeface="Consolas" panose="020B0609020204030204" pitchFamily="49" charset="0"/>
+              </a:rPr>
+              <a:t>(</a:t>
+            </a:r>
+            <a:r>
+              <a:rPr lang="en-US" sz="1800" b="1" dirty="0" err="1">
+                <a:solidFill>
+                  <a:srgbClr val="6CA4CF"/>
+                </a:solidFill>
+                <a:effectLst/>
+                <a:latin typeface="Consolas" panose="020B0609020204030204" pitchFamily="49" charset="0"/>
+              </a:rPr>
+              <a:t>CheckinDate</a:t>
+            </a:r>
+            <a:r>
+              <a:rPr lang="en-US" sz="1800" b="1" dirty="0">
+                <a:solidFill>
+                  <a:srgbClr val="979797"/>
+                </a:solidFill>
+                <a:effectLst/>
+                <a:latin typeface="Consolas" panose="020B0609020204030204" pitchFamily="49" charset="0"/>
+              </a:rPr>
+              <a:t>)) * </a:t>
+            </a:r>
+            <a:r>
+              <a:rPr lang="en-US" sz="1800" b="1" dirty="0">
+                <a:solidFill>
+                  <a:srgbClr val="899C7F"/>
+                </a:solidFill>
+                <a:effectLst/>
+                <a:latin typeface="Consolas" panose="020B0609020204030204" pitchFamily="49" charset="0"/>
+              </a:rPr>
+              <a:t>365</a:t>
+            </a:r>
+            <a:endParaRPr lang="en-US" sz="1800" b="1" dirty="0">
+              <a:effectLst/>
+              <a:latin typeface="Consolas" panose="020B0609020204030204" pitchFamily="49" charset="0"/>
+            </a:endParaRPr>
+          </a:p>
+          <a:p>
+            <a:pPr marL="0" marR="0">
+              <a:buNone/>
+            </a:pPr>
+            <a:r>
+              <a:rPr lang="tr-TR" sz="1800" b="1" dirty="0">
+                <a:solidFill>
+                  <a:srgbClr val="979797"/>
+                </a:solidFill>
+                <a:effectLst/>
+                <a:latin typeface="Consolas" panose="020B0609020204030204" pitchFamily="49" charset="0"/>
+              </a:rPr>
+              <a:t>+ </a:t>
+            </a:r>
+            <a:r>
+              <a:rPr lang="en-US" sz="1800" b="1" dirty="0">
+                <a:solidFill>
+                  <a:srgbClr val="979797"/>
+                </a:solidFill>
+                <a:effectLst/>
+                <a:latin typeface="Consolas" panose="020B0609020204030204" pitchFamily="49" charset="0"/>
+              </a:rPr>
+              <a:t>(</a:t>
+            </a:r>
+            <a:r>
+              <a:rPr lang="en-US" sz="1800" b="1" dirty="0">
+                <a:solidFill>
+                  <a:srgbClr val="3AC0A8"/>
+                </a:solidFill>
+                <a:effectLst/>
+                <a:latin typeface="Consolas" panose="020B0609020204030204" pitchFamily="49" charset="0"/>
+              </a:rPr>
+              <a:t>Month</a:t>
+            </a:r>
+            <a:r>
+              <a:rPr lang="en-US" sz="1800" b="1" dirty="0">
+                <a:solidFill>
+                  <a:srgbClr val="979797"/>
+                </a:solidFill>
+                <a:effectLst/>
+                <a:latin typeface="Consolas" panose="020B0609020204030204" pitchFamily="49" charset="0"/>
+              </a:rPr>
+              <a:t>(</a:t>
+            </a:r>
+            <a:r>
+              <a:rPr lang="en-US" sz="1800" b="1" dirty="0" err="1">
+                <a:solidFill>
+                  <a:srgbClr val="6CA4CF"/>
+                </a:solidFill>
+                <a:effectLst/>
+                <a:latin typeface="Consolas" panose="020B0609020204030204" pitchFamily="49" charset="0"/>
+              </a:rPr>
+              <a:t>CheckoutDate</a:t>
+            </a:r>
+            <a:r>
+              <a:rPr lang="en-US" sz="1800" b="1" dirty="0">
+                <a:solidFill>
+                  <a:srgbClr val="979797"/>
+                </a:solidFill>
+                <a:effectLst/>
+                <a:latin typeface="Consolas" panose="020B0609020204030204" pitchFamily="49" charset="0"/>
+              </a:rPr>
+              <a:t>) - </a:t>
+            </a:r>
+            <a:r>
+              <a:rPr lang="en-US" sz="1800" b="1" dirty="0">
+                <a:solidFill>
+                  <a:srgbClr val="3AC0A8"/>
+                </a:solidFill>
+                <a:effectLst/>
+                <a:latin typeface="Consolas" panose="020B0609020204030204" pitchFamily="49" charset="0"/>
+              </a:rPr>
+              <a:t>Month</a:t>
+            </a:r>
+            <a:r>
+              <a:rPr lang="en-US" sz="1800" b="1" dirty="0">
+                <a:solidFill>
+                  <a:srgbClr val="979797"/>
+                </a:solidFill>
+                <a:effectLst/>
+                <a:latin typeface="Consolas" panose="020B0609020204030204" pitchFamily="49" charset="0"/>
+              </a:rPr>
+              <a:t>(</a:t>
+            </a:r>
+            <a:r>
+              <a:rPr lang="en-US" sz="1800" b="1" dirty="0" err="1">
+                <a:solidFill>
+                  <a:srgbClr val="6CA4CF"/>
+                </a:solidFill>
+                <a:effectLst/>
+                <a:latin typeface="Consolas" panose="020B0609020204030204" pitchFamily="49" charset="0"/>
+              </a:rPr>
+              <a:t>CheckinDate</a:t>
+            </a:r>
+            <a:r>
+              <a:rPr lang="en-US" sz="1800" b="1" dirty="0">
+                <a:solidFill>
+                  <a:srgbClr val="979797"/>
+                </a:solidFill>
+                <a:effectLst/>
+                <a:latin typeface="Consolas" panose="020B0609020204030204" pitchFamily="49" charset="0"/>
+              </a:rPr>
+              <a:t>)) * </a:t>
+            </a:r>
+            <a:r>
+              <a:rPr lang="en-US" sz="1800" b="1" dirty="0">
+                <a:solidFill>
+                  <a:srgbClr val="899C7F"/>
+                </a:solidFill>
+                <a:effectLst/>
+                <a:latin typeface="Consolas" panose="020B0609020204030204" pitchFamily="49" charset="0"/>
+              </a:rPr>
+              <a:t>30</a:t>
+            </a:r>
+            <a:endParaRPr lang="en-US" sz="1800" b="1" dirty="0">
+              <a:effectLst/>
+              <a:latin typeface="Consolas" panose="020B0609020204030204" pitchFamily="49" charset="0"/>
+            </a:endParaRPr>
+          </a:p>
+          <a:p>
+            <a:pPr marL="0" marR="0">
+              <a:buNone/>
+            </a:pPr>
+            <a:r>
+              <a:rPr lang="tr-TR" sz="1800" b="1" dirty="0">
+                <a:solidFill>
+                  <a:srgbClr val="979797"/>
+                </a:solidFill>
+                <a:effectLst/>
+                <a:latin typeface="Consolas" panose="020B0609020204030204" pitchFamily="49" charset="0"/>
+              </a:rPr>
+              <a:t>+ </a:t>
+            </a:r>
+            <a:r>
+              <a:rPr lang="en-US" sz="1800" b="1" dirty="0">
+                <a:solidFill>
+                  <a:srgbClr val="3AC0A8"/>
+                </a:solidFill>
+                <a:effectLst/>
+                <a:latin typeface="Consolas" panose="020B0609020204030204" pitchFamily="49" charset="0"/>
+              </a:rPr>
+              <a:t>Day</a:t>
+            </a:r>
+            <a:r>
+              <a:rPr lang="en-US" sz="1800" b="1" dirty="0">
+                <a:solidFill>
+                  <a:srgbClr val="979797"/>
+                </a:solidFill>
+                <a:effectLst/>
+                <a:latin typeface="Consolas" panose="020B0609020204030204" pitchFamily="49" charset="0"/>
+              </a:rPr>
+              <a:t>(</a:t>
+            </a:r>
+            <a:r>
+              <a:rPr lang="en-US" sz="1800" b="1" dirty="0" err="1">
+                <a:solidFill>
+                  <a:srgbClr val="6CA4CF"/>
+                </a:solidFill>
+                <a:effectLst/>
+                <a:latin typeface="Consolas" panose="020B0609020204030204" pitchFamily="49" charset="0"/>
+              </a:rPr>
+              <a:t>CheckoutDate</a:t>
+            </a:r>
+            <a:r>
+              <a:rPr lang="en-US" sz="1800" b="1" dirty="0">
+                <a:solidFill>
+                  <a:srgbClr val="979797"/>
+                </a:solidFill>
+                <a:effectLst/>
+                <a:latin typeface="Consolas" panose="020B0609020204030204" pitchFamily="49" charset="0"/>
+              </a:rPr>
+              <a:t>) - </a:t>
+            </a:r>
+            <a:r>
+              <a:rPr lang="en-US" sz="1800" b="1" dirty="0">
+                <a:solidFill>
+                  <a:srgbClr val="3AC0A8"/>
+                </a:solidFill>
+                <a:effectLst/>
+                <a:latin typeface="Consolas" panose="020B0609020204030204" pitchFamily="49" charset="0"/>
+              </a:rPr>
+              <a:t>Day</a:t>
+            </a:r>
+            <a:r>
+              <a:rPr lang="en-US" sz="1800" b="1" dirty="0">
+                <a:solidFill>
+                  <a:srgbClr val="979797"/>
+                </a:solidFill>
+                <a:effectLst/>
+                <a:latin typeface="Consolas" panose="020B0609020204030204" pitchFamily="49" charset="0"/>
+              </a:rPr>
+              <a:t>(</a:t>
+            </a:r>
+            <a:r>
+              <a:rPr lang="en-US" sz="1800" b="1" dirty="0" err="1">
+                <a:solidFill>
+                  <a:srgbClr val="6CA4CF"/>
+                </a:solidFill>
+                <a:effectLst/>
+                <a:latin typeface="Consolas" panose="020B0609020204030204" pitchFamily="49" charset="0"/>
+              </a:rPr>
+              <a:t>CheckinDate</a:t>
+            </a:r>
+            <a:r>
+              <a:rPr lang="en-US" sz="1800" b="1" dirty="0">
+                <a:solidFill>
+                  <a:srgbClr val="979797"/>
+                </a:solidFill>
+                <a:effectLst/>
+                <a:latin typeface="Consolas" panose="020B0609020204030204" pitchFamily="49" charset="0"/>
+              </a:rPr>
+              <a:t>)</a:t>
+            </a:r>
+            <a:endParaRPr lang="en-US" sz="1800" b="1" dirty="0">
+              <a:effectLst/>
+              <a:latin typeface="Consolas" panose="020B0609020204030204" pitchFamily="49" charset="0"/>
+            </a:endParaRPr>
+          </a:p>
+        </p:txBody>
+      </p:sp>
+    </p:spTree>
+    <p:extLst>
+      <p:ext uri="{BB962C8B-B14F-4D97-AF65-F5344CB8AC3E}">
+        <p14:creationId xmlns:p14="http://schemas.microsoft.com/office/powerpoint/2010/main" val="2117150919"/>
+      </p:ext>
+    </p:extLst>
+  </p:cSld>
+  <p:clrMapOvr>
+    <a:masterClrMapping/>
+  </p:clrMapOvr>
+</p:sld>
+</file>
+
+<file path=ppt/slides/slide24.xml><?xml version="1.0" encoding="utf-8"?>
+<p:sld xmlns:a="http://schemas.openxmlformats.org/drawingml/2006/main" xmlns:r="http://schemas.openxmlformats.org/officeDocument/2006/relationships" xmlns:p="http://schemas.openxmlformats.org/presentationml/2006/main">
+  <p:cSld>
+    <p:spTree>
+      <p:nvGrpSpPr>
         <p:cNvPr id="1" name=""/>
         <p:cNvGrpSpPr/>
         <p:nvPr/>
@@ -25274,7 +25905,7 @@
 </p:sld>
 </file>
 
-<file path=ppt/slides/slide24.xml><?xml version="1.0" encoding="utf-8"?>
+<file path=ppt/slides/slide25.xml><?xml version="1.0" encoding="utf-8"?>
 <p:sld xmlns:a="http://schemas.openxmlformats.org/drawingml/2006/main" xmlns:r="http://schemas.openxmlformats.org/officeDocument/2006/relationships" xmlns:p="http://schemas.openxmlformats.org/presentationml/2006/main">
   <p:cSld>
     <p:spTree>
